--- a/content/05-teaching-resources/slides/core/10-legislation-and-guidelines.pptx
+++ b/content/05-teaching-resources/slides/core/10-legislation-and-guidelines.pptx
@@ -10,10 +10,16 @@
     <p:sldId id="258" r:id="rId9"/>
     <p:sldId id="259" r:id="rId10"/>
     <p:sldId id="260" r:id="rId11"/>
-    <p:sldId id="261" r:id="rId12"/>
+    <p:sldId id="261" r:id="rId13"/>
     <p:sldId id="262" r:id="rId14"/>
     <p:sldId id="263" r:id="rId15"/>
     <p:sldId id="264" r:id="rId16"/>
+    <p:sldId id="265" r:id="rId17"/>
+    <p:sldId id="266" r:id="rId18"/>
+    <p:sldId id="267" r:id="rId19"/>
+    <p:sldId id="268" r:id="rId20"/>
+    <p:sldId id="269" r:id="rId21"/>
+    <p:sldId id="270" r:id="rId22"/>
   </p:sldIdLst>
   <p:sldSz cx="12191695" cy="6858000" type="screen4x3"/>
   <p:notesSz cx="6858000" cy="9144000"/>
@@ -510,7 +516,22 @@
           <a:lstStyle/>
           <a:p>
             <a:r>
-              <a:t>Give students a few minutes to answer on mini whiteboards or paper, then reveal the answers on the next slide.</a:t>
+              <a:t>Answers:</a:t>
+            </a:r>
+          </a:p>
+          <a:p>
+            <a:r>
+              <a:t>1. An eye test.</a:t>
+            </a:r>
+          </a:p>
+          <a:p>
+            <a:r>
+              <a:t>2. E.g. eye strain, back, neck or wrist pain.</a:t>
+            </a:r>
+          </a:p>
+          <a:p>
+            <a:r>
+              <a:t>3. E.g. chair, screen height, lighting.</a:t>
             </a:r>
           </a:p>
         </p:txBody>
@@ -580,7 +601,22 @@
           <a:lstStyle/>
           <a:p>
             <a:r>
-              <a:t>Talk through any answers the class found difficult.</a:t>
+              <a:t>Answers:</a:t>
+            </a:r>
+          </a:p>
+          <a:p>
+            <a:r>
+              <a:t>1. The Data Protection Act / UK GDPR.</a:t>
+            </a:r>
+          </a:p>
+          <a:p>
+            <a:r>
+              <a:t>2. Unauthorised access and damaging systems.</a:t>
+            </a:r>
+          </a:p>
+          <a:p>
+            <a:r>
+              <a:t>3. Nine.</a:t>
             </a:r>
           </a:p>
         </p:txBody>
@@ -606,6 +642,231 @@
 </file>
 
 <file path=ppt/notesSlides/notesSlide3.xml><?xml version="1.0" encoding="utf-8"?>
+<p:notes xmlns:a="http://schemas.openxmlformats.org/drawingml/2006/main" xmlns:p="http://schemas.openxmlformats.org/presentationml/2006/main" xmlns:r="http://schemas.openxmlformats.org/officeDocument/2006/relationships">
+  <p:cSld>
+    <p:spTree>
+      <p:nvGrpSpPr>
+        <p:cNvPr id="1" name=""/>
+        <p:cNvGrpSpPr/>
+        <p:nvPr/>
+      </p:nvGrpSpPr>
+      <p:grpSpPr>
+        <a:xfrm>
+          <a:off x="0" y="0"/>
+          <a:ext cx="0" cy="0"/>
+          <a:chOff x="0" y="0"/>
+          <a:chExt cx="0" cy="0"/>
+        </a:xfrm>
+      </p:grpSpPr>
+      <p:sp>
+        <p:nvSpPr>
+          <p:cNvPr id="2" name="Slide Image Placeholder 1"/>
+          <p:cNvSpPr>
+            <a:spLocks noGrp="1"/>
+          </p:cNvSpPr>
+          <p:nvPr>
+            <p:ph type="sldImg" idx="2"/>
+          </p:nvPr>
+        </p:nvSpPr>
+        <p:spPr/>
+      </p:sp>
+      <p:sp>
+        <p:nvSpPr>
+          <p:cNvPr id="3" name="Notes Placeholder 2"/>
+          <p:cNvSpPr>
+            <a:spLocks noGrp="1"/>
+          </p:cNvSpPr>
+          <p:nvPr>
+            <p:ph type="body" idx="3" sz="quarter"/>
+          </p:nvPr>
+        </p:nvSpPr>
+        <p:spPr/>
+        <p:txBody>
+          <a:bodyPr/>
+          <a:lstStyle/>
+          <a:p>
+            <a:r>
+              <a:t>Answers:</a:t>
+            </a:r>
+          </a:p>
+          <a:p>
+            <a:r>
+              <a:t>1. WCAG.</a:t>
+            </a:r>
+          </a:p>
+          <a:p>
+            <a:r>
+              <a:t>2. E.g. BCS, IAP.</a:t>
+            </a:r>
+          </a:p>
+          <a:p>
+            <a:r>
+              <a:t>3. Safely reporting wrongdoing in an organisation.</a:t>
+            </a:r>
+          </a:p>
+        </p:txBody>
+      </p:sp>
+      <p:sp>
+        <p:nvSpPr>
+          <p:cNvPr id="4" name="Slide Number Placeholder 3"/>
+          <p:cNvSpPr>
+            <a:spLocks noGrp="1"/>
+          </p:cNvSpPr>
+          <p:nvPr>
+            <p:ph type="sldNum" idx="5" sz="quarter"/>
+          </p:nvPr>
+        </p:nvSpPr>
+        <p:spPr/>
+      </p:sp>
+    </p:spTree>
+  </p:cSld>
+  <p:clrMapOvr>
+    <a:masterClrMapping/>
+  </p:clrMapOvr>
+</p:notes>
+</file>
+
+<file path=ppt/notesSlides/notesSlide4.xml><?xml version="1.0" encoding="utf-8"?>
+<p:notes xmlns:a="http://schemas.openxmlformats.org/drawingml/2006/main" xmlns:p="http://schemas.openxmlformats.org/presentationml/2006/main" xmlns:r="http://schemas.openxmlformats.org/officeDocument/2006/relationships">
+  <p:cSld>
+    <p:spTree>
+      <p:nvGrpSpPr>
+        <p:cNvPr id="1" name=""/>
+        <p:cNvGrpSpPr/>
+        <p:nvPr/>
+      </p:nvGrpSpPr>
+      <p:grpSpPr>
+        <a:xfrm>
+          <a:off x="0" y="0"/>
+          <a:ext cx="0" cy="0"/>
+          <a:chOff x="0" y="0"/>
+          <a:chExt cx="0" cy="0"/>
+        </a:xfrm>
+      </p:grpSpPr>
+      <p:sp>
+        <p:nvSpPr>
+          <p:cNvPr id="2" name="Slide Image Placeholder 1"/>
+          <p:cNvSpPr>
+            <a:spLocks noGrp="1"/>
+          </p:cNvSpPr>
+          <p:nvPr>
+            <p:ph type="sldImg" idx="2"/>
+          </p:nvPr>
+        </p:nvSpPr>
+        <p:spPr/>
+      </p:sp>
+      <p:sp>
+        <p:nvSpPr>
+          <p:cNvPr id="3" name="Notes Placeholder 2"/>
+          <p:cNvSpPr>
+            <a:spLocks noGrp="1"/>
+          </p:cNvSpPr>
+          <p:nvPr>
+            <p:ph type="body" idx="3" sz="quarter"/>
+          </p:nvPr>
+        </p:nvSpPr>
+        <p:spPr/>
+        <p:txBody>
+          <a:bodyPr/>
+          <a:lstStyle/>
+          <a:p>
+            <a:r>
+              <a:t>Give students a few minutes to answer on mini whiteboards or paper, then reveal the answers on the next slide.</a:t>
+            </a:r>
+          </a:p>
+        </p:txBody>
+      </p:sp>
+      <p:sp>
+        <p:nvSpPr>
+          <p:cNvPr id="4" name="Slide Number Placeholder 3"/>
+          <p:cNvSpPr>
+            <a:spLocks noGrp="1"/>
+          </p:cNvSpPr>
+          <p:nvPr>
+            <p:ph type="sldNum" idx="5" sz="quarter"/>
+          </p:nvPr>
+        </p:nvSpPr>
+        <p:spPr/>
+      </p:sp>
+    </p:spTree>
+  </p:cSld>
+  <p:clrMapOvr>
+    <a:masterClrMapping/>
+  </p:clrMapOvr>
+</p:notes>
+</file>
+
+<file path=ppt/notesSlides/notesSlide5.xml><?xml version="1.0" encoding="utf-8"?>
+<p:notes xmlns:a="http://schemas.openxmlformats.org/drawingml/2006/main" xmlns:p="http://schemas.openxmlformats.org/presentationml/2006/main" xmlns:r="http://schemas.openxmlformats.org/officeDocument/2006/relationships">
+  <p:cSld>
+    <p:spTree>
+      <p:nvGrpSpPr>
+        <p:cNvPr id="1" name=""/>
+        <p:cNvGrpSpPr/>
+        <p:nvPr/>
+      </p:nvGrpSpPr>
+      <p:grpSpPr>
+        <a:xfrm>
+          <a:off x="0" y="0"/>
+          <a:ext cx="0" cy="0"/>
+          <a:chOff x="0" y="0"/>
+          <a:chExt cx="0" cy="0"/>
+        </a:xfrm>
+      </p:grpSpPr>
+      <p:sp>
+        <p:nvSpPr>
+          <p:cNvPr id="2" name="Slide Image Placeholder 1"/>
+          <p:cNvSpPr>
+            <a:spLocks noGrp="1"/>
+          </p:cNvSpPr>
+          <p:nvPr>
+            <p:ph type="sldImg" idx="2"/>
+          </p:nvPr>
+        </p:nvSpPr>
+        <p:spPr/>
+      </p:sp>
+      <p:sp>
+        <p:nvSpPr>
+          <p:cNvPr id="3" name="Notes Placeholder 2"/>
+          <p:cNvSpPr>
+            <a:spLocks noGrp="1"/>
+          </p:cNvSpPr>
+          <p:nvPr>
+            <p:ph type="body" idx="3" sz="quarter"/>
+          </p:nvPr>
+        </p:nvSpPr>
+        <p:spPr/>
+        <p:txBody>
+          <a:bodyPr/>
+          <a:lstStyle/>
+          <a:p>
+            <a:r>
+              <a:t>Talk through any answers the class found difficult.</a:t>
+            </a:r>
+          </a:p>
+        </p:txBody>
+      </p:sp>
+      <p:sp>
+        <p:nvSpPr>
+          <p:cNvPr id="4" name="Slide Number Placeholder 3"/>
+          <p:cNvSpPr>
+            <a:spLocks noGrp="1"/>
+          </p:cNvSpPr>
+          <p:nvPr>
+            <p:ph type="sldNum" idx="5" sz="quarter"/>
+          </p:nvPr>
+        </p:nvSpPr>
+        <p:spPr/>
+      </p:sp>
+    </p:spTree>
+  </p:cSld>
+  <p:clrMapOvr>
+    <a:masterClrMapping/>
+  </p:clrMapOvr>
+</p:notes>
+</file>
+
+<file path=ppt/notesSlides/notesSlide6.xml><?xml version="1.0" encoding="utf-8"?>
 <p:notes xmlns:a="http://schemas.openxmlformats.org/drawingml/2006/main" xmlns:p="http://schemas.openxmlformats.org/presentationml/2006/main" xmlns:r="http://schemas.openxmlformats.org/officeDocument/2006/relationships">
   <p:cSld>
     <p:spTree>
@@ -3975,6 +4236,3424 @@
 </p:sld>
 </file>
 
+<file path=ppt/slides/slide10.xml><?xml version="1.0" encoding="utf-8"?>
+<p:sld xmlns:a="http://schemas.openxmlformats.org/drawingml/2006/main" xmlns:p="http://schemas.openxmlformats.org/presentationml/2006/main" xmlns:r="http://schemas.openxmlformats.org/officeDocument/2006/relationships">
+  <p:cSld>
+    <p:bg>
+      <p:bgPr>
+        <a:solidFill>
+          <a:srgbClr val="FFFFFF"/>
+        </a:solidFill>
+        <a:effectLst/>
+      </p:bgPr>
+    </p:bg>
+    <p:spTree>
+      <p:nvGrpSpPr>
+        <p:cNvPr id="1" name=""/>
+        <p:cNvGrpSpPr/>
+        <p:nvPr/>
+      </p:nvGrpSpPr>
+      <p:grpSpPr/>
+      <p:sp>
+        <p:nvSpPr>
+          <p:cNvPr id="2" name="TextBox 1"/>
+          <p:cNvSpPr txBox="1"/>
+          <p:nvPr/>
+        </p:nvSpPr>
+        <p:spPr>
+          <a:xfrm>
+            <a:off x="548640" y="320040"/>
+            <a:ext cx="11094415" cy="274320"/>
+          </a:xfrm>
+          <a:prstGeom prst="rect">
+            <a:avLst/>
+          </a:prstGeom>
+          <a:noFill/>
+        </p:spPr>
+        <p:txBody>
+          <a:bodyPr wrap="square" anchor="t" lIns="0" rIns="0" tIns="0" bIns="0"/>
+          <a:lstStyle/>
+          <a:p>
+            <a:pPr algn="l"/>
+            <a:r>
+              <a:rPr sz="1100" b="1" i="0">
+                <a:solidFill>
+                  <a:srgbClr val="54595D"/>
+                </a:solidFill>
+                <a:latin typeface="Calibri"/>
+              </a:rPr>
+              <a:t>CORE COMPONENT  ·  Core Paper 1</a:t>
+            </a:r>
+          </a:p>
+        </p:txBody>
+      </p:sp>
+      <p:sp>
+        <p:nvSpPr>
+          <p:cNvPr id="3" name="TextBox 2"/>
+          <p:cNvSpPr txBox="1"/>
+          <p:nvPr/>
+        </p:nvSpPr>
+        <p:spPr>
+          <a:xfrm>
+            <a:off x="548640" y="566928"/>
+            <a:ext cx="11094415" cy="822960"/>
+          </a:xfrm>
+          <a:prstGeom prst="rect">
+            <a:avLst/>
+          </a:prstGeom>
+          <a:noFill/>
+        </p:spPr>
+        <p:txBody>
+          <a:bodyPr wrap="square" anchor="ctr" lIns="0" rIns="0" tIns="0" bIns="0"/>
+          <a:lstStyle/>
+          <a:p>
+            <a:pPr algn="l"/>
+            <a:r>
+              <a:rPr sz="3200" b="1" i="0">
+                <a:solidFill>
+                  <a:srgbClr val="03306E"/>
+                </a:solidFill>
+                <a:latin typeface="Cambria"/>
+              </a:rPr>
+              <a:t>Guidelines</a:t>
+            </a:r>
+          </a:p>
+        </p:txBody>
+      </p:sp>
+      <p:sp>
+        <p:nvSpPr>
+          <p:cNvPr id="4" name="TextBox 3"/>
+          <p:cNvSpPr txBox="1"/>
+          <p:nvPr/>
+        </p:nvSpPr>
+        <p:spPr>
+          <a:xfrm>
+            <a:off x="548640" y="6446520"/>
+            <a:ext cx="8229600" cy="274320"/>
+          </a:xfrm>
+          <a:prstGeom prst="rect">
+            <a:avLst/>
+          </a:prstGeom>
+          <a:noFill/>
+        </p:spPr>
+        <p:txBody>
+          <a:bodyPr wrap="square" anchor="t" lIns="0" rIns="0" tIns="0" bIns="0"/>
+          <a:lstStyle/>
+          <a:p>
+            <a:pPr algn="l"/>
+            <a:r>
+              <a:rPr sz="1000" b="0" i="0">
+                <a:solidFill>
+                  <a:srgbClr val="54595D"/>
+                </a:solidFill>
+                <a:latin typeface="Calibri"/>
+              </a:rPr>
+              <a:t>Digital Software Development T Level  ·  Legislation and Guidelines</a:t>
+            </a:r>
+          </a:p>
+        </p:txBody>
+      </p:sp>
+      <p:sp>
+        <p:nvSpPr>
+          <p:cNvPr id="5" name="TextBox 4"/>
+          <p:cNvSpPr txBox="1"/>
+          <p:nvPr/>
+        </p:nvSpPr>
+        <p:spPr>
+          <a:xfrm>
+            <a:off x="10728655" y="6446520"/>
+            <a:ext cx="914400" cy="274320"/>
+          </a:xfrm>
+          <a:prstGeom prst="rect">
+            <a:avLst/>
+          </a:prstGeom>
+          <a:noFill/>
+        </p:spPr>
+        <p:txBody>
+          <a:bodyPr wrap="square" anchor="t" lIns="0" rIns="0" tIns="0" bIns="0"/>
+          <a:lstStyle/>
+          <a:p>
+            <a:pPr algn="r"/>
+            <a:r>
+              <a:rPr sz="1000" b="0" i="0">
+                <a:solidFill>
+                  <a:srgbClr val="54595D"/>
+                </a:solidFill>
+                <a:latin typeface="Calibri"/>
+              </a:rPr>
+              <a:t>10</a:t>
+            </a:r>
+          </a:p>
+        </p:txBody>
+      </p:sp>
+      <p:sp>
+        <p:nvSpPr>
+          <p:cNvPr id="6" name="Rounded Rectangle 5"/>
+          <p:cNvSpPr/>
+          <p:nvPr/>
+        </p:nvSpPr>
+        <p:spPr>
+          <a:xfrm>
+            <a:off x="548640" y="1600200"/>
+            <a:ext cx="5364327" cy="640080"/>
+          </a:xfrm>
+          <a:prstGeom prst="roundRect">
+            <a:avLst>
+              <a:gd name="adj" fmla="val 15000"/>
+            </a:avLst>
+          </a:prstGeom>
+          <a:solidFill>
+            <a:srgbClr val="03306E"/>
+          </a:solidFill>
+          <a:ln>
+            <a:noFill/>
+          </a:ln>
+          <a:effectLst/>
+        </p:spPr>
+        <p:style>
+          <a:lnRef idx="1">
+            <a:schemeClr val="accent1"/>
+          </a:lnRef>
+          <a:fillRef idx="3">
+            <a:schemeClr val="accent1"/>
+          </a:fillRef>
+          <a:effectRef idx="2">
+            <a:schemeClr val="accent1"/>
+          </a:effectRef>
+          <a:fontRef idx="minor">
+            <a:schemeClr val="lt1"/>
+          </a:fontRef>
+        </p:style>
+        <p:txBody>
+          <a:bodyPr rtlCol="0" anchor="ctr"/>
+          <a:lstStyle/>
+          <a:p/>
+        </p:txBody>
+      </p:sp>
+      <p:sp>
+        <p:nvSpPr>
+          <p:cNvPr id="7" name="TextBox 6"/>
+          <p:cNvSpPr txBox="1"/>
+          <p:nvPr/>
+        </p:nvSpPr>
+        <p:spPr>
+          <a:xfrm>
+            <a:off x="777240" y="1600200"/>
+            <a:ext cx="4907127" cy="640080"/>
+          </a:xfrm>
+          <a:prstGeom prst="rect">
+            <a:avLst/>
+          </a:prstGeom>
+          <a:noFill/>
+        </p:spPr>
+        <p:txBody>
+          <a:bodyPr wrap="square" anchor="ctr" lIns="0" rIns="0" tIns="0" bIns="0"/>
+          <a:lstStyle/>
+          <a:p>
+            <a:pPr algn="l"/>
+            <a:r>
+              <a:rPr sz="2000" b="1" i="0">
+                <a:solidFill>
+                  <a:srgbClr val="FFFFFF"/>
+                </a:solidFill>
+                <a:latin typeface="Calibri"/>
+              </a:rPr>
+              <a:t>Codes of conduct</a:t>
+            </a:r>
+          </a:p>
+        </p:txBody>
+      </p:sp>
+      <p:sp>
+        <p:nvSpPr>
+          <p:cNvPr id="8" name="Rounded Rectangle 7"/>
+          <p:cNvSpPr/>
+          <p:nvPr/>
+        </p:nvSpPr>
+        <p:spPr>
+          <a:xfrm>
+            <a:off x="548640" y="2377440"/>
+            <a:ext cx="5364327" cy="3794760"/>
+          </a:xfrm>
+          <a:prstGeom prst="roundRect">
+            <a:avLst>
+              <a:gd name="adj" fmla="val 4000"/>
+            </a:avLst>
+          </a:prstGeom>
+          <a:solidFill>
+            <a:srgbClr val="EAF3FF"/>
+          </a:solidFill>
+          <a:ln>
+            <a:noFill/>
+          </a:ln>
+          <a:effectLst/>
+        </p:spPr>
+        <p:style>
+          <a:lnRef idx="1">
+            <a:schemeClr val="accent1"/>
+          </a:lnRef>
+          <a:fillRef idx="3">
+            <a:schemeClr val="accent1"/>
+          </a:fillRef>
+          <a:effectRef idx="2">
+            <a:schemeClr val="accent1"/>
+          </a:effectRef>
+          <a:fontRef idx="minor">
+            <a:schemeClr val="lt1"/>
+          </a:fontRef>
+        </p:style>
+        <p:txBody>
+          <a:bodyPr rtlCol="0" anchor="ctr"/>
+          <a:lstStyle/>
+          <a:p/>
+        </p:txBody>
+      </p:sp>
+      <p:sp>
+        <p:nvSpPr>
+          <p:cNvPr id="9" name="TextBox 8"/>
+          <p:cNvSpPr txBox="1"/>
+          <p:nvPr/>
+        </p:nvSpPr>
+        <p:spPr>
+          <a:xfrm>
+            <a:off x="822959" y="2606040"/>
+            <a:ext cx="4815687" cy="3337560"/>
+          </a:xfrm>
+          <a:prstGeom prst="rect">
+            <a:avLst/>
+          </a:prstGeom>
+          <a:noFill/>
+        </p:spPr>
+        <p:txBody>
+          <a:bodyPr wrap="square" lIns="0" rIns="0" tIns="0" bIns="0">
+            <a:spAutoFit/>
+          </a:bodyPr>
+          <a:lstStyle/>
+          <a:p>
+            <a:pPr marL="274320" indent="-274320">
+              <a:spcAft>
+                <a:spcPts val="990"/>
+              </a:spcAft>
+              <a:buClr>
+                <a:srgbClr val="0645AD"/>
+              </a:buClr>
+              <a:buFont typeface="Arial"/>
+              <a:buChar char="•"/>
+            </a:pPr>
+            <a:r>
+              <a:rPr sz="2200" b="0">
+                <a:solidFill>
+                  <a:srgbClr val="202122"/>
+                </a:solidFill>
+                <a:latin typeface="Calibri"/>
+              </a:rPr>
+              <a:t>Organisational, professional (BCS, IAP, CIISec) and governmental</a:t>
+            </a:r>
+          </a:p>
+          <a:p>
+            <a:pPr marL="274320" indent="-274320">
+              <a:spcAft>
+                <a:spcPts val="990"/>
+              </a:spcAft>
+              <a:buClr>
+                <a:srgbClr val="0645AD"/>
+              </a:buClr>
+              <a:buFont typeface="Arial"/>
+              <a:buChar char="•"/>
+            </a:pPr>
+            <a:r>
+              <a:rPr sz="2200" b="0">
+                <a:solidFill>
+                  <a:srgbClr val="202122"/>
+                </a:solidFill>
+                <a:latin typeface="Calibri"/>
+              </a:rPr>
+              <a:t>Follow policy and law; minimise risk to the public</a:t>
+            </a:r>
+          </a:p>
+          <a:p>
+            <a:pPr marL="274320" indent="-274320">
+              <a:spcAft>
+                <a:spcPts val="990"/>
+              </a:spcAft>
+              <a:buClr>
+                <a:srgbClr val="0645AD"/>
+              </a:buClr>
+              <a:buFont typeface="Arial"/>
+              <a:buChar char="•"/>
+            </a:pPr>
+            <a:r>
+              <a:rPr sz="2200" b="0">
+                <a:solidFill>
+                  <a:srgbClr val="202122"/>
+                </a:solidFill>
+                <a:latin typeface="Calibri"/>
+              </a:rPr>
+              <a:t>Competence, integrity and meeting deadlines</a:t>
+            </a:r>
+          </a:p>
+          <a:p>
+            <a:pPr marL="274320" indent="-274320">
+              <a:spcAft>
+                <a:spcPts val="990"/>
+              </a:spcAft>
+              <a:buClr>
+                <a:srgbClr val="0645AD"/>
+              </a:buClr>
+              <a:buFont typeface="Arial"/>
+              <a:buChar char="•"/>
+            </a:pPr>
+            <a:r>
+              <a:rPr sz="2200" b="0">
+                <a:solidFill>
+                  <a:srgbClr val="202122"/>
+                </a:solidFill>
+                <a:latin typeface="Calibri"/>
+              </a:rPr>
+              <a:t>Confidentiality and trust</a:t>
+            </a:r>
+          </a:p>
+        </p:txBody>
+      </p:sp>
+      <p:sp>
+        <p:nvSpPr>
+          <p:cNvPr id="10" name="Rounded Rectangle 9"/>
+          <p:cNvSpPr/>
+          <p:nvPr/>
+        </p:nvSpPr>
+        <p:spPr>
+          <a:xfrm>
+            <a:off x="6278727" y="1600200"/>
+            <a:ext cx="5364327" cy="640080"/>
+          </a:xfrm>
+          <a:prstGeom prst="roundRect">
+            <a:avLst>
+              <a:gd name="adj" fmla="val 15000"/>
+            </a:avLst>
+          </a:prstGeom>
+          <a:solidFill>
+            <a:srgbClr val="0645AD"/>
+          </a:solidFill>
+          <a:ln>
+            <a:noFill/>
+          </a:ln>
+          <a:effectLst/>
+        </p:spPr>
+        <p:style>
+          <a:lnRef idx="1">
+            <a:schemeClr val="accent1"/>
+          </a:lnRef>
+          <a:fillRef idx="3">
+            <a:schemeClr val="accent1"/>
+          </a:fillRef>
+          <a:effectRef idx="2">
+            <a:schemeClr val="accent1"/>
+          </a:effectRef>
+          <a:fontRef idx="minor">
+            <a:schemeClr val="lt1"/>
+          </a:fontRef>
+        </p:style>
+        <p:txBody>
+          <a:bodyPr rtlCol="0" anchor="ctr"/>
+          <a:lstStyle/>
+          <a:p/>
+        </p:txBody>
+      </p:sp>
+      <p:sp>
+        <p:nvSpPr>
+          <p:cNvPr id="11" name="TextBox 10"/>
+          <p:cNvSpPr txBox="1"/>
+          <p:nvPr/>
+        </p:nvSpPr>
+        <p:spPr>
+          <a:xfrm>
+            <a:off x="6507327" y="1600200"/>
+            <a:ext cx="4907127" cy="640080"/>
+          </a:xfrm>
+          <a:prstGeom prst="rect">
+            <a:avLst/>
+          </a:prstGeom>
+          <a:noFill/>
+        </p:spPr>
+        <p:txBody>
+          <a:bodyPr wrap="square" anchor="ctr" lIns="0" rIns="0" tIns="0" bIns="0"/>
+          <a:lstStyle/>
+          <a:p>
+            <a:pPr algn="l"/>
+            <a:r>
+              <a:rPr sz="2000" b="1" i="0">
+                <a:solidFill>
+                  <a:srgbClr val="FFFFFF"/>
+                </a:solidFill>
+                <a:latin typeface="Calibri"/>
+              </a:rPr>
+              <a:t>Standards and policies</a:t>
+            </a:r>
+          </a:p>
+        </p:txBody>
+      </p:sp>
+      <p:sp>
+        <p:nvSpPr>
+          <p:cNvPr id="12" name="Rounded Rectangle 11"/>
+          <p:cNvSpPr/>
+          <p:nvPr/>
+        </p:nvSpPr>
+        <p:spPr>
+          <a:xfrm>
+            <a:off x="6278727" y="2377440"/>
+            <a:ext cx="5364327" cy="3794760"/>
+          </a:xfrm>
+          <a:prstGeom prst="roundRect">
+            <a:avLst>
+              <a:gd name="adj" fmla="val 4000"/>
+            </a:avLst>
+          </a:prstGeom>
+          <a:solidFill>
+            <a:srgbClr val="EAF3FF"/>
+          </a:solidFill>
+          <a:ln>
+            <a:noFill/>
+          </a:ln>
+          <a:effectLst/>
+        </p:spPr>
+        <p:style>
+          <a:lnRef idx="1">
+            <a:schemeClr val="accent1"/>
+          </a:lnRef>
+          <a:fillRef idx="3">
+            <a:schemeClr val="accent1"/>
+          </a:fillRef>
+          <a:effectRef idx="2">
+            <a:schemeClr val="accent1"/>
+          </a:effectRef>
+          <a:fontRef idx="minor">
+            <a:schemeClr val="lt1"/>
+          </a:fontRef>
+        </p:style>
+        <p:txBody>
+          <a:bodyPr rtlCol="0" anchor="ctr"/>
+          <a:lstStyle/>
+          <a:p/>
+        </p:txBody>
+      </p:sp>
+      <p:sp>
+        <p:nvSpPr>
+          <p:cNvPr id="13" name="TextBox 12"/>
+          <p:cNvSpPr txBox="1"/>
+          <p:nvPr/>
+        </p:nvSpPr>
+        <p:spPr>
+          <a:xfrm>
+            <a:off x="6553047" y="2606040"/>
+            <a:ext cx="4815687" cy="3337560"/>
+          </a:xfrm>
+          <a:prstGeom prst="rect">
+            <a:avLst/>
+          </a:prstGeom>
+          <a:noFill/>
+        </p:spPr>
+        <p:txBody>
+          <a:bodyPr wrap="square" lIns="0" rIns="0" tIns="0" bIns="0">
+            <a:spAutoFit/>
+          </a:bodyPr>
+          <a:lstStyle/>
+          <a:p>
+            <a:pPr marL="274320" indent="-274320">
+              <a:spcAft>
+                <a:spcPts val="990"/>
+              </a:spcAft>
+              <a:buClr>
+                <a:srgbClr val="0645AD"/>
+              </a:buClr>
+              <a:buFont typeface="Arial"/>
+              <a:buChar char="•"/>
+            </a:pPr>
+            <a:r>
+              <a:rPr sz="2200" b="1">
+                <a:solidFill>
+                  <a:srgbClr val="202122"/>
+                </a:solidFill>
+                <a:latin typeface="Calibri"/>
+              </a:rPr>
+              <a:t>Standards:</a:t>
+            </a:r>
+            <a:r>
+              <a:rPr sz="2200" b="0">
+                <a:solidFill>
+                  <a:srgbClr val="202122"/>
+                </a:solidFill>
+                <a:latin typeface="Calibri"/>
+              </a:rPr>
+              <a:t> ISO, WCAG, W3C, IETF, BS, IEEE, PCI SSC</a:t>
+            </a:r>
+          </a:p>
+          <a:p>
+            <a:pPr marL="274320" indent="-274320">
+              <a:spcAft>
+                <a:spcPts val="990"/>
+              </a:spcAft>
+              <a:buClr>
+                <a:srgbClr val="0645AD"/>
+              </a:buClr>
+              <a:buFont typeface="Arial"/>
+              <a:buChar char="•"/>
+            </a:pPr>
+            <a:r>
+              <a:rPr sz="2200" b="1">
+                <a:solidFill>
+                  <a:srgbClr val="202122"/>
+                </a:solidFill>
+                <a:latin typeface="Calibri"/>
+              </a:rPr>
+              <a:t>Acceptable use policy:</a:t>
+            </a:r>
+            <a:r>
+              <a:rPr sz="2200" b="0">
+                <a:solidFill>
+                  <a:srgbClr val="202122"/>
+                </a:solidFill>
+                <a:latin typeface="Calibri"/>
+              </a:rPr>
+              <a:t> permitted activities, etiquette, sanctions</a:t>
+            </a:r>
+          </a:p>
+          <a:p>
+            <a:pPr marL="274320" indent="-274320">
+              <a:spcAft>
+                <a:spcPts val="990"/>
+              </a:spcAft>
+              <a:buClr>
+                <a:srgbClr val="0645AD"/>
+              </a:buClr>
+              <a:buFont typeface="Arial"/>
+              <a:buChar char="•"/>
+            </a:pPr>
+            <a:r>
+              <a:rPr sz="2200" b="1">
+                <a:solidFill>
+                  <a:srgbClr val="202122"/>
+                </a:solidFill>
+                <a:latin typeface="Calibri"/>
+              </a:rPr>
+              <a:t>Whistleblowing:</a:t>
+            </a:r>
+            <a:r>
+              <a:rPr sz="2200" b="0">
+                <a:solidFill>
+                  <a:srgbClr val="202122"/>
+                </a:solidFill>
+                <a:latin typeface="Calibri"/>
+              </a:rPr>
+              <a:t> a safe way to report wrongdoing</a:t>
+            </a:r>
+          </a:p>
+        </p:txBody>
+      </p:sp>
+    </p:spTree>
+  </p:cSld>
+  <p:clrMapOvr>
+    <a:masterClrMapping/>
+  </p:clrMapOvr>
+</p:sld>
+</file>
+
+<file path=ppt/slides/slide11.xml><?xml version="1.0" encoding="utf-8"?>
+<p:sld xmlns:a="http://schemas.openxmlformats.org/drawingml/2006/main" xmlns:p="http://schemas.openxmlformats.org/presentationml/2006/main" xmlns:r="http://schemas.openxmlformats.org/officeDocument/2006/relationships">
+  <p:cSld>
+    <p:bg>
+      <p:bgPr>
+        <a:solidFill>
+          <a:srgbClr val="FFFFFF"/>
+        </a:solidFill>
+        <a:effectLst/>
+      </p:bgPr>
+    </p:bg>
+    <p:spTree>
+      <p:nvGrpSpPr>
+        <p:cNvPr id="1" name=""/>
+        <p:cNvGrpSpPr/>
+        <p:nvPr/>
+      </p:nvGrpSpPr>
+      <p:grpSpPr/>
+      <p:sp>
+        <p:nvSpPr>
+          <p:cNvPr id="2" name="TextBox 1"/>
+          <p:cNvSpPr txBox="1"/>
+          <p:nvPr/>
+        </p:nvSpPr>
+        <p:spPr>
+          <a:xfrm>
+            <a:off x="548640" y="320040"/>
+            <a:ext cx="11094415" cy="274320"/>
+          </a:xfrm>
+          <a:prstGeom prst="rect">
+            <a:avLst/>
+          </a:prstGeom>
+          <a:noFill/>
+        </p:spPr>
+        <p:txBody>
+          <a:bodyPr wrap="square" anchor="t" lIns="0" rIns="0" tIns="0" bIns="0"/>
+          <a:lstStyle/>
+          <a:p>
+            <a:pPr algn="l"/>
+            <a:r>
+              <a:rPr sz="1100" b="1" i="0">
+                <a:solidFill>
+                  <a:srgbClr val="54595D"/>
+                </a:solidFill>
+                <a:latin typeface="Calibri"/>
+              </a:rPr>
+              <a:t>CORE COMPONENT  ·  Core Paper 1</a:t>
+            </a:r>
+          </a:p>
+        </p:txBody>
+      </p:sp>
+      <p:sp>
+        <p:nvSpPr>
+          <p:cNvPr id="3" name="TextBox 2"/>
+          <p:cNvSpPr txBox="1"/>
+          <p:nvPr/>
+        </p:nvSpPr>
+        <p:spPr>
+          <a:xfrm>
+            <a:off x="548640" y="566928"/>
+            <a:ext cx="11094415" cy="822960"/>
+          </a:xfrm>
+          <a:prstGeom prst="rect">
+            <a:avLst/>
+          </a:prstGeom>
+          <a:noFill/>
+        </p:spPr>
+        <p:txBody>
+          <a:bodyPr wrap="square" anchor="ctr" lIns="0" rIns="0" tIns="0" bIns="0"/>
+          <a:lstStyle/>
+          <a:p>
+            <a:pPr algn="l"/>
+            <a:r>
+              <a:rPr sz="3200" b="1" i="0">
+                <a:solidFill>
+                  <a:srgbClr val="03306E"/>
+                </a:solidFill>
+                <a:latin typeface="Cambria"/>
+              </a:rPr>
+              <a:t>Quick check: Guidelines</a:t>
+            </a:r>
+          </a:p>
+        </p:txBody>
+      </p:sp>
+      <p:sp>
+        <p:nvSpPr>
+          <p:cNvPr id="4" name="TextBox 3"/>
+          <p:cNvSpPr txBox="1"/>
+          <p:nvPr/>
+        </p:nvSpPr>
+        <p:spPr>
+          <a:xfrm>
+            <a:off x="548640" y="6446520"/>
+            <a:ext cx="8229600" cy="274320"/>
+          </a:xfrm>
+          <a:prstGeom prst="rect">
+            <a:avLst/>
+          </a:prstGeom>
+          <a:noFill/>
+        </p:spPr>
+        <p:txBody>
+          <a:bodyPr wrap="square" anchor="t" lIns="0" rIns="0" tIns="0" bIns="0"/>
+          <a:lstStyle/>
+          <a:p>
+            <a:pPr algn="l"/>
+            <a:r>
+              <a:rPr sz="1000" b="0" i="0">
+                <a:solidFill>
+                  <a:srgbClr val="54595D"/>
+                </a:solidFill>
+                <a:latin typeface="Calibri"/>
+              </a:rPr>
+              <a:t>Digital Software Development T Level  ·  Legislation and Guidelines</a:t>
+            </a:r>
+          </a:p>
+        </p:txBody>
+      </p:sp>
+      <p:sp>
+        <p:nvSpPr>
+          <p:cNvPr id="5" name="TextBox 4"/>
+          <p:cNvSpPr txBox="1"/>
+          <p:nvPr/>
+        </p:nvSpPr>
+        <p:spPr>
+          <a:xfrm>
+            <a:off x="10728655" y="6446520"/>
+            <a:ext cx="914400" cy="274320"/>
+          </a:xfrm>
+          <a:prstGeom prst="rect">
+            <a:avLst/>
+          </a:prstGeom>
+          <a:noFill/>
+        </p:spPr>
+        <p:txBody>
+          <a:bodyPr wrap="square" anchor="t" lIns="0" rIns="0" tIns="0" bIns="0"/>
+          <a:lstStyle/>
+          <a:p>
+            <a:pPr algn="r"/>
+            <a:r>
+              <a:rPr sz="1000" b="0" i="0">
+                <a:solidFill>
+                  <a:srgbClr val="54595D"/>
+                </a:solidFill>
+                <a:latin typeface="Calibri"/>
+              </a:rPr>
+              <a:t>11</a:t>
+            </a:r>
+          </a:p>
+        </p:txBody>
+      </p:sp>
+      <p:sp>
+        <p:nvSpPr>
+          <p:cNvPr id="6" name="Oval 5"/>
+          <p:cNvSpPr/>
+          <p:nvPr/>
+        </p:nvSpPr>
+        <p:spPr>
+          <a:xfrm>
+            <a:off x="548640" y="1691640"/>
+            <a:ext cx="502920" cy="502920"/>
+          </a:xfrm>
+          <a:prstGeom prst="ellipse">
+            <a:avLst/>
+          </a:prstGeom>
+          <a:solidFill>
+            <a:srgbClr val="F2B705"/>
+          </a:solidFill>
+          <a:ln>
+            <a:noFill/>
+          </a:ln>
+          <a:effectLst/>
+        </p:spPr>
+        <p:style>
+          <a:lnRef idx="1">
+            <a:schemeClr val="accent1"/>
+          </a:lnRef>
+          <a:fillRef idx="3">
+            <a:schemeClr val="accent1"/>
+          </a:fillRef>
+          <a:effectRef idx="2">
+            <a:schemeClr val="accent1"/>
+          </a:effectRef>
+          <a:fontRef idx="minor">
+            <a:schemeClr val="lt1"/>
+          </a:fontRef>
+        </p:style>
+        <p:txBody>
+          <a:bodyPr rtlCol="0" anchor="ctr" lIns="0" rIns="0" tIns="0" bIns="0"/>
+          <a:lstStyle/>
+          <a:p>
+            <a:pPr algn="ctr"/>
+            <a:r>
+              <a:rPr sz="1600" b="1">
+                <a:solidFill>
+                  <a:srgbClr val="202122"/>
+                </a:solidFill>
+                <a:latin typeface="Calibri"/>
+              </a:rPr>
+              <a:t>1</a:t>
+            </a:r>
+          </a:p>
+        </p:txBody>
+      </p:sp>
+      <p:sp>
+        <p:nvSpPr>
+          <p:cNvPr id="7" name="TextBox 6"/>
+          <p:cNvSpPr txBox="1"/>
+          <p:nvPr/>
+        </p:nvSpPr>
+        <p:spPr>
+          <a:xfrm>
+            <a:off x="1371600" y="1645920"/>
+            <a:ext cx="10271455" cy="1188720"/>
+          </a:xfrm>
+          <a:prstGeom prst="rect">
+            <a:avLst/>
+          </a:prstGeom>
+          <a:noFill/>
+        </p:spPr>
+        <p:txBody>
+          <a:bodyPr wrap="square" anchor="t" lIns="0" rIns="0" tIns="0" bIns="0"/>
+          <a:lstStyle/>
+          <a:p>
+            <a:pPr algn="l"/>
+            <a:r>
+              <a:rPr sz="2400" b="0" i="0">
+                <a:solidFill>
+                  <a:srgbClr val="202122"/>
+                </a:solidFill>
+                <a:latin typeface="Calibri"/>
+              </a:rPr>
+              <a:t>Which standard covers web accessibility?</a:t>
+            </a:r>
+          </a:p>
+        </p:txBody>
+      </p:sp>
+      <p:sp>
+        <p:nvSpPr>
+          <p:cNvPr id="8" name="Oval 7"/>
+          <p:cNvSpPr/>
+          <p:nvPr/>
+        </p:nvSpPr>
+        <p:spPr>
+          <a:xfrm>
+            <a:off x="548640" y="3108960"/>
+            <a:ext cx="502920" cy="502920"/>
+          </a:xfrm>
+          <a:prstGeom prst="ellipse">
+            <a:avLst/>
+          </a:prstGeom>
+          <a:solidFill>
+            <a:srgbClr val="F2B705"/>
+          </a:solidFill>
+          <a:ln>
+            <a:noFill/>
+          </a:ln>
+          <a:effectLst/>
+        </p:spPr>
+        <p:style>
+          <a:lnRef idx="1">
+            <a:schemeClr val="accent1"/>
+          </a:lnRef>
+          <a:fillRef idx="3">
+            <a:schemeClr val="accent1"/>
+          </a:fillRef>
+          <a:effectRef idx="2">
+            <a:schemeClr val="accent1"/>
+          </a:effectRef>
+          <a:fontRef idx="minor">
+            <a:schemeClr val="lt1"/>
+          </a:fontRef>
+        </p:style>
+        <p:txBody>
+          <a:bodyPr rtlCol="0" anchor="ctr" lIns="0" rIns="0" tIns="0" bIns="0"/>
+          <a:lstStyle/>
+          <a:p>
+            <a:pPr algn="ctr"/>
+            <a:r>
+              <a:rPr sz="1600" b="1">
+                <a:solidFill>
+                  <a:srgbClr val="202122"/>
+                </a:solidFill>
+                <a:latin typeface="Calibri"/>
+              </a:rPr>
+              <a:t>2</a:t>
+            </a:r>
+          </a:p>
+        </p:txBody>
+      </p:sp>
+      <p:sp>
+        <p:nvSpPr>
+          <p:cNvPr id="9" name="TextBox 8"/>
+          <p:cNvSpPr txBox="1"/>
+          <p:nvPr/>
+        </p:nvSpPr>
+        <p:spPr>
+          <a:xfrm>
+            <a:off x="1371600" y="3063240"/>
+            <a:ext cx="10271455" cy="1188720"/>
+          </a:xfrm>
+          <a:prstGeom prst="rect">
+            <a:avLst/>
+          </a:prstGeom>
+          <a:noFill/>
+        </p:spPr>
+        <p:txBody>
+          <a:bodyPr wrap="square" anchor="t" lIns="0" rIns="0" tIns="0" bIns="0"/>
+          <a:lstStyle/>
+          <a:p>
+            <a:pPr algn="l"/>
+            <a:r>
+              <a:rPr sz="2400" b="0" i="0">
+                <a:solidFill>
+                  <a:srgbClr val="202122"/>
+                </a:solidFill>
+                <a:latin typeface="Calibri"/>
+              </a:rPr>
+              <a:t>Name a professional body for developers.</a:t>
+            </a:r>
+          </a:p>
+        </p:txBody>
+      </p:sp>
+      <p:sp>
+        <p:nvSpPr>
+          <p:cNvPr id="10" name="Oval 9"/>
+          <p:cNvSpPr/>
+          <p:nvPr/>
+        </p:nvSpPr>
+        <p:spPr>
+          <a:xfrm>
+            <a:off x="548640" y="4526280"/>
+            <a:ext cx="502920" cy="502920"/>
+          </a:xfrm>
+          <a:prstGeom prst="ellipse">
+            <a:avLst/>
+          </a:prstGeom>
+          <a:solidFill>
+            <a:srgbClr val="F2B705"/>
+          </a:solidFill>
+          <a:ln>
+            <a:noFill/>
+          </a:ln>
+          <a:effectLst/>
+        </p:spPr>
+        <p:style>
+          <a:lnRef idx="1">
+            <a:schemeClr val="accent1"/>
+          </a:lnRef>
+          <a:fillRef idx="3">
+            <a:schemeClr val="accent1"/>
+          </a:fillRef>
+          <a:effectRef idx="2">
+            <a:schemeClr val="accent1"/>
+          </a:effectRef>
+          <a:fontRef idx="minor">
+            <a:schemeClr val="lt1"/>
+          </a:fontRef>
+        </p:style>
+        <p:txBody>
+          <a:bodyPr rtlCol="0" anchor="ctr" lIns="0" rIns="0" tIns="0" bIns="0"/>
+          <a:lstStyle/>
+          <a:p>
+            <a:pPr algn="ctr"/>
+            <a:r>
+              <a:rPr sz="1600" b="1">
+                <a:solidFill>
+                  <a:srgbClr val="202122"/>
+                </a:solidFill>
+                <a:latin typeface="Calibri"/>
+              </a:rPr>
+              <a:t>3</a:t>
+            </a:r>
+          </a:p>
+        </p:txBody>
+      </p:sp>
+      <p:sp>
+        <p:nvSpPr>
+          <p:cNvPr id="11" name="TextBox 10"/>
+          <p:cNvSpPr txBox="1"/>
+          <p:nvPr/>
+        </p:nvSpPr>
+        <p:spPr>
+          <a:xfrm>
+            <a:off x="1371600" y="4480560"/>
+            <a:ext cx="10271455" cy="1188720"/>
+          </a:xfrm>
+          <a:prstGeom prst="rect">
+            <a:avLst/>
+          </a:prstGeom>
+          <a:noFill/>
+        </p:spPr>
+        <p:txBody>
+          <a:bodyPr wrap="square" anchor="t" lIns="0" rIns="0" tIns="0" bIns="0"/>
+          <a:lstStyle/>
+          <a:p>
+            <a:pPr algn="l"/>
+            <a:r>
+              <a:rPr sz="2400" b="0" i="0">
+                <a:solidFill>
+                  <a:srgbClr val="202122"/>
+                </a:solidFill>
+                <a:latin typeface="Calibri"/>
+              </a:rPr>
+              <a:t>What is whistleblowing?</a:t>
+            </a:r>
+          </a:p>
+        </p:txBody>
+      </p:sp>
+      <p:sp>
+        <p:nvSpPr>
+          <p:cNvPr id="12" name="TextBox 11"/>
+          <p:cNvSpPr txBox="1"/>
+          <p:nvPr/>
+        </p:nvSpPr>
+        <p:spPr>
+          <a:xfrm>
+            <a:off x="548640" y="5852160"/>
+            <a:ext cx="11094415" cy="365760"/>
+          </a:xfrm>
+          <a:prstGeom prst="rect">
+            <a:avLst/>
+          </a:prstGeom>
+          <a:noFill/>
+        </p:spPr>
+        <p:txBody>
+          <a:bodyPr wrap="square" anchor="t" lIns="0" rIns="0" tIns="0" bIns="0"/>
+          <a:lstStyle/>
+          <a:p>
+            <a:pPr algn="l"/>
+            <a:r>
+              <a:rPr sz="1300" b="0" i="1">
+                <a:solidFill>
+                  <a:srgbClr val="54595D"/>
+                </a:solidFill>
+                <a:latin typeface="Calibri"/>
+              </a:rPr>
+              <a:t>Answer on mini whiteboards or in your book. Answers are in the speaker notes.</a:t>
+            </a:r>
+          </a:p>
+        </p:txBody>
+      </p:sp>
+    </p:spTree>
+  </p:cSld>
+  <p:clrMapOvr>
+    <a:masterClrMapping/>
+  </p:clrMapOvr>
+</p:sld>
+</file>
+
+<file path=ppt/slides/slide12.xml><?xml version="1.0" encoding="utf-8"?>
+<p:sld xmlns:a="http://schemas.openxmlformats.org/drawingml/2006/main" xmlns:p="http://schemas.openxmlformats.org/presentationml/2006/main" xmlns:r="http://schemas.openxmlformats.org/officeDocument/2006/relationships">
+  <p:cSld>
+    <p:bg>
+      <p:bgPr>
+        <a:solidFill>
+          <a:srgbClr val="FFFFFF"/>
+        </a:solidFill>
+        <a:effectLst/>
+      </p:bgPr>
+    </p:bg>
+    <p:spTree>
+      <p:nvGrpSpPr>
+        <p:cNvPr id="1" name=""/>
+        <p:cNvGrpSpPr/>
+        <p:nvPr/>
+      </p:nvGrpSpPr>
+      <p:grpSpPr/>
+      <p:sp>
+        <p:nvSpPr>
+          <p:cNvPr id="2" name="TextBox 1"/>
+          <p:cNvSpPr txBox="1"/>
+          <p:nvPr/>
+        </p:nvSpPr>
+        <p:spPr>
+          <a:xfrm>
+            <a:off x="548640" y="320040"/>
+            <a:ext cx="11094415" cy="274320"/>
+          </a:xfrm>
+          <a:prstGeom prst="rect">
+            <a:avLst/>
+          </a:prstGeom>
+          <a:noFill/>
+        </p:spPr>
+        <p:txBody>
+          <a:bodyPr wrap="square" anchor="t" lIns="0" rIns="0" tIns="0" bIns="0"/>
+          <a:lstStyle/>
+          <a:p>
+            <a:pPr algn="l"/>
+            <a:r>
+              <a:rPr sz="1100" b="1" i="0">
+                <a:solidFill>
+                  <a:srgbClr val="54595D"/>
+                </a:solidFill>
+                <a:latin typeface="Calibri"/>
+              </a:rPr>
+              <a:t>CORE COMPONENT  ·  Core Paper 1</a:t>
+            </a:r>
+          </a:p>
+        </p:txBody>
+      </p:sp>
+      <p:sp>
+        <p:nvSpPr>
+          <p:cNvPr id="3" name="TextBox 2"/>
+          <p:cNvSpPr txBox="1"/>
+          <p:nvPr/>
+        </p:nvSpPr>
+        <p:spPr>
+          <a:xfrm>
+            <a:off x="548640" y="566928"/>
+            <a:ext cx="11094415" cy="822960"/>
+          </a:xfrm>
+          <a:prstGeom prst="rect">
+            <a:avLst/>
+          </a:prstGeom>
+          <a:noFill/>
+        </p:spPr>
+        <p:txBody>
+          <a:bodyPr wrap="square" anchor="ctr" lIns="0" rIns="0" tIns="0" bIns="0"/>
+          <a:lstStyle/>
+          <a:p>
+            <a:pPr algn="l"/>
+            <a:r>
+              <a:rPr sz="3200" b="1" i="0">
+                <a:solidFill>
+                  <a:srgbClr val="03306E"/>
+                </a:solidFill>
+                <a:latin typeface="Cambria"/>
+              </a:rPr>
+              <a:t>Check your understanding</a:t>
+            </a:r>
+          </a:p>
+        </p:txBody>
+      </p:sp>
+      <p:sp>
+        <p:nvSpPr>
+          <p:cNvPr id="4" name="TextBox 3"/>
+          <p:cNvSpPr txBox="1"/>
+          <p:nvPr/>
+        </p:nvSpPr>
+        <p:spPr>
+          <a:xfrm>
+            <a:off x="548640" y="6446520"/>
+            <a:ext cx="8229600" cy="274320"/>
+          </a:xfrm>
+          <a:prstGeom prst="rect">
+            <a:avLst/>
+          </a:prstGeom>
+          <a:noFill/>
+        </p:spPr>
+        <p:txBody>
+          <a:bodyPr wrap="square" anchor="t" lIns="0" rIns="0" tIns="0" bIns="0"/>
+          <a:lstStyle/>
+          <a:p>
+            <a:pPr algn="l"/>
+            <a:r>
+              <a:rPr sz="1000" b="0" i="0">
+                <a:solidFill>
+                  <a:srgbClr val="54595D"/>
+                </a:solidFill>
+                <a:latin typeface="Calibri"/>
+              </a:rPr>
+              <a:t>Digital Software Development T Level  ·  Legislation and Guidelines</a:t>
+            </a:r>
+          </a:p>
+        </p:txBody>
+      </p:sp>
+      <p:sp>
+        <p:nvSpPr>
+          <p:cNvPr id="5" name="TextBox 4"/>
+          <p:cNvSpPr txBox="1"/>
+          <p:nvPr/>
+        </p:nvSpPr>
+        <p:spPr>
+          <a:xfrm>
+            <a:off x="10728655" y="6446520"/>
+            <a:ext cx="914400" cy="274320"/>
+          </a:xfrm>
+          <a:prstGeom prst="rect">
+            <a:avLst/>
+          </a:prstGeom>
+          <a:noFill/>
+        </p:spPr>
+        <p:txBody>
+          <a:bodyPr wrap="square" anchor="t" lIns="0" rIns="0" tIns="0" bIns="0"/>
+          <a:lstStyle/>
+          <a:p>
+            <a:pPr algn="r"/>
+            <a:r>
+              <a:rPr sz="1000" b="0" i="0">
+                <a:solidFill>
+                  <a:srgbClr val="54595D"/>
+                </a:solidFill>
+                <a:latin typeface="Calibri"/>
+              </a:rPr>
+              <a:t>12</a:t>
+            </a:r>
+          </a:p>
+        </p:txBody>
+      </p:sp>
+      <p:sp>
+        <p:nvSpPr>
+          <p:cNvPr id="6" name="Oval 5"/>
+          <p:cNvSpPr/>
+          <p:nvPr/>
+        </p:nvSpPr>
+        <p:spPr>
+          <a:xfrm>
+            <a:off x="548640" y="1618488"/>
+            <a:ext cx="411480" cy="411480"/>
+          </a:xfrm>
+          <a:prstGeom prst="ellipse">
+            <a:avLst/>
+          </a:prstGeom>
+          <a:solidFill>
+            <a:srgbClr val="F2B705"/>
+          </a:solidFill>
+          <a:ln>
+            <a:noFill/>
+          </a:ln>
+          <a:effectLst/>
+        </p:spPr>
+        <p:style>
+          <a:lnRef idx="1">
+            <a:schemeClr val="accent1"/>
+          </a:lnRef>
+          <a:fillRef idx="3">
+            <a:schemeClr val="accent1"/>
+          </a:fillRef>
+          <a:effectRef idx="2">
+            <a:schemeClr val="accent1"/>
+          </a:effectRef>
+          <a:fontRef idx="minor">
+            <a:schemeClr val="lt1"/>
+          </a:fontRef>
+        </p:style>
+        <p:txBody>
+          <a:bodyPr rtlCol="0" anchor="ctr" lIns="0" rIns="0" tIns="0" bIns="0"/>
+          <a:lstStyle/>
+          <a:p>
+            <a:pPr algn="ctr"/>
+            <a:r>
+              <a:rPr sz="1400" b="1">
+                <a:solidFill>
+                  <a:srgbClr val="202122"/>
+                </a:solidFill>
+                <a:latin typeface="Calibri"/>
+              </a:rPr>
+              <a:t>1</a:t>
+            </a:r>
+          </a:p>
+        </p:txBody>
+      </p:sp>
+      <p:sp>
+        <p:nvSpPr>
+          <p:cNvPr id="7" name="TextBox 6"/>
+          <p:cNvSpPr txBox="1"/>
+          <p:nvPr/>
+        </p:nvSpPr>
+        <p:spPr>
+          <a:xfrm>
+            <a:off x="1234440" y="1600200"/>
+            <a:ext cx="10408615" cy="1030986"/>
+          </a:xfrm>
+          <a:prstGeom prst="rect">
+            <a:avLst/>
+          </a:prstGeom>
+          <a:noFill/>
+        </p:spPr>
+        <p:txBody>
+          <a:bodyPr wrap="square" anchor="t" lIns="0" rIns="0" tIns="0" bIns="0"/>
+          <a:lstStyle/>
+          <a:p>
+            <a:pPr algn="l"/>
+            <a:r>
+              <a:rPr sz="2200" b="0" i="0">
+                <a:solidFill>
+                  <a:srgbClr val="202122"/>
+                </a:solidFill>
+                <a:latin typeface="Calibri"/>
+              </a:rPr>
+              <a:t>Name two employer duties under the Health and Safety at Work Act.</a:t>
+            </a:r>
+          </a:p>
+        </p:txBody>
+      </p:sp>
+      <p:sp>
+        <p:nvSpPr>
+          <p:cNvPr id="8" name="Oval 7"/>
+          <p:cNvSpPr/>
+          <p:nvPr/>
+        </p:nvSpPr>
+        <p:spPr>
+          <a:xfrm>
+            <a:off x="548640" y="2814066"/>
+            <a:ext cx="411480" cy="411480"/>
+          </a:xfrm>
+          <a:prstGeom prst="ellipse">
+            <a:avLst/>
+          </a:prstGeom>
+          <a:solidFill>
+            <a:srgbClr val="F2B705"/>
+          </a:solidFill>
+          <a:ln>
+            <a:noFill/>
+          </a:ln>
+          <a:effectLst/>
+        </p:spPr>
+        <p:style>
+          <a:lnRef idx="1">
+            <a:schemeClr val="accent1"/>
+          </a:lnRef>
+          <a:fillRef idx="3">
+            <a:schemeClr val="accent1"/>
+          </a:fillRef>
+          <a:effectRef idx="2">
+            <a:schemeClr val="accent1"/>
+          </a:effectRef>
+          <a:fontRef idx="minor">
+            <a:schemeClr val="lt1"/>
+          </a:fontRef>
+        </p:style>
+        <p:txBody>
+          <a:bodyPr rtlCol="0" anchor="ctr" lIns="0" rIns="0" tIns="0" bIns="0"/>
+          <a:lstStyle/>
+          <a:p>
+            <a:pPr algn="ctr"/>
+            <a:r>
+              <a:rPr sz="1400" b="1">
+                <a:solidFill>
+                  <a:srgbClr val="202122"/>
+                </a:solidFill>
+                <a:latin typeface="Calibri"/>
+              </a:rPr>
+              <a:t>2</a:t>
+            </a:r>
+          </a:p>
+        </p:txBody>
+      </p:sp>
+      <p:sp>
+        <p:nvSpPr>
+          <p:cNvPr id="9" name="TextBox 8"/>
+          <p:cNvSpPr txBox="1"/>
+          <p:nvPr/>
+        </p:nvSpPr>
+        <p:spPr>
+          <a:xfrm>
+            <a:off x="1234440" y="2795778"/>
+            <a:ext cx="10408615" cy="1030986"/>
+          </a:xfrm>
+          <a:prstGeom prst="rect">
+            <a:avLst/>
+          </a:prstGeom>
+          <a:noFill/>
+        </p:spPr>
+        <p:txBody>
+          <a:bodyPr wrap="square" anchor="t" lIns="0" rIns="0" tIns="0" bIns="0"/>
+          <a:lstStyle/>
+          <a:p>
+            <a:pPr algn="l"/>
+            <a:r>
+              <a:rPr sz="2200" b="0" i="0">
+                <a:solidFill>
+                  <a:srgbClr val="202122"/>
+                </a:solidFill>
+                <a:latin typeface="Calibri"/>
+              </a:rPr>
+              <a:t>Which law covers hacking into a system?</a:t>
+            </a:r>
+          </a:p>
+        </p:txBody>
+      </p:sp>
+      <p:sp>
+        <p:nvSpPr>
+          <p:cNvPr id="10" name="Oval 9"/>
+          <p:cNvSpPr/>
+          <p:nvPr/>
+        </p:nvSpPr>
+        <p:spPr>
+          <a:xfrm>
+            <a:off x="548640" y="4009644"/>
+            <a:ext cx="411480" cy="411480"/>
+          </a:xfrm>
+          <a:prstGeom prst="ellipse">
+            <a:avLst/>
+          </a:prstGeom>
+          <a:solidFill>
+            <a:srgbClr val="F2B705"/>
+          </a:solidFill>
+          <a:ln>
+            <a:noFill/>
+          </a:ln>
+          <a:effectLst/>
+        </p:spPr>
+        <p:style>
+          <a:lnRef idx="1">
+            <a:schemeClr val="accent1"/>
+          </a:lnRef>
+          <a:fillRef idx="3">
+            <a:schemeClr val="accent1"/>
+          </a:fillRef>
+          <a:effectRef idx="2">
+            <a:schemeClr val="accent1"/>
+          </a:effectRef>
+          <a:fontRef idx="minor">
+            <a:schemeClr val="lt1"/>
+          </a:fontRef>
+        </p:style>
+        <p:txBody>
+          <a:bodyPr rtlCol="0" anchor="ctr" lIns="0" rIns="0" tIns="0" bIns="0"/>
+          <a:lstStyle/>
+          <a:p>
+            <a:pPr algn="ctr"/>
+            <a:r>
+              <a:rPr sz="1400" b="1">
+                <a:solidFill>
+                  <a:srgbClr val="202122"/>
+                </a:solidFill>
+                <a:latin typeface="Calibri"/>
+              </a:rPr>
+              <a:t>3</a:t>
+            </a:r>
+          </a:p>
+        </p:txBody>
+      </p:sp>
+      <p:sp>
+        <p:nvSpPr>
+          <p:cNvPr id="11" name="TextBox 10"/>
+          <p:cNvSpPr txBox="1"/>
+          <p:nvPr/>
+        </p:nvSpPr>
+        <p:spPr>
+          <a:xfrm>
+            <a:off x="1234440" y="3991356"/>
+            <a:ext cx="10408615" cy="1030986"/>
+          </a:xfrm>
+          <a:prstGeom prst="rect">
+            <a:avLst/>
+          </a:prstGeom>
+          <a:noFill/>
+        </p:spPr>
+        <p:txBody>
+          <a:bodyPr wrap="square" anchor="t" lIns="0" rIns="0" tIns="0" bIns="0"/>
+          <a:lstStyle/>
+          <a:p>
+            <a:pPr algn="l"/>
+            <a:r>
+              <a:rPr sz="2200" b="0" i="0">
+                <a:solidFill>
+                  <a:srgbClr val="202122"/>
+                </a:solidFill>
+                <a:latin typeface="Calibri"/>
+              </a:rPr>
+              <a:t>How many protected characteristics are there?</a:t>
+            </a:r>
+          </a:p>
+        </p:txBody>
+      </p:sp>
+      <p:sp>
+        <p:nvSpPr>
+          <p:cNvPr id="12" name="Oval 11"/>
+          <p:cNvSpPr/>
+          <p:nvPr/>
+        </p:nvSpPr>
+        <p:spPr>
+          <a:xfrm>
+            <a:off x="548640" y="5205221"/>
+            <a:ext cx="411480" cy="411480"/>
+          </a:xfrm>
+          <a:prstGeom prst="ellipse">
+            <a:avLst/>
+          </a:prstGeom>
+          <a:solidFill>
+            <a:srgbClr val="F2B705"/>
+          </a:solidFill>
+          <a:ln>
+            <a:noFill/>
+          </a:ln>
+          <a:effectLst/>
+        </p:spPr>
+        <p:style>
+          <a:lnRef idx="1">
+            <a:schemeClr val="accent1"/>
+          </a:lnRef>
+          <a:fillRef idx="3">
+            <a:schemeClr val="accent1"/>
+          </a:fillRef>
+          <a:effectRef idx="2">
+            <a:schemeClr val="accent1"/>
+          </a:effectRef>
+          <a:fontRef idx="minor">
+            <a:schemeClr val="lt1"/>
+          </a:fontRef>
+        </p:style>
+        <p:txBody>
+          <a:bodyPr rtlCol="0" anchor="ctr" lIns="0" rIns="0" tIns="0" bIns="0"/>
+          <a:lstStyle/>
+          <a:p>
+            <a:pPr algn="ctr"/>
+            <a:r>
+              <a:rPr sz="1400" b="1">
+                <a:solidFill>
+                  <a:srgbClr val="202122"/>
+                </a:solidFill>
+                <a:latin typeface="Calibri"/>
+              </a:rPr>
+              <a:t>4</a:t>
+            </a:r>
+          </a:p>
+        </p:txBody>
+      </p:sp>
+      <p:sp>
+        <p:nvSpPr>
+          <p:cNvPr id="13" name="TextBox 12"/>
+          <p:cNvSpPr txBox="1"/>
+          <p:nvPr/>
+        </p:nvSpPr>
+        <p:spPr>
+          <a:xfrm>
+            <a:off x="1234440" y="5186933"/>
+            <a:ext cx="10408615" cy="1030986"/>
+          </a:xfrm>
+          <a:prstGeom prst="rect">
+            <a:avLst/>
+          </a:prstGeom>
+          <a:noFill/>
+        </p:spPr>
+        <p:txBody>
+          <a:bodyPr wrap="square" anchor="t" lIns="0" rIns="0" tIns="0" bIns="0"/>
+          <a:lstStyle/>
+          <a:p>
+            <a:pPr algn="l"/>
+            <a:r>
+              <a:rPr sz="2200" b="0" i="0">
+                <a:solidFill>
+                  <a:srgbClr val="202122"/>
+                </a:solidFill>
+                <a:latin typeface="Calibri"/>
+              </a:rPr>
+              <a:t>Which standard covers web accessibility?</a:t>
+            </a:r>
+          </a:p>
+        </p:txBody>
+      </p:sp>
+    </p:spTree>
+  </p:cSld>
+  <p:clrMapOvr>
+    <a:masterClrMapping/>
+  </p:clrMapOvr>
+</p:sld>
+</file>
+
+<file path=ppt/slides/slide13.xml><?xml version="1.0" encoding="utf-8"?>
+<p:sld xmlns:a="http://schemas.openxmlformats.org/drawingml/2006/main" xmlns:p="http://schemas.openxmlformats.org/presentationml/2006/main" xmlns:r="http://schemas.openxmlformats.org/officeDocument/2006/relationships">
+  <p:cSld>
+    <p:bg>
+      <p:bgPr>
+        <a:solidFill>
+          <a:srgbClr val="FFFFFF"/>
+        </a:solidFill>
+        <a:effectLst/>
+      </p:bgPr>
+    </p:bg>
+    <p:spTree>
+      <p:nvGrpSpPr>
+        <p:cNvPr id="1" name=""/>
+        <p:cNvGrpSpPr/>
+        <p:nvPr/>
+      </p:nvGrpSpPr>
+      <p:grpSpPr/>
+      <p:sp>
+        <p:nvSpPr>
+          <p:cNvPr id="2" name="TextBox 1"/>
+          <p:cNvSpPr txBox="1"/>
+          <p:nvPr/>
+        </p:nvSpPr>
+        <p:spPr>
+          <a:xfrm>
+            <a:off x="548640" y="320040"/>
+            <a:ext cx="11094415" cy="274320"/>
+          </a:xfrm>
+          <a:prstGeom prst="rect">
+            <a:avLst/>
+          </a:prstGeom>
+          <a:noFill/>
+        </p:spPr>
+        <p:txBody>
+          <a:bodyPr wrap="square" anchor="t" lIns="0" rIns="0" tIns="0" bIns="0"/>
+          <a:lstStyle/>
+          <a:p>
+            <a:pPr algn="l"/>
+            <a:r>
+              <a:rPr sz="1100" b="1" i="0">
+                <a:solidFill>
+                  <a:srgbClr val="54595D"/>
+                </a:solidFill>
+                <a:latin typeface="Calibri"/>
+              </a:rPr>
+              <a:t>CORE COMPONENT  ·  Core Paper 1</a:t>
+            </a:r>
+          </a:p>
+        </p:txBody>
+      </p:sp>
+      <p:sp>
+        <p:nvSpPr>
+          <p:cNvPr id="3" name="TextBox 2"/>
+          <p:cNvSpPr txBox="1"/>
+          <p:nvPr/>
+        </p:nvSpPr>
+        <p:spPr>
+          <a:xfrm>
+            <a:off x="548640" y="566928"/>
+            <a:ext cx="11094415" cy="822960"/>
+          </a:xfrm>
+          <a:prstGeom prst="rect">
+            <a:avLst/>
+          </a:prstGeom>
+          <a:noFill/>
+        </p:spPr>
+        <p:txBody>
+          <a:bodyPr wrap="square" anchor="ctr" lIns="0" rIns="0" tIns="0" bIns="0"/>
+          <a:lstStyle/>
+          <a:p>
+            <a:pPr algn="l"/>
+            <a:r>
+              <a:rPr sz="3200" b="1" i="0">
+                <a:solidFill>
+                  <a:srgbClr val="03306E"/>
+                </a:solidFill>
+                <a:latin typeface="Cambria"/>
+              </a:rPr>
+              <a:t>Answers</a:t>
+            </a:r>
+          </a:p>
+        </p:txBody>
+      </p:sp>
+      <p:sp>
+        <p:nvSpPr>
+          <p:cNvPr id="4" name="TextBox 3"/>
+          <p:cNvSpPr txBox="1"/>
+          <p:nvPr/>
+        </p:nvSpPr>
+        <p:spPr>
+          <a:xfrm>
+            <a:off x="548640" y="6446520"/>
+            <a:ext cx="8229600" cy="274320"/>
+          </a:xfrm>
+          <a:prstGeom prst="rect">
+            <a:avLst/>
+          </a:prstGeom>
+          <a:noFill/>
+        </p:spPr>
+        <p:txBody>
+          <a:bodyPr wrap="square" anchor="t" lIns="0" rIns="0" tIns="0" bIns="0"/>
+          <a:lstStyle/>
+          <a:p>
+            <a:pPr algn="l"/>
+            <a:r>
+              <a:rPr sz="1000" b="0" i="0">
+                <a:solidFill>
+                  <a:srgbClr val="54595D"/>
+                </a:solidFill>
+                <a:latin typeface="Calibri"/>
+              </a:rPr>
+              <a:t>Digital Software Development T Level  ·  Legislation and Guidelines</a:t>
+            </a:r>
+          </a:p>
+        </p:txBody>
+      </p:sp>
+      <p:sp>
+        <p:nvSpPr>
+          <p:cNvPr id="5" name="TextBox 4"/>
+          <p:cNvSpPr txBox="1"/>
+          <p:nvPr/>
+        </p:nvSpPr>
+        <p:spPr>
+          <a:xfrm>
+            <a:off x="10728655" y="6446520"/>
+            <a:ext cx="914400" cy="274320"/>
+          </a:xfrm>
+          <a:prstGeom prst="rect">
+            <a:avLst/>
+          </a:prstGeom>
+          <a:noFill/>
+        </p:spPr>
+        <p:txBody>
+          <a:bodyPr wrap="square" anchor="t" lIns="0" rIns="0" tIns="0" bIns="0"/>
+          <a:lstStyle/>
+          <a:p>
+            <a:pPr algn="r"/>
+            <a:r>
+              <a:rPr sz="1000" b="0" i="0">
+                <a:solidFill>
+                  <a:srgbClr val="54595D"/>
+                </a:solidFill>
+                <a:latin typeface="Calibri"/>
+              </a:rPr>
+              <a:t>13</a:t>
+            </a:r>
+          </a:p>
+        </p:txBody>
+      </p:sp>
+      <p:sp>
+        <p:nvSpPr>
+          <p:cNvPr id="6" name="Oval 5"/>
+          <p:cNvSpPr/>
+          <p:nvPr/>
+        </p:nvSpPr>
+        <p:spPr>
+          <a:xfrm>
+            <a:off x="548640" y="1618488"/>
+            <a:ext cx="411480" cy="411480"/>
+          </a:xfrm>
+          <a:prstGeom prst="ellipse">
+            <a:avLst/>
+          </a:prstGeom>
+          <a:solidFill>
+            <a:srgbClr val="F2B705"/>
+          </a:solidFill>
+          <a:ln>
+            <a:noFill/>
+          </a:ln>
+          <a:effectLst/>
+        </p:spPr>
+        <p:style>
+          <a:lnRef idx="1">
+            <a:schemeClr val="accent1"/>
+          </a:lnRef>
+          <a:fillRef idx="3">
+            <a:schemeClr val="accent1"/>
+          </a:fillRef>
+          <a:effectRef idx="2">
+            <a:schemeClr val="accent1"/>
+          </a:effectRef>
+          <a:fontRef idx="minor">
+            <a:schemeClr val="lt1"/>
+          </a:fontRef>
+        </p:style>
+        <p:txBody>
+          <a:bodyPr rtlCol="0" anchor="ctr" lIns="0" rIns="0" tIns="0" bIns="0"/>
+          <a:lstStyle/>
+          <a:p>
+            <a:pPr algn="ctr"/>
+            <a:r>
+              <a:rPr sz="1400" b="1">
+                <a:solidFill>
+                  <a:srgbClr val="202122"/>
+                </a:solidFill>
+                <a:latin typeface="Calibri"/>
+              </a:rPr>
+              <a:t>1</a:t>
+            </a:r>
+          </a:p>
+        </p:txBody>
+      </p:sp>
+      <p:sp>
+        <p:nvSpPr>
+          <p:cNvPr id="7" name="TextBox 6"/>
+          <p:cNvSpPr txBox="1"/>
+          <p:nvPr/>
+        </p:nvSpPr>
+        <p:spPr>
+          <a:xfrm>
+            <a:off x="1234440" y="1600200"/>
+            <a:ext cx="10408615" cy="1030986"/>
+          </a:xfrm>
+          <a:prstGeom prst="rect">
+            <a:avLst/>
+          </a:prstGeom>
+          <a:noFill/>
+        </p:spPr>
+        <p:txBody>
+          <a:bodyPr wrap="square" anchor="t" lIns="0" rIns="0" tIns="0" bIns="0"/>
+          <a:lstStyle/>
+          <a:p>
+            <a:pPr algn="l"/>
+            <a:r>
+              <a:rPr sz="1800" b="0" i="0">
+                <a:solidFill>
+                  <a:srgbClr val="54595D"/>
+                </a:solidFill>
+                <a:latin typeface="Calibri"/>
+              </a:rPr>
+              <a:t>Name two employer duties under the Health and Safety at Work Act.</a:t>
+            </a:r>
+          </a:p>
+          <a:p>
+            <a:r>
+              <a:rPr sz="1800" b="1">
+                <a:solidFill>
+                  <a:srgbClr val="03306E"/>
+                </a:solidFill>
+                <a:latin typeface="Calibri"/>
+              </a:rPr>
+              <a:t>Any two of: safe environment, training, welfare, information, instruction, supervision.</a:t>
+            </a:r>
+          </a:p>
+        </p:txBody>
+      </p:sp>
+      <p:sp>
+        <p:nvSpPr>
+          <p:cNvPr id="8" name="Oval 7"/>
+          <p:cNvSpPr/>
+          <p:nvPr/>
+        </p:nvSpPr>
+        <p:spPr>
+          <a:xfrm>
+            <a:off x="548640" y="2814066"/>
+            <a:ext cx="411480" cy="411480"/>
+          </a:xfrm>
+          <a:prstGeom prst="ellipse">
+            <a:avLst/>
+          </a:prstGeom>
+          <a:solidFill>
+            <a:srgbClr val="F2B705"/>
+          </a:solidFill>
+          <a:ln>
+            <a:noFill/>
+          </a:ln>
+          <a:effectLst/>
+        </p:spPr>
+        <p:style>
+          <a:lnRef idx="1">
+            <a:schemeClr val="accent1"/>
+          </a:lnRef>
+          <a:fillRef idx="3">
+            <a:schemeClr val="accent1"/>
+          </a:fillRef>
+          <a:effectRef idx="2">
+            <a:schemeClr val="accent1"/>
+          </a:effectRef>
+          <a:fontRef idx="minor">
+            <a:schemeClr val="lt1"/>
+          </a:fontRef>
+        </p:style>
+        <p:txBody>
+          <a:bodyPr rtlCol="0" anchor="ctr" lIns="0" rIns="0" tIns="0" bIns="0"/>
+          <a:lstStyle/>
+          <a:p>
+            <a:pPr algn="ctr"/>
+            <a:r>
+              <a:rPr sz="1400" b="1">
+                <a:solidFill>
+                  <a:srgbClr val="202122"/>
+                </a:solidFill>
+                <a:latin typeface="Calibri"/>
+              </a:rPr>
+              <a:t>2</a:t>
+            </a:r>
+          </a:p>
+        </p:txBody>
+      </p:sp>
+      <p:sp>
+        <p:nvSpPr>
+          <p:cNvPr id="9" name="TextBox 8"/>
+          <p:cNvSpPr txBox="1"/>
+          <p:nvPr/>
+        </p:nvSpPr>
+        <p:spPr>
+          <a:xfrm>
+            <a:off x="1234440" y="2795778"/>
+            <a:ext cx="10408615" cy="1030986"/>
+          </a:xfrm>
+          <a:prstGeom prst="rect">
+            <a:avLst/>
+          </a:prstGeom>
+          <a:noFill/>
+        </p:spPr>
+        <p:txBody>
+          <a:bodyPr wrap="square" anchor="t" lIns="0" rIns="0" tIns="0" bIns="0"/>
+          <a:lstStyle/>
+          <a:p>
+            <a:pPr algn="l"/>
+            <a:r>
+              <a:rPr sz="1800" b="0" i="0">
+                <a:solidFill>
+                  <a:srgbClr val="54595D"/>
+                </a:solidFill>
+                <a:latin typeface="Calibri"/>
+              </a:rPr>
+              <a:t>Which law covers hacking into a system?</a:t>
+            </a:r>
+          </a:p>
+          <a:p>
+            <a:r>
+              <a:rPr sz="1800" b="1">
+                <a:solidFill>
+                  <a:srgbClr val="03306E"/>
+                </a:solidFill>
+                <a:latin typeface="Calibri"/>
+              </a:rPr>
+              <a:t>The Computer Misuse Act 1990.</a:t>
+            </a:r>
+          </a:p>
+        </p:txBody>
+      </p:sp>
+      <p:sp>
+        <p:nvSpPr>
+          <p:cNvPr id="10" name="Oval 9"/>
+          <p:cNvSpPr/>
+          <p:nvPr/>
+        </p:nvSpPr>
+        <p:spPr>
+          <a:xfrm>
+            <a:off x="548640" y="4009644"/>
+            <a:ext cx="411480" cy="411480"/>
+          </a:xfrm>
+          <a:prstGeom prst="ellipse">
+            <a:avLst/>
+          </a:prstGeom>
+          <a:solidFill>
+            <a:srgbClr val="F2B705"/>
+          </a:solidFill>
+          <a:ln>
+            <a:noFill/>
+          </a:ln>
+          <a:effectLst/>
+        </p:spPr>
+        <p:style>
+          <a:lnRef idx="1">
+            <a:schemeClr val="accent1"/>
+          </a:lnRef>
+          <a:fillRef idx="3">
+            <a:schemeClr val="accent1"/>
+          </a:fillRef>
+          <a:effectRef idx="2">
+            <a:schemeClr val="accent1"/>
+          </a:effectRef>
+          <a:fontRef idx="minor">
+            <a:schemeClr val="lt1"/>
+          </a:fontRef>
+        </p:style>
+        <p:txBody>
+          <a:bodyPr rtlCol="0" anchor="ctr" lIns="0" rIns="0" tIns="0" bIns="0"/>
+          <a:lstStyle/>
+          <a:p>
+            <a:pPr algn="ctr"/>
+            <a:r>
+              <a:rPr sz="1400" b="1">
+                <a:solidFill>
+                  <a:srgbClr val="202122"/>
+                </a:solidFill>
+                <a:latin typeface="Calibri"/>
+              </a:rPr>
+              <a:t>3</a:t>
+            </a:r>
+          </a:p>
+        </p:txBody>
+      </p:sp>
+      <p:sp>
+        <p:nvSpPr>
+          <p:cNvPr id="11" name="TextBox 10"/>
+          <p:cNvSpPr txBox="1"/>
+          <p:nvPr/>
+        </p:nvSpPr>
+        <p:spPr>
+          <a:xfrm>
+            <a:off x="1234440" y="3991356"/>
+            <a:ext cx="10408615" cy="1030986"/>
+          </a:xfrm>
+          <a:prstGeom prst="rect">
+            <a:avLst/>
+          </a:prstGeom>
+          <a:noFill/>
+        </p:spPr>
+        <p:txBody>
+          <a:bodyPr wrap="square" anchor="t" lIns="0" rIns="0" tIns="0" bIns="0"/>
+          <a:lstStyle/>
+          <a:p>
+            <a:pPr algn="l"/>
+            <a:r>
+              <a:rPr sz="1800" b="0" i="0">
+                <a:solidFill>
+                  <a:srgbClr val="54595D"/>
+                </a:solidFill>
+                <a:latin typeface="Calibri"/>
+              </a:rPr>
+              <a:t>How many protected characteristics are there?</a:t>
+            </a:r>
+          </a:p>
+          <a:p>
+            <a:r>
+              <a:rPr sz="1800" b="1">
+                <a:solidFill>
+                  <a:srgbClr val="03306E"/>
+                </a:solidFill>
+                <a:latin typeface="Calibri"/>
+              </a:rPr>
+              <a:t>Nine.</a:t>
+            </a:r>
+          </a:p>
+        </p:txBody>
+      </p:sp>
+      <p:sp>
+        <p:nvSpPr>
+          <p:cNvPr id="12" name="Oval 11"/>
+          <p:cNvSpPr/>
+          <p:nvPr/>
+        </p:nvSpPr>
+        <p:spPr>
+          <a:xfrm>
+            <a:off x="548640" y="5205221"/>
+            <a:ext cx="411480" cy="411480"/>
+          </a:xfrm>
+          <a:prstGeom prst="ellipse">
+            <a:avLst/>
+          </a:prstGeom>
+          <a:solidFill>
+            <a:srgbClr val="F2B705"/>
+          </a:solidFill>
+          <a:ln>
+            <a:noFill/>
+          </a:ln>
+          <a:effectLst/>
+        </p:spPr>
+        <p:style>
+          <a:lnRef idx="1">
+            <a:schemeClr val="accent1"/>
+          </a:lnRef>
+          <a:fillRef idx="3">
+            <a:schemeClr val="accent1"/>
+          </a:fillRef>
+          <a:effectRef idx="2">
+            <a:schemeClr val="accent1"/>
+          </a:effectRef>
+          <a:fontRef idx="minor">
+            <a:schemeClr val="lt1"/>
+          </a:fontRef>
+        </p:style>
+        <p:txBody>
+          <a:bodyPr rtlCol="0" anchor="ctr" lIns="0" rIns="0" tIns="0" bIns="0"/>
+          <a:lstStyle/>
+          <a:p>
+            <a:pPr algn="ctr"/>
+            <a:r>
+              <a:rPr sz="1400" b="1">
+                <a:solidFill>
+                  <a:srgbClr val="202122"/>
+                </a:solidFill>
+                <a:latin typeface="Calibri"/>
+              </a:rPr>
+              <a:t>4</a:t>
+            </a:r>
+          </a:p>
+        </p:txBody>
+      </p:sp>
+      <p:sp>
+        <p:nvSpPr>
+          <p:cNvPr id="13" name="TextBox 12"/>
+          <p:cNvSpPr txBox="1"/>
+          <p:nvPr/>
+        </p:nvSpPr>
+        <p:spPr>
+          <a:xfrm>
+            <a:off x="1234440" y="5186933"/>
+            <a:ext cx="10408615" cy="1030986"/>
+          </a:xfrm>
+          <a:prstGeom prst="rect">
+            <a:avLst/>
+          </a:prstGeom>
+          <a:noFill/>
+        </p:spPr>
+        <p:txBody>
+          <a:bodyPr wrap="square" anchor="t" lIns="0" rIns="0" tIns="0" bIns="0"/>
+          <a:lstStyle/>
+          <a:p>
+            <a:pPr algn="l"/>
+            <a:r>
+              <a:rPr sz="1800" b="0" i="0">
+                <a:solidFill>
+                  <a:srgbClr val="54595D"/>
+                </a:solidFill>
+                <a:latin typeface="Calibri"/>
+              </a:rPr>
+              <a:t>Which standard covers web accessibility?</a:t>
+            </a:r>
+          </a:p>
+          <a:p>
+            <a:r>
+              <a:rPr sz="1800" b="1">
+                <a:solidFill>
+                  <a:srgbClr val="03306E"/>
+                </a:solidFill>
+                <a:latin typeface="Calibri"/>
+              </a:rPr>
+              <a:t>WCAG.</a:t>
+            </a:r>
+          </a:p>
+        </p:txBody>
+      </p:sp>
+    </p:spTree>
+  </p:cSld>
+  <p:clrMapOvr>
+    <a:masterClrMapping/>
+  </p:clrMapOvr>
+</p:sld>
+</file>
+
+<file path=ppt/slides/slide14.xml><?xml version="1.0" encoding="utf-8"?>
+<p:sld xmlns:a="http://schemas.openxmlformats.org/drawingml/2006/main" xmlns:p="http://schemas.openxmlformats.org/presentationml/2006/main" xmlns:r="http://schemas.openxmlformats.org/officeDocument/2006/relationships">
+  <p:cSld>
+    <p:bg>
+      <p:bgPr>
+        <a:solidFill>
+          <a:srgbClr val="FFFFFF"/>
+        </a:solidFill>
+        <a:effectLst/>
+      </p:bgPr>
+    </p:bg>
+    <p:spTree>
+      <p:nvGrpSpPr>
+        <p:cNvPr id="1" name=""/>
+        <p:cNvGrpSpPr/>
+        <p:nvPr/>
+      </p:nvGrpSpPr>
+      <p:grpSpPr/>
+      <p:sp>
+        <p:nvSpPr>
+          <p:cNvPr id="2" name="TextBox 1"/>
+          <p:cNvSpPr txBox="1"/>
+          <p:nvPr/>
+        </p:nvSpPr>
+        <p:spPr>
+          <a:xfrm>
+            <a:off x="548640" y="320040"/>
+            <a:ext cx="11094415" cy="274320"/>
+          </a:xfrm>
+          <a:prstGeom prst="rect">
+            <a:avLst/>
+          </a:prstGeom>
+          <a:noFill/>
+        </p:spPr>
+        <p:txBody>
+          <a:bodyPr wrap="square" anchor="t" lIns="0" rIns="0" tIns="0" bIns="0"/>
+          <a:lstStyle/>
+          <a:p>
+            <a:pPr algn="l"/>
+            <a:r>
+              <a:rPr sz="1100" b="1" i="0">
+                <a:solidFill>
+                  <a:srgbClr val="54595D"/>
+                </a:solidFill>
+                <a:latin typeface="Calibri"/>
+              </a:rPr>
+              <a:t>CORE COMPONENT  ·  Core Paper 1</a:t>
+            </a:r>
+          </a:p>
+        </p:txBody>
+      </p:sp>
+      <p:sp>
+        <p:nvSpPr>
+          <p:cNvPr id="3" name="TextBox 2"/>
+          <p:cNvSpPr txBox="1"/>
+          <p:nvPr/>
+        </p:nvSpPr>
+        <p:spPr>
+          <a:xfrm>
+            <a:off x="548640" y="566928"/>
+            <a:ext cx="11094415" cy="822960"/>
+          </a:xfrm>
+          <a:prstGeom prst="rect">
+            <a:avLst/>
+          </a:prstGeom>
+          <a:noFill/>
+        </p:spPr>
+        <p:txBody>
+          <a:bodyPr wrap="square" anchor="ctr" lIns="0" rIns="0" tIns="0" bIns="0"/>
+          <a:lstStyle/>
+          <a:p>
+            <a:pPr algn="l"/>
+            <a:r>
+              <a:rPr sz="3200" b="1" i="0">
+                <a:solidFill>
+                  <a:srgbClr val="03306E"/>
+                </a:solidFill>
+                <a:latin typeface="Cambria"/>
+              </a:rPr>
+              <a:t>Activity: Compliance check</a:t>
+            </a:r>
+          </a:p>
+        </p:txBody>
+      </p:sp>
+      <p:sp>
+        <p:nvSpPr>
+          <p:cNvPr id="4" name="TextBox 3"/>
+          <p:cNvSpPr txBox="1"/>
+          <p:nvPr/>
+        </p:nvSpPr>
+        <p:spPr>
+          <a:xfrm>
+            <a:off x="548640" y="6446520"/>
+            <a:ext cx="8229600" cy="274320"/>
+          </a:xfrm>
+          <a:prstGeom prst="rect">
+            <a:avLst/>
+          </a:prstGeom>
+          <a:noFill/>
+        </p:spPr>
+        <p:txBody>
+          <a:bodyPr wrap="square" anchor="t" lIns="0" rIns="0" tIns="0" bIns="0"/>
+          <a:lstStyle/>
+          <a:p>
+            <a:pPr algn="l"/>
+            <a:r>
+              <a:rPr sz="1000" b="0" i="0">
+                <a:solidFill>
+                  <a:srgbClr val="54595D"/>
+                </a:solidFill>
+                <a:latin typeface="Calibri"/>
+              </a:rPr>
+              <a:t>Digital Software Development T Level  ·  Legislation and Guidelines</a:t>
+            </a:r>
+          </a:p>
+        </p:txBody>
+      </p:sp>
+      <p:sp>
+        <p:nvSpPr>
+          <p:cNvPr id="5" name="TextBox 4"/>
+          <p:cNvSpPr txBox="1"/>
+          <p:nvPr/>
+        </p:nvSpPr>
+        <p:spPr>
+          <a:xfrm>
+            <a:off x="10728655" y="6446520"/>
+            <a:ext cx="914400" cy="274320"/>
+          </a:xfrm>
+          <a:prstGeom prst="rect">
+            <a:avLst/>
+          </a:prstGeom>
+          <a:noFill/>
+        </p:spPr>
+        <p:txBody>
+          <a:bodyPr wrap="square" anchor="t" lIns="0" rIns="0" tIns="0" bIns="0"/>
+          <a:lstStyle/>
+          <a:p>
+            <a:pPr algn="r"/>
+            <a:r>
+              <a:rPr sz="1000" b="0" i="0">
+                <a:solidFill>
+                  <a:srgbClr val="54595D"/>
+                </a:solidFill>
+                <a:latin typeface="Calibri"/>
+              </a:rPr>
+              <a:t>14</a:t>
+            </a:r>
+          </a:p>
+        </p:txBody>
+      </p:sp>
+      <p:sp>
+        <p:nvSpPr>
+          <p:cNvPr id="6" name="Rounded Rectangle 5"/>
+          <p:cNvSpPr/>
+          <p:nvPr/>
+        </p:nvSpPr>
+        <p:spPr>
+          <a:xfrm>
+            <a:off x="548640" y="1508760"/>
+            <a:ext cx="2011680" cy="457200"/>
+          </a:xfrm>
+          <a:prstGeom prst="roundRect">
+            <a:avLst>
+              <a:gd name="adj" fmla="val 50000"/>
+            </a:avLst>
+          </a:prstGeom>
+          <a:solidFill>
+            <a:srgbClr val="F2B705"/>
+          </a:solidFill>
+          <a:ln>
+            <a:noFill/>
+          </a:ln>
+          <a:effectLst/>
+        </p:spPr>
+        <p:style>
+          <a:lnRef idx="1">
+            <a:schemeClr val="accent1"/>
+          </a:lnRef>
+          <a:fillRef idx="3">
+            <a:schemeClr val="accent1"/>
+          </a:fillRef>
+          <a:effectRef idx="2">
+            <a:schemeClr val="accent1"/>
+          </a:effectRef>
+          <a:fontRef idx="minor">
+            <a:schemeClr val="lt1"/>
+          </a:fontRef>
+        </p:style>
+        <p:txBody>
+          <a:bodyPr rtlCol="0" anchor="ctr"/>
+          <a:lstStyle/>
+          <a:p/>
+        </p:txBody>
+      </p:sp>
+      <p:sp>
+        <p:nvSpPr>
+          <p:cNvPr id="7" name="TextBox 6"/>
+          <p:cNvSpPr txBox="1"/>
+          <p:nvPr/>
+        </p:nvSpPr>
+        <p:spPr>
+          <a:xfrm>
+            <a:off x="548640" y="1508760"/>
+            <a:ext cx="2011680" cy="457200"/>
+          </a:xfrm>
+          <a:prstGeom prst="rect">
+            <a:avLst/>
+          </a:prstGeom>
+          <a:noFill/>
+        </p:spPr>
+        <p:txBody>
+          <a:bodyPr wrap="square" anchor="ctr" lIns="0" rIns="0" tIns="0" bIns="0"/>
+          <a:lstStyle/>
+          <a:p>
+            <a:pPr algn="ctr"/>
+            <a:r>
+              <a:rPr sz="1400" b="1" i="0">
+                <a:solidFill>
+                  <a:srgbClr val="202122"/>
+                </a:solidFill>
+                <a:latin typeface="Calibri"/>
+              </a:rPr>
+              <a:t>20 minutes</a:t>
+            </a:r>
+          </a:p>
+        </p:txBody>
+      </p:sp>
+      <p:sp>
+        <p:nvSpPr>
+          <p:cNvPr id="8" name="TextBox 7"/>
+          <p:cNvSpPr txBox="1"/>
+          <p:nvPr/>
+        </p:nvSpPr>
+        <p:spPr>
+          <a:xfrm>
+            <a:off x="2743200" y="1508760"/>
+            <a:ext cx="4754880" cy="457200"/>
+          </a:xfrm>
+          <a:prstGeom prst="rect">
+            <a:avLst/>
+          </a:prstGeom>
+          <a:noFill/>
+        </p:spPr>
+        <p:txBody>
+          <a:bodyPr wrap="square" anchor="ctr" lIns="0" rIns="0" tIns="0" bIns="0"/>
+          <a:lstStyle/>
+          <a:p>
+            <a:pPr algn="l"/>
+            <a:r>
+              <a:rPr sz="1400" b="0" i="1">
+                <a:solidFill>
+                  <a:srgbClr val="54595D"/>
+                </a:solidFill>
+                <a:latin typeface="Calibri"/>
+              </a:rPr>
+              <a:t>Pairs</a:t>
+            </a:r>
+          </a:p>
+        </p:txBody>
+      </p:sp>
+      <p:sp>
+        <p:nvSpPr>
+          <p:cNvPr id="9" name="Oval 8"/>
+          <p:cNvSpPr/>
+          <p:nvPr/>
+        </p:nvSpPr>
+        <p:spPr>
+          <a:xfrm>
+            <a:off x="548640" y="2482596"/>
+            <a:ext cx="384048" cy="384048"/>
+          </a:xfrm>
+          <a:prstGeom prst="ellipse">
+            <a:avLst/>
+          </a:prstGeom>
+          <a:solidFill>
+            <a:srgbClr val="0645AD"/>
+          </a:solidFill>
+          <a:ln>
+            <a:noFill/>
+          </a:ln>
+          <a:effectLst/>
+        </p:spPr>
+        <p:style>
+          <a:lnRef idx="1">
+            <a:schemeClr val="accent1"/>
+          </a:lnRef>
+          <a:fillRef idx="3">
+            <a:schemeClr val="accent1"/>
+          </a:fillRef>
+          <a:effectRef idx="2">
+            <a:schemeClr val="accent1"/>
+          </a:effectRef>
+          <a:fontRef idx="minor">
+            <a:schemeClr val="lt1"/>
+          </a:fontRef>
+        </p:style>
+        <p:txBody>
+          <a:bodyPr rtlCol="0" anchor="ctr" lIns="0" rIns="0" tIns="0" bIns="0"/>
+          <a:lstStyle/>
+          <a:p>
+            <a:pPr algn="ctr"/>
+            <a:r>
+              <a:rPr sz="1300" b="1">
+                <a:solidFill>
+                  <a:srgbClr val="FFFFFF"/>
+                </a:solidFill>
+                <a:latin typeface="Calibri"/>
+              </a:rPr>
+              <a:t>1</a:t>
+            </a:r>
+          </a:p>
+        </p:txBody>
+      </p:sp>
+      <p:sp>
+        <p:nvSpPr>
+          <p:cNvPr id="10" name="TextBox 9"/>
+          <p:cNvSpPr txBox="1"/>
+          <p:nvPr/>
+        </p:nvSpPr>
+        <p:spPr>
+          <a:xfrm>
+            <a:off x="1143000" y="2240280"/>
+            <a:ext cx="5943600" cy="868680"/>
+          </a:xfrm>
+          <a:prstGeom prst="rect">
+            <a:avLst/>
+          </a:prstGeom>
+          <a:noFill/>
+        </p:spPr>
+        <p:txBody>
+          <a:bodyPr wrap="square" anchor="ctr" lIns="0" rIns="0" tIns="0" bIns="0"/>
+          <a:lstStyle/>
+          <a:p>
+            <a:pPr algn="l"/>
+            <a:r>
+              <a:rPr sz="1700" b="0" i="0">
+                <a:solidFill>
+                  <a:srgbClr val="202122"/>
+                </a:solidFill>
+                <a:latin typeface="Calibri"/>
+              </a:rPr>
+              <a:t>Review a feature list for a new fitness app from your teacher.</a:t>
+            </a:r>
+          </a:p>
+        </p:txBody>
+      </p:sp>
+      <p:sp>
+        <p:nvSpPr>
+          <p:cNvPr id="11" name="Oval 10"/>
+          <p:cNvSpPr/>
+          <p:nvPr/>
+        </p:nvSpPr>
+        <p:spPr>
+          <a:xfrm>
+            <a:off x="548640" y="3461004"/>
+            <a:ext cx="384048" cy="384048"/>
+          </a:xfrm>
+          <a:prstGeom prst="ellipse">
+            <a:avLst/>
+          </a:prstGeom>
+          <a:solidFill>
+            <a:srgbClr val="0645AD"/>
+          </a:solidFill>
+          <a:ln>
+            <a:noFill/>
+          </a:ln>
+          <a:effectLst/>
+        </p:spPr>
+        <p:style>
+          <a:lnRef idx="1">
+            <a:schemeClr val="accent1"/>
+          </a:lnRef>
+          <a:fillRef idx="3">
+            <a:schemeClr val="accent1"/>
+          </a:fillRef>
+          <a:effectRef idx="2">
+            <a:schemeClr val="accent1"/>
+          </a:effectRef>
+          <a:fontRef idx="minor">
+            <a:schemeClr val="lt1"/>
+          </a:fontRef>
+        </p:style>
+        <p:txBody>
+          <a:bodyPr rtlCol="0" anchor="ctr" lIns="0" rIns="0" tIns="0" bIns="0"/>
+          <a:lstStyle/>
+          <a:p>
+            <a:pPr algn="ctr"/>
+            <a:r>
+              <a:rPr sz="1300" b="1">
+                <a:solidFill>
+                  <a:srgbClr val="FFFFFF"/>
+                </a:solidFill>
+                <a:latin typeface="Calibri"/>
+              </a:rPr>
+              <a:t>2</a:t>
+            </a:r>
+          </a:p>
+        </p:txBody>
+      </p:sp>
+      <p:sp>
+        <p:nvSpPr>
+          <p:cNvPr id="12" name="TextBox 11"/>
+          <p:cNvSpPr txBox="1"/>
+          <p:nvPr/>
+        </p:nvSpPr>
+        <p:spPr>
+          <a:xfrm>
+            <a:off x="1143000" y="3218688"/>
+            <a:ext cx="5943600" cy="868680"/>
+          </a:xfrm>
+          <a:prstGeom prst="rect">
+            <a:avLst/>
+          </a:prstGeom>
+          <a:noFill/>
+        </p:spPr>
+        <p:txBody>
+          <a:bodyPr wrap="square" anchor="ctr" lIns="0" rIns="0" tIns="0" bIns="0"/>
+          <a:lstStyle/>
+          <a:p>
+            <a:pPr algn="l"/>
+            <a:r>
+              <a:rPr sz="1700" b="0" i="0">
+                <a:solidFill>
+                  <a:srgbClr val="202122"/>
+                </a:solidFill>
+                <a:latin typeface="Calibri"/>
+              </a:rPr>
+              <a:t>Flag every feature that raises a legal or ethical issue.</a:t>
+            </a:r>
+          </a:p>
+        </p:txBody>
+      </p:sp>
+      <p:sp>
+        <p:nvSpPr>
+          <p:cNvPr id="13" name="Oval 12"/>
+          <p:cNvSpPr/>
+          <p:nvPr/>
+        </p:nvSpPr>
+        <p:spPr>
+          <a:xfrm>
+            <a:off x="548640" y="4439412"/>
+            <a:ext cx="384048" cy="384048"/>
+          </a:xfrm>
+          <a:prstGeom prst="ellipse">
+            <a:avLst/>
+          </a:prstGeom>
+          <a:solidFill>
+            <a:srgbClr val="0645AD"/>
+          </a:solidFill>
+          <a:ln>
+            <a:noFill/>
+          </a:ln>
+          <a:effectLst/>
+        </p:spPr>
+        <p:style>
+          <a:lnRef idx="1">
+            <a:schemeClr val="accent1"/>
+          </a:lnRef>
+          <a:fillRef idx="3">
+            <a:schemeClr val="accent1"/>
+          </a:fillRef>
+          <a:effectRef idx="2">
+            <a:schemeClr val="accent1"/>
+          </a:effectRef>
+          <a:fontRef idx="minor">
+            <a:schemeClr val="lt1"/>
+          </a:fontRef>
+        </p:style>
+        <p:txBody>
+          <a:bodyPr rtlCol="0" anchor="ctr" lIns="0" rIns="0" tIns="0" bIns="0"/>
+          <a:lstStyle/>
+          <a:p>
+            <a:pPr algn="ctr"/>
+            <a:r>
+              <a:rPr sz="1300" b="1">
+                <a:solidFill>
+                  <a:srgbClr val="FFFFFF"/>
+                </a:solidFill>
+                <a:latin typeface="Calibri"/>
+              </a:rPr>
+              <a:t>3</a:t>
+            </a:r>
+          </a:p>
+        </p:txBody>
+      </p:sp>
+      <p:sp>
+        <p:nvSpPr>
+          <p:cNvPr id="14" name="TextBox 13"/>
+          <p:cNvSpPr txBox="1"/>
+          <p:nvPr/>
+        </p:nvSpPr>
+        <p:spPr>
+          <a:xfrm>
+            <a:off x="1143000" y="4197096"/>
+            <a:ext cx="5943600" cy="868680"/>
+          </a:xfrm>
+          <a:prstGeom prst="rect">
+            <a:avLst/>
+          </a:prstGeom>
+          <a:noFill/>
+        </p:spPr>
+        <p:txBody>
+          <a:bodyPr wrap="square" anchor="ctr" lIns="0" rIns="0" tIns="0" bIns="0"/>
+          <a:lstStyle/>
+          <a:p>
+            <a:pPr algn="l"/>
+            <a:r>
+              <a:rPr sz="1700" b="0" i="0">
+                <a:solidFill>
+                  <a:srgbClr val="202122"/>
+                </a:solidFill>
+                <a:latin typeface="Calibri"/>
+              </a:rPr>
+              <a:t>Name the law or guideline involved.</a:t>
+            </a:r>
+          </a:p>
+        </p:txBody>
+      </p:sp>
+      <p:sp>
+        <p:nvSpPr>
+          <p:cNvPr id="15" name="Oval 14"/>
+          <p:cNvSpPr/>
+          <p:nvPr/>
+        </p:nvSpPr>
+        <p:spPr>
+          <a:xfrm>
+            <a:off x="548640" y="5417820"/>
+            <a:ext cx="384048" cy="384048"/>
+          </a:xfrm>
+          <a:prstGeom prst="ellipse">
+            <a:avLst/>
+          </a:prstGeom>
+          <a:solidFill>
+            <a:srgbClr val="0645AD"/>
+          </a:solidFill>
+          <a:ln>
+            <a:noFill/>
+          </a:ln>
+          <a:effectLst/>
+        </p:spPr>
+        <p:style>
+          <a:lnRef idx="1">
+            <a:schemeClr val="accent1"/>
+          </a:lnRef>
+          <a:fillRef idx="3">
+            <a:schemeClr val="accent1"/>
+          </a:fillRef>
+          <a:effectRef idx="2">
+            <a:schemeClr val="accent1"/>
+          </a:effectRef>
+          <a:fontRef idx="minor">
+            <a:schemeClr val="lt1"/>
+          </a:fontRef>
+        </p:style>
+        <p:txBody>
+          <a:bodyPr rtlCol="0" anchor="ctr" lIns="0" rIns="0" tIns="0" bIns="0"/>
+          <a:lstStyle/>
+          <a:p>
+            <a:pPr algn="ctr"/>
+            <a:r>
+              <a:rPr sz="1300" b="1">
+                <a:solidFill>
+                  <a:srgbClr val="FFFFFF"/>
+                </a:solidFill>
+                <a:latin typeface="Calibri"/>
+              </a:rPr>
+              <a:t>4</a:t>
+            </a:r>
+          </a:p>
+        </p:txBody>
+      </p:sp>
+      <p:sp>
+        <p:nvSpPr>
+          <p:cNvPr id="16" name="TextBox 15"/>
+          <p:cNvSpPr txBox="1"/>
+          <p:nvPr/>
+        </p:nvSpPr>
+        <p:spPr>
+          <a:xfrm>
+            <a:off x="1143000" y="5175504"/>
+            <a:ext cx="5943600" cy="868680"/>
+          </a:xfrm>
+          <a:prstGeom prst="rect">
+            <a:avLst/>
+          </a:prstGeom>
+          <a:noFill/>
+        </p:spPr>
+        <p:txBody>
+          <a:bodyPr wrap="square" anchor="ctr" lIns="0" rIns="0" tIns="0" bIns="0"/>
+          <a:lstStyle/>
+          <a:p>
+            <a:pPr algn="l"/>
+            <a:r>
+              <a:rPr sz="1700" b="0" i="0">
+                <a:solidFill>
+                  <a:srgbClr val="202122"/>
+                </a:solidFill>
+                <a:latin typeface="Calibri"/>
+              </a:rPr>
+              <a:t>Suggest a compliant alternative.</a:t>
+            </a:r>
+          </a:p>
+        </p:txBody>
+      </p:sp>
+      <p:sp>
+        <p:nvSpPr>
+          <p:cNvPr id="17" name="Rounded Rectangle 16"/>
+          <p:cNvSpPr/>
+          <p:nvPr/>
+        </p:nvSpPr>
+        <p:spPr>
+          <a:xfrm>
+            <a:off x="7772400" y="1508760"/>
+            <a:ext cx="3867912" cy="4572000"/>
+          </a:xfrm>
+          <a:prstGeom prst="roundRect">
+            <a:avLst>
+              <a:gd name="adj" fmla="val 8000"/>
+            </a:avLst>
+          </a:prstGeom>
+          <a:solidFill>
+            <a:srgbClr val="EAF3FF"/>
+          </a:solidFill>
+          <a:ln>
+            <a:noFill/>
+          </a:ln>
+          <a:effectLst/>
+        </p:spPr>
+        <p:style>
+          <a:lnRef idx="1">
+            <a:schemeClr val="accent1"/>
+          </a:lnRef>
+          <a:fillRef idx="3">
+            <a:schemeClr val="accent1"/>
+          </a:fillRef>
+          <a:effectRef idx="2">
+            <a:schemeClr val="accent1"/>
+          </a:effectRef>
+          <a:fontRef idx="minor">
+            <a:schemeClr val="lt1"/>
+          </a:fontRef>
+        </p:style>
+        <p:txBody>
+          <a:bodyPr rtlCol="0" anchor="ctr"/>
+          <a:lstStyle/>
+          <a:p/>
+        </p:txBody>
+      </p:sp>
+      <p:sp>
+        <p:nvSpPr>
+          <p:cNvPr id="18" name="TextBox 17"/>
+          <p:cNvSpPr txBox="1"/>
+          <p:nvPr/>
+        </p:nvSpPr>
+        <p:spPr>
+          <a:xfrm>
+            <a:off x="8046720" y="1737360"/>
+            <a:ext cx="3291840" cy="365760"/>
+          </a:xfrm>
+          <a:prstGeom prst="rect">
+            <a:avLst/>
+          </a:prstGeom>
+          <a:noFill/>
+        </p:spPr>
+        <p:txBody>
+          <a:bodyPr wrap="square" anchor="t" lIns="0" rIns="0" tIns="0" bIns="0"/>
+          <a:lstStyle/>
+          <a:p>
+            <a:pPr algn="l"/>
+            <a:r>
+              <a:rPr sz="1300" b="1" i="0">
+                <a:solidFill>
+                  <a:srgbClr val="0645AD"/>
+                </a:solidFill>
+                <a:latin typeface="Calibri"/>
+              </a:rPr>
+              <a:t>SUCCESS CRITERIA</a:t>
+            </a:r>
+          </a:p>
+        </p:txBody>
+      </p:sp>
+      <p:sp>
+        <p:nvSpPr>
+          <p:cNvPr id="19" name="TextBox 18"/>
+          <p:cNvSpPr txBox="1"/>
+          <p:nvPr/>
+        </p:nvSpPr>
+        <p:spPr>
+          <a:xfrm>
+            <a:off x="8046720" y="2240280"/>
+            <a:ext cx="3337560" cy="3657600"/>
+          </a:xfrm>
+          <a:prstGeom prst="rect">
+            <a:avLst/>
+          </a:prstGeom>
+          <a:noFill/>
+        </p:spPr>
+        <p:txBody>
+          <a:bodyPr wrap="square" lIns="0" rIns="0" tIns="0" bIns="0">
+            <a:spAutoFit/>
+          </a:bodyPr>
+          <a:lstStyle/>
+          <a:p>
+            <a:pPr marL="274320" indent="-274320">
+              <a:spcAft>
+                <a:spcPts val="810"/>
+              </a:spcAft>
+              <a:buClr>
+                <a:srgbClr val="0645AD"/>
+              </a:buClr>
+              <a:buFont typeface="Arial"/>
+              <a:buChar char="•"/>
+            </a:pPr>
+            <a:r>
+              <a:rPr sz="1800" b="0">
+                <a:solidFill>
+                  <a:srgbClr val="202122"/>
+                </a:solidFill>
+                <a:latin typeface="Calibri"/>
+              </a:rPr>
+              <a:t>Data protection issues identified</a:t>
+            </a:r>
+          </a:p>
+          <a:p>
+            <a:pPr marL="274320" indent="-274320">
+              <a:spcAft>
+                <a:spcPts val="810"/>
+              </a:spcAft>
+              <a:buClr>
+                <a:srgbClr val="0645AD"/>
+              </a:buClr>
+              <a:buFont typeface="Arial"/>
+              <a:buChar char="•"/>
+            </a:pPr>
+            <a:r>
+              <a:rPr sz="1800" b="0">
+                <a:solidFill>
+                  <a:srgbClr val="202122"/>
+                </a:solidFill>
+                <a:latin typeface="Calibri"/>
+              </a:rPr>
+              <a:t>Accessibility considered</a:t>
+            </a:r>
+          </a:p>
+          <a:p>
+            <a:pPr marL="274320" indent="-274320">
+              <a:spcAft>
+                <a:spcPts val="810"/>
+              </a:spcAft>
+              <a:buClr>
+                <a:srgbClr val="0645AD"/>
+              </a:buClr>
+              <a:buFont typeface="Arial"/>
+              <a:buChar char="•"/>
+            </a:pPr>
+            <a:r>
+              <a:rPr sz="1800" b="0">
+                <a:solidFill>
+                  <a:srgbClr val="202122"/>
+                </a:solidFill>
+                <a:latin typeface="Calibri"/>
+              </a:rPr>
+              <a:t>Alternatives are practical</a:t>
+            </a:r>
+          </a:p>
+        </p:txBody>
+      </p:sp>
+    </p:spTree>
+  </p:cSld>
+  <p:clrMapOvr>
+    <a:masterClrMapping/>
+  </p:clrMapOvr>
+</p:sld>
+</file>
+
+<file path=ppt/slides/slide15.xml><?xml version="1.0" encoding="utf-8"?>
+<p:sld xmlns:a="http://schemas.openxmlformats.org/drawingml/2006/main" xmlns:p="http://schemas.openxmlformats.org/presentationml/2006/main" xmlns:r="http://schemas.openxmlformats.org/officeDocument/2006/relationships">
+  <p:cSld>
+    <p:bg>
+      <p:bgPr>
+        <a:solidFill>
+          <a:srgbClr val="03306E"/>
+        </a:solidFill>
+        <a:effectLst/>
+      </p:bgPr>
+    </p:bg>
+    <p:spTree>
+      <p:nvGrpSpPr>
+        <p:cNvPr id="1" name=""/>
+        <p:cNvGrpSpPr/>
+        <p:nvPr/>
+      </p:nvGrpSpPr>
+      <p:grpSpPr/>
+      <p:sp>
+        <p:nvSpPr>
+          <p:cNvPr id="2" name="TextBox 1"/>
+          <p:cNvSpPr txBox="1"/>
+          <p:nvPr/>
+        </p:nvSpPr>
+        <p:spPr>
+          <a:xfrm>
+            <a:off x="548640" y="320040"/>
+            <a:ext cx="11094415" cy="274320"/>
+          </a:xfrm>
+          <a:prstGeom prst="rect">
+            <a:avLst/>
+          </a:prstGeom>
+          <a:noFill/>
+        </p:spPr>
+        <p:txBody>
+          <a:bodyPr wrap="square" anchor="t" lIns="0" rIns="0" tIns="0" bIns="0"/>
+          <a:lstStyle/>
+          <a:p>
+            <a:pPr algn="l"/>
+            <a:r>
+              <a:rPr sz="1100" b="1" i="0">
+                <a:solidFill>
+                  <a:srgbClr val="A9C8F0"/>
+                </a:solidFill>
+                <a:latin typeface="Calibri"/>
+              </a:rPr>
+              <a:t>CORE COMPONENT  ·  Core Paper 1</a:t>
+            </a:r>
+          </a:p>
+        </p:txBody>
+      </p:sp>
+      <p:sp>
+        <p:nvSpPr>
+          <p:cNvPr id="3" name="TextBox 2"/>
+          <p:cNvSpPr txBox="1"/>
+          <p:nvPr/>
+        </p:nvSpPr>
+        <p:spPr>
+          <a:xfrm>
+            <a:off x="548640" y="566928"/>
+            <a:ext cx="11094415" cy="822960"/>
+          </a:xfrm>
+          <a:prstGeom prst="rect">
+            <a:avLst/>
+          </a:prstGeom>
+          <a:noFill/>
+        </p:spPr>
+        <p:txBody>
+          <a:bodyPr wrap="square" anchor="ctr" lIns="0" rIns="0" tIns="0" bIns="0"/>
+          <a:lstStyle/>
+          <a:p>
+            <a:pPr algn="l"/>
+            <a:r>
+              <a:rPr sz="3200" b="1" i="0">
+                <a:solidFill>
+                  <a:srgbClr val="FFFFFF"/>
+                </a:solidFill>
+                <a:latin typeface="Cambria"/>
+              </a:rPr>
+              <a:t>Exit ticket</a:t>
+            </a:r>
+          </a:p>
+        </p:txBody>
+      </p:sp>
+      <p:sp>
+        <p:nvSpPr>
+          <p:cNvPr id="4" name="Oval 3"/>
+          <p:cNvSpPr/>
+          <p:nvPr/>
+        </p:nvSpPr>
+        <p:spPr>
+          <a:xfrm>
+            <a:off x="548640" y="1737360"/>
+            <a:ext cx="502920" cy="502920"/>
+          </a:xfrm>
+          <a:prstGeom prst="ellipse">
+            <a:avLst/>
+          </a:prstGeom>
+          <a:solidFill>
+            <a:srgbClr val="F2B705"/>
+          </a:solidFill>
+          <a:ln>
+            <a:noFill/>
+          </a:ln>
+          <a:effectLst/>
+        </p:spPr>
+        <p:style>
+          <a:lnRef idx="1">
+            <a:schemeClr val="accent1"/>
+          </a:lnRef>
+          <a:fillRef idx="3">
+            <a:schemeClr val="accent1"/>
+          </a:fillRef>
+          <a:effectRef idx="2">
+            <a:schemeClr val="accent1"/>
+          </a:effectRef>
+          <a:fontRef idx="minor">
+            <a:schemeClr val="lt1"/>
+          </a:fontRef>
+        </p:style>
+        <p:txBody>
+          <a:bodyPr rtlCol="0" anchor="ctr" lIns="0" rIns="0" tIns="0" bIns="0"/>
+          <a:lstStyle/>
+          <a:p>
+            <a:pPr algn="ctr"/>
+            <a:r>
+              <a:rPr sz="1700" b="1">
+                <a:solidFill>
+                  <a:srgbClr val="202122"/>
+                </a:solidFill>
+                <a:latin typeface="Calibri"/>
+              </a:rPr>
+              <a:t>1</a:t>
+            </a:r>
+          </a:p>
+        </p:txBody>
+      </p:sp>
+      <p:sp>
+        <p:nvSpPr>
+          <p:cNvPr id="5" name="TextBox 4"/>
+          <p:cNvSpPr txBox="1"/>
+          <p:nvPr/>
+        </p:nvSpPr>
+        <p:spPr>
+          <a:xfrm>
+            <a:off x="1325880" y="1645920"/>
+            <a:ext cx="6583680" cy="822960"/>
+          </a:xfrm>
+          <a:prstGeom prst="rect">
+            <a:avLst/>
+          </a:prstGeom>
+          <a:noFill/>
+        </p:spPr>
+        <p:txBody>
+          <a:bodyPr wrap="square" anchor="ctr" lIns="0" rIns="0" tIns="0" bIns="0"/>
+          <a:lstStyle/>
+          <a:p>
+            <a:pPr algn="l"/>
+            <a:r>
+              <a:rPr sz="2000" b="0" i="0">
+                <a:solidFill>
+                  <a:srgbClr val="FFFFFF"/>
+                </a:solidFill>
+                <a:latin typeface="Calibri"/>
+              </a:rPr>
+              <a:t>Why must developers know data protection law?</a:t>
+            </a:r>
+          </a:p>
+        </p:txBody>
+      </p:sp>
+      <p:sp>
+        <p:nvSpPr>
+          <p:cNvPr id="6" name="Oval 5"/>
+          <p:cNvSpPr/>
+          <p:nvPr/>
+        </p:nvSpPr>
+        <p:spPr>
+          <a:xfrm>
+            <a:off x="548640" y="2697480"/>
+            <a:ext cx="502920" cy="502920"/>
+          </a:xfrm>
+          <a:prstGeom prst="ellipse">
+            <a:avLst/>
+          </a:prstGeom>
+          <a:solidFill>
+            <a:srgbClr val="F2B705"/>
+          </a:solidFill>
+          <a:ln>
+            <a:noFill/>
+          </a:ln>
+          <a:effectLst/>
+        </p:spPr>
+        <p:style>
+          <a:lnRef idx="1">
+            <a:schemeClr val="accent1"/>
+          </a:lnRef>
+          <a:fillRef idx="3">
+            <a:schemeClr val="accent1"/>
+          </a:fillRef>
+          <a:effectRef idx="2">
+            <a:schemeClr val="accent1"/>
+          </a:effectRef>
+          <a:fontRef idx="minor">
+            <a:schemeClr val="lt1"/>
+          </a:fontRef>
+        </p:style>
+        <p:txBody>
+          <a:bodyPr rtlCol="0" anchor="ctr" lIns="0" rIns="0" tIns="0" bIns="0"/>
+          <a:lstStyle/>
+          <a:p>
+            <a:pPr algn="ctr"/>
+            <a:r>
+              <a:rPr sz="1700" b="1">
+                <a:solidFill>
+                  <a:srgbClr val="202122"/>
+                </a:solidFill>
+                <a:latin typeface="Calibri"/>
+              </a:rPr>
+              <a:t>2</a:t>
+            </a:r>
+          </a:p>
+        </p:txBody>
+      </p:sp>
+      <p:sp>
+        <p:nvSpPr>
+          <p:cNvPr id="7" name="TextBox 6"/>
+          <p:cNvSpPr txBox="1"/>
+          <p:nvPr/>
+        </p:nvSpPr>
+        <p:spPr>
+          <a:xfrm>
+            <a:off x="1325880" y="2606040"/>
+            <a:ext cx="6583680" cy="822960"/>
+          </a:xfrm>
+          <a:prstGeom prst="rect">
+            <a:avLst/>
+          </a:prstGeom>
+          <a:noFill/>
+        </p:spPr>
+        <p:txBody>
+          <a:bodyPr wrap="square" anchor="ctr" lIns="0" rIns="0" tIns="0" bIns="0"/>
+          <a:lstStyle/>
+          <a:p>
+            <a:pPr algn="l"/>
+            <a:r>
+              <a:rPr sz="2000" b="0" i="0">
+                <a:solidFill>
+                  <a:srgbClr val="FFFFFF"/>
+                </a:solidFill>
+                <a:latin typeface="Calibri"/>
+              </a:rPr>
+              <a:t>What is an acceptable use policy for?</a:t>
+            </a:r>
+          </a:p>
+        </p:txBody>
+      </p:sp>
+      <p:sp>
+        <p:nvSpPr>
+          <p:cNvPr id="8" name="Oval 7"/>
+          <p:cNvSpPr/>
+          <p:nvPr/>
+        </p:nvSpPr>
+        <p:spPr>
+          <a:xfrm>
+            <a:off x="548640" y="3657600"/>
+            <a:ext cx="502920" cy="502920"/>
+          </a:xfrm>
+          <a:prstGeom prst="ellipse">
+            <a:avLst/>
+          </a:prstGeom>
+          <a:solidFill>
+            <a:srgbClr val="F2B705"/>
+          </a:solidFill>
+          <a:ln>
+            <a:noFill/>
+          </a:ln>
+          <a:effectLst/>
+        </p:spPr>
+        <p:style>
+          <a:lnRef idx="1">
+            <a:schemeClr val="accent1"/>
+          </a:lnRef>
+          <a:fillRef idx="3">
+            <a:schemeClr val="accent1"/>
+          </a:fillRef>
+          <a:effectRef idx="2">
+            <a:schemeClr val="accent1"/>
+          </a:effectRef>
+          <a:fontRef idx="minor">
+            <a:schemeClr val="lt1"/>
+          </a:fontRef>
+        </p:style>
+        <p:txBody>
+          <a:bodyPr rtlCol="0" anchor="ctr" lIns="0" rIns="0" tIns="0" bIns="0"/>
+          <a:lstStyle/>
+          <a:p>
+            <a:pPr algn="ctr"/>
+            <a:r>
+              <a:rPr sz="1700" b="1">
+                <a:solidFill>
+                  <a:srgbClr val="202122"/>
+                </a:solidFill>
+                <a:latin typeface="Calibri"/>
+              </a:rPr>
+              <a:t>3</a:t>
+            </a:r>
+          </a:p>
+        </p:txBody>
+      </p:sp>
+      <p:sp>
+        <p:nvSpPr>
+          <p:cNvPr id="9" name="TextBox 8"/>
+          <p:cNvSpPr txBox="1"/>
+          <p:nvPr/>
+        </p:nvSpPr>
+        <p:spPr>
+          <a:xfrm>
+            <a:off x="1325880" y="3566160"/>
+            <a:ext cx="6583680" cy="822960"/>
+          </a:xfrm>
+          <a:prstGeom prst="rect">
+            <a:avLst/>
+          </a:prstGeom>
+          <a:noFill/>
+        </p:spPr>
+        <p:txBody>
+          <a:bodyPr wrap="square" anchor="ctr" lIns="0" rIns="0" tIns="0" bIns="0"/>
+          <a:lstStyle/>
+          <a:p>
+            <a:pPr algn="l"/>
+            <a:r>
+              <a:rPr sz="2000" b="0" i="0">
+                <a:solidFill>
+                  <a:srgbClr val="FFFFFF"/>
+                </a:solidFill>
+                <a:latin typeface="Calibri"/>
+              </a:rPr>
+              <a:t>Why is whistleblowing protected?</a:t>
+            </a:r>
+          </a:p>
+        </p:txBody>
+      </p:sp>
+      <p:sp>
+        <p:nvSpPr>
+          <p:cNvPr id="10" name="Rounded Rectangle 9"/>
+          <p:cNvSpPr/>
+          <p:nvPr/>
+        </p:nvSpPr>
+        <p:spPr>
+          <a:xfrm>
+            <a:off x="8229600" y="1645920"/>
+            <a:ext cx="3410712" cy="2926080"/>
+          </a:xfrm>
+          <a:prstGeom prst="roundRect">
+            <a:avLst>
+              <a:gd name="adj" fmla="val 8000"/>
+            </a:avLst>
+          </a:prstGeom>
+          <a:solidFill>
+            <a:srgbClr val="0645AD"/>
+          </a:solidFill>
+          <a:ln>
+            <a:noFill/>
+          </a:ln>
+          <a:effectLst/>
+        </p:spPr>
+        <p:style>
+          <a:lnRef idx="1">
+            <a:schemeClr val="accent1"/>
+          </a:lnRef>
+          <a:fillRef idx="3">
+            <a:schemeClr val="accent1"/>
+          </a:fillRef>
+          <a:effectRef idx="2">
+            <a:schemeClr val="accent1"/>
+          </a:effectRef>
+          <a:fontRef idx="minor">
+            <a:schemeClr val="lt1"/>
+          </a:fontRef>
+        </p:style>
+        <p:txBody>
+          <a:bodyPr rtlCol="0" anchor="ctr"/>
+          <a:lstStyle/>
+          <a:p/>
+        </p:txBody>
+      </p:sp>
+      <p:sp>
+        <p:nvSpPr>
+          <p:cNvPr id="11" name="TextBox 10"/>
+          <p:cNvSpPr txBox="1"/>
+          <p:nvPr/>
+        </p:nvSpPr>
+        <p:spPr>
+          <a:xfrm>
+            <a:off x="8503920" y="1874519"/>
+            <a:ext cx="2926080" cy="365760"/>
+          </a:xfrm>
+          <a:prstGeom prst="rect">
+            <a:avLst/>
+          </a:prstGeom>
+          <a:noFill/>
+        </p:spPr>
+        <p:txBody>
+          <a:bodyPr wrap="square" anchor="t" lIns="0" rIns="0" tIns="0" bIns="0"/>
+          <a:lstStyle/>
+          <a:p>
+            <a:pPr algn="l"/>
+            <a:r>
+              <a:rPr sz="1300" b="1" i="0">
+                <a:solidFill>
+                  <a:srgbClr val="A9C8F0"/>
+                </a:solidFill>
+                <a:latin typeface="Calibri"/>
+              </a:rPr>
+              <a:t>REVISE THIS TOPIC</a:t>
+            </a:r>
+          </a:p>
+        </p:txBody>
+      </p:sp>
+      <p:sp>
+        <p:nvSpPr>
+          <p:cNvPr id="12" name="TextBox 11"/>
+          <p:cNvSpPr txBox="1"/>
+          <p:nvPr/>
+        </p:nvSpPr>
+        <p:spPr>
+          <a:xfrm>
+            <a:off x="8503920" y="2286000"/>
+            <a:ext cx="2926080" cy="548640"/>
+          </a:xfrm>
+          <a:prstGeom prst="rect">
+            <a:avLst/>
+          </a:prstGeom>
+          <a:noFill/>
+        </p:spPr>
+        <p:txBody>
+          <a:bodyPr wrap="square" anchor="t" lIns="0" rIns="0" tIns="0" bIns="0"/>
+          <a:lstStyle/>
+          <a:p>
+            <a:pPr algn="l"/>
+            <a:r>
+              <a:rPr sz="1400" b="0" i="0">
+                <a:solidFill>
+                  <a:srgbClr val="FFFFFF"/>
+                </a:solidFill>
+                <a:latin typeface="Calibri"/>
+              </a:rPr>
+              <a:t>Revision notes for this lesson are on the study wiki:</a:t>
+            </a:r>
+          </a:p>
+        </p:txBody>
+      </p:sp>
+      <p:sp>
+        <p:nvSpPr>
+          <p:cNvPr id="13" name="TextBox 12"/>
+          <p:cNvSpPr txBox="1"/>
+          <p:nvPr/>
+        </p:nvSpPr>
+        <p:spPr>
+          <a:xfrm>
+            <a:off x="8503920" y="2926080"/>
+            <a:ext cx="2926080" cy="1463040"/>
+          </a:xfrm>
+          <a:prstGeom prst="rect">
+            <a:avLst/>
+          </a:prstGeom>
+          <a:noFill/>
+        </p:spPr>
+        <p:txBody>
+          <a:bodyPr wrap="square" anchor="t" lIns="0" rIns="0" tIns="0" bIns="0"/>
+          <a:lstStyle/>
+          <a:p>
+            <a:pPr algn="l"/>
+            <a:r>
+              <a:rPr sz="2000" b="1" i="0">
+                <a:solidFill>
+                  <a:srgbClr val="FFFFFF"/>
+                </a:solidFill>
+                <a:latin typeface="Cambria"/>
+              </a:rPr>
+              <a:t>Core Paper 1: Problem Solving, Programming, Emerging Issues and Legislation</a:t>
+            </a:r>
+          </a:p>
+        </p:txBody>
+      </p:sp>
+      <p:sp>
+        <p:nvSpPr>
+          <p:cNvPr id="14" name="TextBox 13"/>
+          <p:cNvSpPr txBox="1"/>
+          <p:nvPr/>
+        </p:nvSpPr>
+        <p:spPr>
+          <a:xfrm>
+            <a:off x="548640" y="5669280"/>
+            <a:ext cx="11094415" cy="548640"/>
+          </a:xfrm>
+          <a:prstGeom prst="rect">
+            <a:avLst/>
+          </a:prstGeom>
+          <a:noFill/>
+        </p:spPr>
+        <p:txBody>
+          <a:bodyPr wrap="square" anchor="t" lIns="0" rIns="0" tIns="0" bIns="0"/>
+          <a:lstStyle/>
+          <a:p>
+            <a:pPr algn="l"/>
+            <a:r>
+              <a:rPr sz="1200" b="0" i="0">
+                <a:solidFill>
+                  <a:srgbClr val="A9C8F0"/>
+                </a:solidFill>
+                <a:latin typeface="Calibri"/>
+              </a:rPr>
+              <a:t>https://lana6478.github.io/T-level-Digital-Software-Development/#/01-core-component/01-core-paper-1.md</a:t>
+            </a:r>
+          </a:p>
+        </p:txBody>
+      </p:sp>
+    </p:spTree>
+  </p:cSld>
+  <p:clrMapOvr>
+    <a:masterClrMapping/>
+  </p:clrMapOvr>
+</p:sld>
+</file>
+
 <file path=ppt/slides/slide2.xml><?xml version="1.0" encoding="utf-8"?>
 <p:sld xmlns:a="http://schemas.openxmlformats.org/drawingml/2006/main" xmlns:p="http://schemas.openxmlformats.org/presentationml/2006/main" xmlns:r="http://schemas.openxmlformats.org/officeDocument/2006/relationships">
   <p:cSld>
@@ -4772,18 +8451,105 @@
       </p:sp>
       <p:sp>
         <p:nvSpPr>
-          <p:cNvPr id="6" name="Rounded Rectangle 5"/>
+          <p:cNvPr id="6" name="TextBox 5"/>
+          <p:cNvSpPr txBox="1"/>
+          <p:nvPr/>
+        </p:nvSpPr>
+        <p:spPr>
+          <a:xfrm>
+            <a:off x="548640" y="1554480"/>
+            <a:ext cx="6720840" cy="4617720"/>
+          </a:xfrm>
+          <a:prstGeom prst="rect">
+            <a:avLst/>
+          </a:prstGeom>
+          <a:noFill/>
+        </p:spPr>
+        <p:txBody>
+          <a:bodyPr wrap="square" lIns="0" rIns="0" tIns="0" bIns="0">
+            <a:spAutoFit/>
+          </a:bodyPr>
+          <a:lstStyle/>
+          <a:p>
+            <a:pPr>
+              <a:spcAft>
+                <a:spcPts val="1320"/>
+              </a:spcAft>
+            </a:pPr>
+            <a:r>
+              <a:rPr sz="2200" b="0">
+                <a:solidFill>
+                  <a:srgbClr val="202122"/>
+                </a:solidFill>
+                <a:latin typeface="Calibri"/>
+              </a:rPr>
+              <a:t>Software developers spend long hours at screens, so health and safety law still matters.</a:t>
+            </a:r>
+          </a:p>
+          <a:p>
+            <a:pPr>
+              <a:spcAft>
+                <a:spcPts val="1320"/>
+              </a:spcAft>
+            </a:pPr>
+            <a:r>
+              <a:rPr sz="2200" b="0">
+                <a:solidFill>
+                  <a:srgbClr val="202122"/>
+                </a:solidFill>
+                <a:latin typeface="Calibri"/>
+              </a:rPr>
+              <a:t>Under the Health and Safety at Work Act, employers must provide a safe environment, training, welfare facilities, and information, instruction and supervision.</a:t>
+            </a:r>
+          </a:p>
+          <a:p>
+            <a:pPr>
+              <a:spcAft>
+                <a:spcPts val="1320"/>
+              </a:spcAft>
+            </a:pPr>
+            <a:r>
+              <a:rPr sz="2200" b="0">
+                <a:solidFill>
+                  <a:srgbClr val="202122"/>
+                </a:solidFill>
+                <a:latin typeface="Calibri"/>
+              </a:rPr>
+              <a:t>Display screen equipment (DSE) rules require workstation assessments (chair, screen height, lighting), regular breaks from the screen, eye tests on request, and training.</a:t>
+            </a:r>
+          </a:p>
+          <a:p>
+            <a:pPr>
+              <a:spcAft>
+                <a:spcPts val="1320"/>
+              </a:spcAft>
+            </a:pPr>
+            <a:r>
+              <a:rPr sz="2200" b="0">
+                <a:solidFill>
+                  <a:srgbClr val="202122"/>
+                </a:solidFill>
+                <a:latin typeface="Calibri"/>
+              </a:rPr>
+              <a:t>Without them, developers risk eye strain, headaches, and back, neck and wrist problems.</a:t>
+            </a:r>
+          </a:p>
+        </p:txBody>
+      </p:sp>
+      <p:sp>
+        <p:nvSpPr>
+          <p:cNvPr id="7" name="Rounded Rectangle 6"/>
           <p:cNvSpPr/>
           <p:nvPr/>
         </p:nvSpPr>
         <p:spPr>
           <a:xfrm>
-            <a:off x="548640" y="1600200"/>
-            <a:ext cx="5364327" cy="640080"/>
+            <a:off x="7772400" y="1554480"/>
+            <a:ext cx="3867912" cy="4526280"/>
           </a:xfrm>
           <a:prstGeom prst="roundRect">
             <a:avLst>
-              <a:gd name="adj" fmla="val 15000"/>
+              <a:gd name="adj" fmla="val 8000"/>
             </a:avLst>
           </a:prstGeom>
           <a:solidFill>
@@ -4816,55 +8582,20 @@
       </p:sp>
       <p:sp>
         <p:nvSpPr>
-          <p:cNvPr id="7" name="TextBox 6"/>
-          <p:cNvSpPr txBox="1"/>
-          <p:nvPr/>
-        </p:nvSpPr>
-        <p:spPr>
-          <a:xfrm>
-            <a:off x="777240" y="1600200"/>
-            <a:ext cx="4907127" cy="640080"/>
-          </a:xfrm>
-          <a:prstGeom prst="rect">
-            <a:avLst/>
-          </a:prstGeom>
-          <a:noFill/>
-        </p:spPr>
-        <p:txBody>
-          <a:bodyPr wrap="square" anchor="ctr" lIns="0" rIns="0" tIns="0" bIns="0"/>
-          <a:lstStyle/>
-          <a:p>
-            <a:pPr algn="l"/>
-            <a:r>
-              <a:rPr sz="2000" b="1" i="0">
-                <a:solidFill>
-                  <a:srgbClr val="FFFFFF"/>
-                </a:solidFill>
-                <a:latin typeface="Calibri"/>
-              </a:rPr>
-              <a:t>Health and Safety at Work Act</a:t>
-            </a:r>
-          </a:p>
-        </p:txBody>
-      </p:sp>
-      <p:sp>
-        <p:nvSpPr>
-          <p:cNvPr id="8" name="Rounded Rectangle 7"/>
+          <p:cNvPr id="8" name="Oval 7"/>
           <p:cNvSpPr/>
           <p:nvPr/>
         </p:nvSpPr>
         <p:spPr>
           <a:xfrm>
-            <a:off x="548640" y="2377440"/>
-            <a:ext cx="5364327" cy="3794760"/>
-          </a:xfrm>
-          <a:prstGeom prst="roundRect">
-            <a:avLst>
-              <a:gd name="adj" fmla="val 4000"/>
-            </a:avLst>
+            <a:off x="8046720" y="1828800"/>
+            <a:ext cx="548640" cy="548640"/>
+          </a:xfrm>
+          <a:prstGeom prst="ellipse">
+            <a:avLst/>
           </a:prstGeom>
           <a:solidFill>
-            <a:srgbClr val="EAF3FF"/>
+            <a:srgbClr val="F2B705"/>
           </a:solidFill>
           <a:ln>
             <a:noFill/>
@@ -4886,9 +8617,20 @@
           </a:fontRef>
         </p:style>
         <p:txBody>
-          <a:bodyPr rtlCol="0" anchor="ctr"/>
-          <a:lstStyle/>
-          <a:p/>
+          <a:bodyPr rtlCol="0" anchor="ctr" lIns="0" rIns="0" tIns="0" bIns="0"/>
+          <a:lstStyle/>
+          <a:p>
+            <a:pPr algn="ctr"/>
+            <a:r>
+              <a:rPr sz="1300" b="1">
+                <a:solidFill>
+                  <a:srgbClr val="202122"/>
+                </a:solidFill>
+                <a:latin typeface="Calibri"/>
+              </a:rPr>
+              <a:t>e.g.</a:t>
+            </a:r>
+          </a:p>
         </p:txBody>
       </p:sp>
       <p:sp>
@@ -4899,329 +8641,60 @@
         </p:nvSpPr>
         <p:spPr>
           <a:xfrm>
-            <a:off x="822959" y="2606040"/>
-            <a:ext cx="4815687" cy="3337560"/>
-          </a:xfrm>
-          <a:prstGeom prst="rect">
-            <a:avLst/>
-          </a:prstGeom>
-          <a:noFill/>
-        </p:spPr>
-        <p:txBody>
-          <a:bodyPr wrap="square" lIns="0" rIns="0" tIns="0" bIns="0">
-            <a:spAutoFit/>
-          </a:bodyPr>
-          <a:lstStyle/>
-          <a:p>
-            <a:pPr marL="274320" indent="-274320">
-              <a:spcAft>
-                <a:spcPts val="990"/>
-              </a:spcAft>
-              <a:buClr>
-                <a:srgbClr val="0645AD"/>
-              </a:buClr>
-              <a:buFont typeface="Arial"/>
-              <a:buChar char="•"/>
-            </a:pPr>
-            <a:r>
-              <a:rPr sz="2200" b="0">
-                <a:solidFill>
-                  <a:srgbClr val="202122"/>
-                </a:solidFill>
-                <a:latin typeface="Calibri"/>
-              </a:rPr>
-              <a:t>A safe working environment</a:t>
-            </a:r>
-          </a:p>
-          <a:p>
-            <a:pPr marL="274320" indent="-274320">
-              <a:spcAft>
-                <a:spcPts val="990"/>
-              </a:spcAft>
-              <a:buClr>
-                <a:srgbClr val="0645AD"/>
-              </a:buClr>
-              <a:buFont typeface="Arial"/>
-              <a:buChar char="•"/>
-            </a:pPr>
-            <a:r>
-              <a:rPr sz="2200" b="0">
-                <a:solidFill>
-                  <a:srgbClr val="202122"/>
-                </a:solidFill>
-                <a:latin typeface="Calibri"/>
-              </a:rPr>
-              <a:t>Properly trained staff</a:t>
-            </a:r>
-          </a:p>
-          <a:p>
-            <a:pPr marL="274320" indent="-274320">
-              <a:spcAft>
-                <a:spcPts val="990"/>
-              </a:spcAft>
-              <a:buClr>
-                <a:srgbClr val="0645AD"/>
-              </a:buClr>
-              <a:buFont typeface="Arial"/>
-              <a:buChar char="•"/>
-            </a:pPr>
-            <a:r>
-              <a:rPr sz="2200" b="0">
-                <a:solidFill>
-                  <a:srgbClr val="202122"/>
-                </a:solidFill>
-                <a:latin typeface="Calibri"/>
-              </a:rPr>
-              <a:t>Adequate welfare</a:t>
-            </a:r>
-          </a:p>
-          <a:p>
-            <a:pPr marL="274320" indent="-274320">
-              <a:spcAft>
-                <a:spcPts val="990"/>
-              </a:spcAft>
-              <a:buClr>
-                <a:srgbClr val="0645AD"/>
-              </a:buClr>
-              <a:buFont typeface="Arial"/>
-              <a:buChar char="•"/>
-            </a:pPr>
-            <a:r>
-              <a:rPr sz="2200" b="0">
-                <a:solidFill>
-                  <a:srgbClr val="202122"/>
-                </a:solidFill>
-                <a:latin typeface="Calibri"/>
-              </a:rPr>
-              <a:t>Information, instruction and supervision</a:t>
-            </a:r>
-          </a:p>
-        </p:txBody>
-      </p:sp>
-      <p:sp>
-        <p:nvSpPr>
-          <p:cNvPr id="10" name="Rounded Rectangle 9"/>
-          <p:cNvSpPr/>
-          <p:nvPr/>
-        </p:nvSpPr>
-        <p:spPr>
-          <a:xfrm>
-            <a:off x="6278727" y="1600200"/>
-            <a:ext cx="5364327" cy="640080"/>
-          </a:xfrm>
-          <a:prstGeom prst="roundRect">
-            <a:avLst>
-              <a:gd name="adj" fmla="val 15000"/>
-            </a:avLst>
-          </a:prstGeom>
-          <a:solidFill>
-            <a:srgbClr val="0645AD"/>
-          </a:solidFill>
-          <a:ln>
-            <a:noFill/>
-          </a:ln>
-          <a:effectLst/>
-        </p:spPr>
-        <p:style>
-          <a:lnRef idx="1">
-            <a:schemeClr val="accent1"/>
-          </a:lnRef>
-          <a:fillRef idx="3">
-            <a:schemeClr val="accent1"/>
-          </a:fillRef>
-          <a:effectRef idx="2">
-            <a:schemeClr val="accent1"/>
-          </a:effectRef>
-          <a:fontRef idx="minor">
-            <a:schemeClr val="lt1"/>
-          </a:fontRef>
-        </p:style>
-        <p:txBody>
-          <a:bodyPr rtlCol="0" anchor="ctr"/>
-          <a:lstStyle/>
-          <a:p/>
-        </p:txBody>
-      </p:sp>
-      <p:sp>
-        <p:nvSpPr>
-          <p:cNvPr id="11" name="TextBox 10"/>
-          <p:cNvSpPr txBox="1"/>
-          <p:nvPr/>
-        </p:nvSpPr>
-        <p:spPr>
-          <a:xfrm>
-            <a:off x="6507327" y="1600200"/>
-            <a:ext cx="4907127" cy="640080"/>
-          </a:xfrm>
-          <a:prstGeom prst="rect">
-            <a:avLst/>
-          </a:prstGeom>
-          <a:noFill/>
-        </p:spPr>
-        <p:txBody>
-          <a:bodyPr wrap="square" anchor="ctr" lIns="0" rIns="0" tIns="0" bIns="0"/>
+            <a:off x="8046720" y="2560320"/>
+            <a:ext cx="3291840" cy="365760"/>
+          </a:xfrm>
+          <a:prstGeom prst="rect">
+            <a:avLst/>
+          </a:prstGeom>
+          <a:noFill/>
+        </p:spPr>
+        <p:txBody>
+          <a:bodyPr wrap="square" anchor="t" lIns="0" rIns="0" tIns="0" bIns="0"/>
           <a:lstStyle/>
           <a:p>
             <a:pPr algn="l"/>
             <a:r>
-              <a:rPr sz="2000" b="1" i="0">
+              <a:rPr sz="1300" b="1" i="0">
+                <a:solidFill>
+                  <a:srgbClr val="A9C8F0"/>
+                </a:solidFill>
+                <a:latin typeface="Calibri"/>
+              </a:rPr>
+              <a:t>EXAMPLE</a:t>
+            </a:r>
+          </a:p>
+        </p:txBody>
+      </p:sp>
+      <p:sp>
+        <p:nvSpPr>
+          <p:cNvPr id="10" name="TextBox 9"/>
+          <p:cNvSpPr txBox="1"/>
+          <p:nvPr/>
+        </p:nvSpPr>
+        <p:spPr>
+          <a:xfrm>
+            <a:off x="8046720" y="2971800"/>
+            <a:ext cx="3291840" cy="2971800"/>
+          </a:xfrm>
+          <a:prstGeom prst="rect">
+            <a:avLst/>
+          </a:prstGeom>
+          <a:noFill/>
+        </p:spPr>
+        <p:txBody>
+          <a:bodyPr wrap="square" anchor="t" lIns="0" rIns="0" tIns="0" bIns="0"/>
+          <a:lstStyle/>
+          <a:p>
+            <a:pPr algn="l"/>
+            <a:r>
+              <a:rPr sz="1900" b="0" i="0">
                 <a:solidFill>
                   <a:srgbClr val="FFFFFF"/>
                 </a:solidFill>
-                <a:latin typeface="Calibri"/>
-              </a:rPr>
-              <a:t>Display screen equipment</a:t>
-            </a:r>
-          </a:p>
-        </p:txBody>
-      </p:sp>
-      <p:sp>
-        <p:nvSpPr>
-          <p:cNvPr id="12" name="Rounded Rectangle 11"/>
-          <p:cNvSpPr/>
-          <p:nvPr/>
-        </p:nvSpPr>
-        <p:spPr>
-          <a:xfrm>
-            <a:off x="6278727" y="2377440"/>
-            <a:ext cx="5364327" cy="3794760"/>
-          </a:xfrm>
-          <a:prstGeom prst="roundRect">
-            <a:avLst>
-              <a:gd name="adj" fmla="val 4000"/>
-            </a:avLst>
-          </a:prstGeom>
-          <a:solidFill>
-            <a:srgbClr val="EAF3FF"/>
-          </a:solidFill>
-          <a:ln>
-            <a:noFill/>
-          </a:ln>
-          <a:effectLst/>
-        </p:spPr>
-        <p:style>
-          <a:lnRef idx="1">
-            <a:schemeClr val="accent1"/>
-          </a:lnRef>
-          <a:fillRef idx="3">
-            <a:schemeClr val="accent1"/>
-          </a:fillRef>
-          <a:effectRef idx="2">
-            <a:schemeClr val="accent1"/>
-          </a:effectRef>
-          <a:fontRef idx="minor">
-            <a:schemeClr val="lt1"/>
-          </a:fontRef>
-        </p:style>
-        <p:txBody>
-          <a:bodyPr rtlCol="0" anchor="ctr"/>
-          <a:lstStyle/>
-          <a:p/>
-        </p:txBody>
-      </p:sp>
-      <p:sp>
-        <p:nvSpPr>
-          <p:cNvPr id="13" name="TextBox 12"/>
-          <p:cNvSpPr txBox="1"/>
-          <p:nvPr/>
-        </p:nvSpPr>
-        <p:spPr>
-          <a:xfrm>
-            <a:off x="6553047" y="2606040"/>
-            <a:ext cx="4815687" cy="3337560"/>
-          </a:xfrm>
-          <a:prstGeom prst="rect">
-            <a:avLst/>
-          </a:prstGeom>
-          <a:noFill/>
-        </p:spPr>
-        <p:txBody>
-          <a:bodyPr wrap="square" lIns="0" rIns="0" tIns="0" bIns="0">
-            <a:spAutoFit/>
-          </a:bodyPr>
-          <a:lstStyle/>
-          <a:p>
-            <a:pPr marL="274320" indent="-274320">
-              <a:spcAft>
-                <a:spcPts val="990"/>
-              </a:spcAft>
-              <a:buClr>
-                <a:srgbClr val="0645AD"/>
-              </a:buClr>
-              <a:buFont typeface="Arial"/>
-              <a:buChar char="•"/>
-            </a:pPr>
-            <a:r>
-              <a:rPr sz="2200" b="0">
-                <a:solidFill>
-                  <a:srgbClr val="202122"/>
-                </a:solidFill>
-                <a:latin typeface="Calibri"/>
-              </a:rPr>
-              <a:t>Workstation assessments</a:t>
-            </a:r>
-          </a:p>
-          <a:p>
-            <a:pPr marL="274320" indent="-274320">
-              <a:spcAft>
-                <a:spcPts val="990"/>
-              </a:spcAft>
-              <a:buClr>
-                <a:srgbClr val="0645AD"/>
-              </a:buClr>
-              <a:buFont typeface="Arial"/>
-              <a:buChar char="•"/>
-            </a:pPr>
-            <a:r>
-              <a:rPr sz="2200" b="0">
-                <a:solidFill>
-                  <a:srgbClr val="202122"/>
-                </a:solidFill>
-                <a:latin typeface="Calibri"/>
-              </a:rPr>
-              <a:t>Regular breaks from the screen</a:t>
-            </a:r>
-          </a:p>
-          <a:p>
-            <a:pPr marL="274320" indent="-274320">
-              <a:spcAft>
-                <a:spcPts val="990"/>
-              </a:spcAft>
-              <a:buClr>
-                <a:srgbClr val="0645AD"/>
-              </a:buClr>
-              <a:buFont typeface="Arial"/>
-              <a:buChar char="•"/>
-            </a:pPr>
-            <a:r>
-              <a:rPr sz="2200" b="0">
-                <a:solidFill>
-                  <a:srgbClr val="202122"/>
-                </a:solidFill>
-                <a:latin typeface="Calibri"/>
-              </a:rPr>
-              <a:t>Eye tests on request</a:t>
-            </a:r>
-          </a:p>
-          <a:p>
-            <a:pPr marL="274320" indent="-274320">
-              <a:spcAft>
-                <a:spcPts val="990"/>
-              </a:spcAft>
-              <a:buClr>
-                <a:srgbClr val="0645AD"/>
-              </a:buClr>
-              <a:buFont typeface="Arial"/>
-              <a:buChar char="•"/>
-            </a:pPr>
-            <a:r>
-              <a:rPr sz="2200" b="0">
-                <a:solidFill>
-                  <a:srgbClr val="202122"/>
-                </a:solidFill>
-                <a:latin typeface="Calibri"/>
-              </a:rPr>
-              <a:t>Training and information</a:t>
+                <a:latin typeface="Cambria"/>
+              </a:rPr>
+              <a:t>A developer with wrist pain gets a DSE assessment, leading to a better keyboard position, a mouse change and scheduled micro-breaks.</a:t>
             </a:r>
           </a:p>
         </p:txBody>
@@ -5313,7 +8786,7 @@
                 </a:solidFill>
                 <a:latin typeface="Cambria"/>
               </a:rPr>
-              <a:t>Key legislation</a:t>
+              <a:t>Health and safety for digital work</a:t>
             </a:r>
           </a:p>
         </p:txBody>
@@ -5393,11 +8866,88 @@
         <p:spPr>
           <a:xfrm>
             <a:off x="548640" y="1600200"/>
-            <a:ext cx="3515258" cy="2148840"/>
+            <a:ext cx="5364327" cy="640080"/>
           </a:xfrm>
           <a:prstGeom prst="roundRect">
             <a:avLst>
-              <a:gd name="adj" fmla="val 6000"/>
+              <a:gd name="adj" fmla="val 15000"/>
+            </a:avLst>
+          </a:prstGeom>
+          <a:solidFill>
+            <a:srgbClr val="03306E"/>
+          </a:solidFill>
+          <a:ln>
+            <a:noFill/>
+          </a:ln>
+          <a:effectLst/>
+        </p:spPr>
+        <p:style>
+          <a:lnRef idx="1">
+            <a:schemeClr val="accent1"/>
+          </a:lnRef>
+          <a:fillRef idx="3">
+            <a:schemeClr val="accent1"/>
+          </a:fillRef>
+          <a:effectRef idx="2">
+            <a:schemeClr val="accent1"/>
+          </a:effectRef>
+          <a:fontRef idx="minor">
+            <a:schemeClr val="lt1"/>
+          </a:fontRef>
+        </p:style>
+        <p:txBody>
+          <a:bodyPr rtlCol="0" anchor="ctr"/>
+          <a:lstStyle/>
+          <a:p/>
+        </p:txBody>
+      </p:sp>
+      <p:sp>
+        <p:nvSpPr>
+          <p:cNvPr id="7" name="TextBox 6"/>
+          <p:cNvSpPr txBox="1"/>
+          <p:nvPr/>
+        </p:nvSpPr>
+        <p:spPr>
+          <a:xfrm>
+            <a:off x="777240" y="1600200"/>
+            <a:ext cx="4907127" cy="640080"/>
+          </a:xfrm>
+          <a:prstGeom prst="rect">
+            <a:avLst/>
+          </a:prstGeom>
+          <a:noFill/>
+        </p:spPr>
+        <p:txBody>
+          <a:bodyPr wrap="square" anchor="ctr" lIns="0" rIns="0" tIns="0" bIns="0"/>
+          <a:lstStyle/>
+          <a:p>
+            <a:pPr algn="l"/>
+            <a:r>
+              <a:rPr sz="2000" b="1" i="0">
+                <a:solidFill>
+                  <a:srgbClr val="FFFFFF"/>
+                </a:solidFill>
+                <a:latin typeface="Calibri"/>
+              </a:rPr>
+              <a:t>Health and Safety at Work Act</a:t>
+            </a:r>
+          </a:p>
+        </p:txBody>
+      </p:sp>
+      <p:sp>
+        <p:nvSpPr>
+          <p:cNvPr id="8" name="Rounded Rectangle 7"/>
+          <p:cNvSpPr/>
+          <p:nvPr/>
+        </p:nvSpPr>
+        <p:spPr>
+          <a:xfrm>
+            <a:off x="548640" y="2377440"/>
+            <a:ext cx="5364327" cy="3794760"/>
+          </a:xfrm>
+          <a:prstGeom prst="roundRect">
+            <a:avLst>
+              <a:gd name="adj" fmla="val 4000"/>
             </a:avLst>
           </a:prstGeom>
           <a:solidFill>
@@ -5430,20 +8980,129 @@
       </p:sp>
       <p:sp>
         <p:nvSpPr>
-          <p:cNvPr id="7" name="Oval 6"/>
+          <p:cNvPr id="9" name="TextBox 8"/>
+          <p:cNvSpPr txBox="1"/>
+          <p:nvPr/>
+        </p:nvSpPr>
+        <p:spPr>
+          <a:xfrm>
+            <a:off x="822959" y="2606040"/>
+            <a:ext cx="4815687" cy="3337560"/>
+          </a:xfrm>
+          <a:prstGeom prst="rect">
+            <a:avLst/>
+          </a:prstGeom>
+          <a:noFill/>
+        </p:spPr>
+        <p:txBody>
+          <a:bodyPr wrap="square" lIns="0" rIns="0" tIns="0" bIns="0">
+            <a:spAutoFit/>
+          </a:bodyPr>
+          <a:lstStyle/>
+          <a:p>
+            <a:pPr marL="274320" indent="-274320">
+              <a:spcAft>
+                <a:spcPts val="990"/>
+              </a:spcAft>
+              <a:buClr>
+                <a:srgbClr val="0645AD"/>
+              </a:buClr>
+              <a:buFont typeface="Arial"/>
+              <a:buChar char="•"/>
+            </a:pPr>
+            <a:r>
+              <a:rPr sz="2200" b="0">
+                <a:solidFill>
+                  <a:srgbClr val="202122"/>
+                </a:solidFill>
+                <a:latin typeface="Calibri"/>
+              </a:rPr>
+              <a:t>A safe working environment</a:t>
+            </a:r>
+          </a:p>
+          <a:p>
+            <a:pPr marL="274320" indent="-274320">
+              <a:spcAft>
+                <a:spcPts val="990"/>
+              </a:spcAft>
+              <a:buClr>
+                <a:srgbClr val="0645AD"/>
+              </a:buClr>
+              <a:buFont typeface="Arial"/>
+              <a:buChar char="•"/>
+            </a:pPr>
+            <a:r>
+              <a:rPr sz="2200" b="0">
+                <a:solidFill>
+                  <a:srgbClr val="202122"/>
+                </a:solidFill>
+                <a:latin typeface="Calibri"/>
+              </a:rPr>
+              <a:t>Properly trained staff</a:t>
+            </a:r>
+          </a:p>
+          <a:p>
+            <a:pPr marL="274320" indent="-274320">
+              <a:spcAft>
+                <a:spcPts val="990"/>
+              </a:spcAft>
+              <a:buClr>
+                <a:srgbClr val="0645AD"/>
+              </a:buClr>
+              <a:buFont typeface="Arial"/>
+              <a:buChar char="•"/>
+            </a:pPr>
+            <a:r>
+              <a:rPr sz="2200" b="0">
+                <a:solidFill>
+                  <a:srgbClr val="202122"/>
+                </a:solidFill>
+                <a:latin typeface="Calibri"/>
+              </a:rPr>
+              <a:t>Adequate welfare</a:t>
+            </a:r>
+          </a:p>
+          <a:p>
+            <a:pPr marL="274320" indent="-274320">
+              <a:spcAft>
+                <a:spcPts val="990"/>
+              </a:spcAft>
+              <a:buClr>
+                <a:srgbClr val="0645AD"/>
+              </a:buClr>
+              <a:buFont typeface="Arial"/>
+              <a:buChar char="•"/>
+            </a:pPr>
+            <a:r>
+              <a:rPr sz="2200" b="0">
+                <a:solidFill>
+                  <a:srgbClr val="202122"/>
+                </a:solidFill>
+                <a:latin typeface="Calibri"/>
+              </a:rPr>
+              <a:t>Information, instruction and supervision</a:t>
+            </a:r>
+          </a:p>
+        </p:txBody>
+      </p:sp>
+      <p:sp>
+        <p:nvSpPr>
+          <p:cNvPr id="10" name="Rounded Rectangle 9"/>
           <p:cNvSpPr/>
           <p:nvPr/>
         </p:nvSpPr>
         <p:spPr>
           <a:xfrm>
-            <a:off x="777240" y="1828800"/>
-            <a:ext cx="457200" cy="457200"/>
-          </a:xfrm>
-          <a:prstGeom prst="ellipse">
-            <a:avLst/>
+            <a:off x="6278727" y="1600200"/>
+            <a:ext cx="5364327" cy="640080"/>
+          </a:xfrm>
+          <a:prstGeom prst="roundRect">
+            <a:avLst>
+              <a:gd name="adj" fmla="val 15000"/>
+            </a:avLst>
           </a:prstGeom>
           <a:solidFill>
-            <a:srgbClr val="F2B705"/>
+            <a:srgbClr val="0645AD"/>
           </a:solidFill>
           <a:ln>
             <a:noFill/>
@@ -5465,32 +9124,21 @@
           </a:fontRef>
         </p:style>
         <p:txBody>
-          <a:bodyPr rtlCol="0" anchor="ctr" lIns="0" rIns="0" tIns="0" bIns="0"/>
-          <a:lstStyle/>
-          <a:p>
-            <a:pPr algn="ctr"/>
-            <a:r>
-              <a:rPr sz="1500" b="1">
-                <a:solidFill>
-                  <a:srgbClr val="202122"/>
-                </a:solidFill>
-                <a:latin typeface="Calibri"/>
-              </a:rPr>
-              <a:t>1</a:t>
-            </a:r>
-          </a:p>
-        </p:txBody>
-      </p:sp>
-      <p:sp>
-        <p:nvSpPr>
-          <p:cNvPr id="8" name="TextBox 7"/>
-          <p:cNvSpPr txBox="1"/>
-          <p:nvPr/>
-        </p:nvSpPr>
-        <p:spPr>
-          <a:xfrm>
-            <a:off x="1371600" y="1801368"/>
-            <a:ext cx="2509418" cy="512064"/>
+          <a:bodyPr rtlCol="0" anchor="ctr"/>
+          <a:lstStyle/>
+          <a:p/>
+        </p:txBody>
+      </p:sp>
+      <p:sp>
+        <p:nvSpPr>
+          <p:cNvPr id="11" name="TextBox 10"/>
+          <p:cNvSpPr txBox="1"/>
+          <p:nvPr/>
+        </p:nvSpPr>
+        <p:spPr>
+          <a:xfrm>
+            <a:off x="6507327" y="1600200"/>
+            <a:ext cx="4907127" cy="640080"/>
           </a:xfrm>
           <a:prstGeom prst="rect">
             <a:avLst/>
@@ -5503,64 +9151,31 @@
           <a:p>
             <a:pPr algn="l"/>
             <a:r>
-              <a:rPr sz="1600" b="1" i="0">
-                <a:solidFill>
-                  <a:srgbClr val="03306E"/>
-                </a:solidFill>
-                <a:latin typeface="Calibri"/>
-              </a:rPr>
-              <a:t>Data Protection Act / UK GDPR</a:t>
-            </a:r>
-          </a:p>
-        </p:txBody>
-      </p:sp>
-      <p:sp>
-        <p:nvSpPr>
-          <p:cNvPr id="9" name="TextBox 8"/>
-          <p:cNvSpPr txBox="1"/>
-          <p:nvPr/>
-        </p:nvSpPr>
-        <p:spPr>
-          <a:xfrm>
-            <a:off x="777240" y="2468880"/>
-            <a:ext cx="3058058" cy="1143000"/>
-          </a:xfrm>
-          <a:prstGeom prst="rect">
-            <a:avLst/>
-          </a:prstGeom>
-          <a:noFill/>
-        </p:spPr>
-        <p:txBody>
-          <a:bodyPr wrap="square" anchor="t" lIns="0" rIns="0" tIns="0" bIns="0"/>
-          <a:lstStyle/>
-          <a:p>
-            <a:pPr algn="l"/>
-            <a:r>
-              <a:rPr sz="2000" b="0" i="0">
-                <a:solidFill>
-                  <a:srgbClr val="202122"/>
-                </a:solidFill>
-                <a:latin typeface="Calibri"/>
-              </a:rPr>
-              <a:t>Protects personal data. Learn its eight principles.</a:t>
-            </a:r>
-          </a:p>
-        </p:txBody>
-      </p:sp>
-      <p:sp>
-        <p:nvSpPr>
-          <p:cNvPr id="10" name="Rounded Rectangle 9"/>
+              <a:rPr sz="2000" b="1" i="0">
+                <a:solidFill>
+                  <a:srgbClr val="FFFFFF"/>
+                </a:solidFill>
+                <a:latin typeface="Calibri"/>
+              </a:rPr>
+              <a:t>Display screen equipment</a:t>
+            </a:r>
+          </a:p>
+        </p:txBody>
+      </p:sp>
+      <p:sp>
+        <p:nvSpPr>
+          <p:cNvPr id="12" name="Rounded Rectangle 11"/>
           <p:cNvSpPr/>
           <p:nvPr/>
         </p:nvSpPr>
         <p:spPr>
           <a:xfrm>
-            <a:off x="4338218" y="1600200"/>
-            <a:ext cx="3515258" cy="2148840"/>
+            <a:off x="6278727" y="2377440"/>
+            <a:ext cx="5364327" cy="3794760"/>
           </a:xfrm>
           <a:prstGeom prst="roundRect">
             <a:avLst>
-              <a:gd name="adj" fmla="val 6000"/>
+              <a:gd name="adj" fmla="val 4000"/>
             </a:avLst>
           </a:prstGeom>
           <a:solidFill>
@@ -5593,608 +9208,107 @@
       </p:sp>
       <p:sp>
         <p:nvSpPr>
-          <p:cNvPr id="11" name="Oval 10"/>
-          <p:cNvSpPr/>
-          <p:nvPr/>
-        </p:nvSpPr>
-        <p:spPr>
-          <a:xfrm>
-            <a:off x="4566818" y="1828800"/>
-            <a:ext cx="457200" cy="457200"/>
-          </a:xfrm>
-          <a:prstGeom prst="ellipse">
-            <a:avLst/>
-          </a:prstGeom>
-          <a:solidFill>
-            <a:srgbClr val="F2B705"/>
-          </a:solidFill>
-          <a:ln>
-            <a:noFill/>
-          </a:ln>
-          <a:effectLst/>
-        </p:spPr>
-        <p:style>
-          <a:lnRef idx="1">
-            <a:schemeClr val="accent1"/>
-          </a:lnRef>
-          <a:fillRef idx="3">
-            <a:schemeClr val="accent1"/>
-          </a:fillRef>
-          <a:effectRef idx="2">
-            <a:schemeClr val="accent1"/>
-          </a:effectRef>
-          <a:fontRef idx="minor">
-            <a:schemeClr val="lt1"/>
-          </a:fontRef>
-        </p:style>
-        <p:txBody>
-          <a:bodyPr rtlCol="0" anchor="ctr" lIns="0" rIns="0" tIns="0" bIns="0"/>
-          <a:lstStyle/>
-          <a:p>
-            <a:pPr algn="ctr"/>
-            <a:r>
-              <a:rPr sz="1500" b="1">
+          <p:cNvPr id="13" name="TextBox 12"/>
+          <p:cNvSpPr txBox="1"/>
+          <p:nvPr/>
+        </p:nvSpPr>
+        <p:spPr>
+          <a:xfrm>
+            <a:off x="6553047" y="2606040"/>
+            <a:ext cx="4815687" cy="3337560"/>
+          </a:xfrm>
+          <a:prstGeom prst="rect">
+            <a:avLst/>
+          </a:prstGeom>
+          <a:noFill/>
+        </p:spPr>
+        <p:txBody>
+          <a:bodyPr wrap="square" lIns="0" rIns="0" tIns="0" bIns="0">
+            <a:spAutoFit/>
+          </a:bodyPr>
+          <a:lstStyle/>
+          <a:p>
+            <a:pPr marL="274320" indent="-274320">
+              <a:spcAft>
+                <a:spcPts val="990"/>
+              </a:spcAft>
+              <a:buClr>
+                <a:srgbClr val="0645AD"/>
+              </a:buClr>
+              <a:buFont typeface="Arial"/>
+              <a:buChar char="•"/>
+            </a:pPr>
+            <a:r>
+              <a:rPr sz="2200" b="0">
                 <a:solidFill>
                   <a:srgbClr val="202122"/>
                 </a:solidFill>
                 <a:latin typeface="Calibri"/>
               </a:rPr>
-              <a:t>2</a:t>
-            </a:r>
-          </a:p>
-        </p:txBody>
-      </p:sp>
-      <p:sp>
-        <p:nvSpPr>
-          <p:cNvPr id="12" name="TextBox 11"/>
-          <p:cNvSpPr txBox="1"/>
-          <p:nvPr/>
-        </p:nvSpPr>
-        <p:spPr>
-          <a:xfrm>
-            <a:off x="5161178" y="1801368"/>
-            <a:ext cx="2509418" cy="512064"/>
-          </a:xfrm>
-          <a:prstGeom prst="rect">
-            <a:avLst/>
-          </a:prstGeom>
-          <a:noFill/>
-        </p:spPr>
-        <p:txBody>
-          <a:bodyPr wrap="square" anchor="ctr" lIns="0" rIns="0" tIns="0" bIns="0"/>
-          <a:lstStyle/>
-          <a:p>
-            <a:pPr algn="l"/>
-            <a:r>
-              <a:rPr sz="1600" b="1" i="0">
-                <a:solidFill>
-                  <a:srgbClr val="03306E"/>
-                </a:solidFill>
-                <a:latin typeface="Calibri"/>
-              </a:rPr>
-              <a:t>Computer Misuse Act 1990</a:t>
-            </a:r>
-          </a:p>
-        </p:txBody>
-      </p:sp>
-      <p:sp>
-        <p:nvSpPr>
-          <p:cNvPr id="13" name="TextBox 12"/>
-          <p:cNvSpPr txBox="1"/>
-          <p:nvPr/>
-        </p:nvSpPr>
-        <p:spPr>
-          <a:xfrm>
-            <a:off x="4566818" y="2468880"/>
-            <a:ext cx="3058058" cy="1143000"/>
-          </a:xfrm>
-          <a:prstGeom prst="rect">
-            <a:avLst/>
-          </a:prstGeom>
-          <a:noFill/>
-        </p:spPr>
-        <p:txBody>
-          <a:bodyPr wrap="square" anchor="t" lIns="0" rIns="0" tIns="0" bIns="0"/>
-          <a:lstStyle/>
-          <a:p>
-            <a:pPr algn="l"/>
-            <a:r>
-              <a:rPr sz="1700" b="0" i="0">
+              <a:t>Workstation assessments</a:t>
+            </a:r>
+          </a:p>
+          <a:p>
+            <a:pPr marL="274320" indent="-274320">
+              <a:spcAft>
+                <a:spcPts val="990"/>
+              </a:spcAft>
+              <a:buClr>
+                <a:srgbClr val="0645AD"/>
+              </a:buClr>
+              <a:buFont typeface="Arial"/>
+              <a:buChar char="•"/>
+            </a:pPr>
+            <a:r>
+              <a:rPr sz="2200" b="0">
                 <a:solidFill>
                   <a:srgbClr val="202122"/>
                 </a:solidFill>
                 <a:latin typeface="Calibri"/>
               </a:rPr>
-              <a:t>Unauthorised access, access with intent to commit further crimes, and unauthorised acts that impair a computer.</a:t>
-            </a:r>
-          </a:p>
-        </p:txBody>
-      </p:sp>
-      <p:sp>
-        <p:nvSpPr>
-          <p:cNvPr id="14" name="Rounded Rectangle 13"/>
-          <p:cNvSpPr/>
-          <p:nvPr/>
-        </p:nvSpPr>
-        <p:spPr>
-          <a:xfrm>
-            <a:off x="8127796" y="1600200"/>
-            <a:ext cx="3515258" cy="2148840"/>
-          </a:xfrm>
-          <a:prstGeom prst="roundRect">
-            <a:avLst>
-              <a:gd name="adj" fmla="val 6000"/>
-            </a:avLst>
-          </a:prstGeom>
-          <a:solidFill>
-            <a:srgbClr val="EAF3FF"/>
-          </a:solidFill>
-          <a:ln>
-            <a:noFill/>
-          </a:ln>
-          <a:effectLst/>
-        </p:spPr>
-        <p:style>
-          <a:lnRef idx="1">
-            <a:schemeClr val="accent1"/>
-          </a:lnRef>
-          <a:fillRef idx="3">
-            <a:schemeClr val="accent1"/>
-          </a:fillRef>
-          <a:effectRef idx="2">
-            <a:schemeClr val="accent1"/>
-          </a:effectRef>
-          <a:fontRef idx="minor">
-            <a:schemeClr val="lt1"/>
-          </a:fontRef>
-        </p:style>
-        <p:txBody>
-          <a:bodyPr rtlCol="0" anchor="ctr"/>
-          <a:lstStyle/>
-          <a:p/>
-        </p:txBody>
-      </p:sp>
-      <p:sp>
-        <p:nvSpPr>
-          <p:cNvPr id="15" name="Oval 14"/>
-          <p:cNvSpPr/>
-          <p:nvPr/>
-        </p:nvSpPr>
-        <p:spPr>
-          <a:xfrm>
-            <a:off x="8356396" y="1828800"/>
-            <a:ext cx="457200" cy="457200"/>
-          </a:xfrm>
-          <a:prstGeom prst="ellipse">
-            <a:avLst/>
-          </a:prstGeom>
-          <a:solidFill>
-            <a:srgbClr val="F2B705"/>
-          </a:solidFill>
-          <a:ln>
-            <a:noFill/>
-          </a:ln>
-          <a:effectLst/>
-        </p:spPr>
-        <p:style>
-          <a:lnRef idx="1">
-            <a:schemeClr val="accent1"/>
-          </a:lnRef>
-          <a:fillRef idx="3">
-            <a:schemeClr val="accent1"/>
-          </a:fillRef>
-          <a:effectRef idx="2">
-            <a:schemeClr val="accent1"/>
-          </a:effectRef>
-          <a:fontRef idx="minor">
-            <a:schemeClr val="lt1"/>
-          </a:fontRef>
-        </p:style>
-        <p:txBody>
-          <a:bodyPr rtlCol="0" anchor="ctr" lIns="0" rIns="0" tIns="0" bIns="0"/>
-          <a:lstStyle/>
-          <a:p>
-            <a:pPr algn="ctr"/>
-            <a:r>
-              <a:rPr sz="1500" b="1">
+              <a:t>Regular breaks from the screen</a:t>
+            </a:r>
+          </a:p>
+          <a:p>
+            <a:pPr marL="274320" indent="-274320">
+              <a:spcAft>
+                <a:spcPts val="990"/>
+              </a:spcAft>
+              <a:buClr>
+                <a:srgbClr val="0645AD"/>
+              </a:buClr>
+              <a:buFont typeface="Arial"/>
+              <a:buChar char="•"/>
+            </a:pPr>
+            <a:r>
+              <a:rPr sz="2200" b="0">
                 <a:solidFill>
                   <a:srgbClr val="202122"/>
                 </a:solidFill>
                 <a:latin typeface="Calibri"/>
               </a:rPr>
-              <a:t>3</a:t>
-            </a:r>
-          </a:p>
-        </p:txBody>
-      </p:sp>
-      <p:sp>
-        <p:nvSpPr>
-          <p:cNvPr id="16" name="TextBox 15"/>
-          <p:cNvSpPr txBox="1"/>
-          <p:nvPr/>
-        </p:nvSpPr>
-        <p:spPr>
-          <a:xfrm>
-            <a:off x="8950756" y="1801368"/>
-            <a:ext cx="2509418" cy="512064"/>
-          </a:xfrm>
-          <a:prstGeom prst="rect">
-            <a:avLst/>
-          </a:prstGeom>
-          <a:noFill/>
-        </p:spPr>
-        <p:txBody>
-          <a:bodyPr wrap="square" anchor="ctr" lIns="0" rIns="0" tIns="0" bIns="0"/>
-          <a:lstStyle/>
-          <a:p>
-            <a:pPr algn="l"/>
-            <a:r>
-              <a:rPr sz="1900" b="1" i="0">
-                <a:solidFill>
-                  <a:srgbClr val="03306E"/>
-                </a:solidFill>
-                <a:latin typeface="Calibri"/>
-              </a:rPr>
-              <a:t>Equality</a:t>
-            </a:r>
-          </a:p>
-        </p:txBody>
-      </p:sp>
-      <p:sp>
-        <p:nvSpPr>
-          <p:cNvPr id="17" name="TextBox 16"/>
-          <p:cNvSpPr txBox="1"/>
-          <p:nvPr/>
-        </p:nvSpPr>
-        <p:spPr>
-          <a:xfrm>
-            <a:off x="8356396" y="2468880"/>
-            <a:ext cx="3058058" cy="1143000"/>
-          </a:xfrm>
-          <a:prstGeom prst="rect">
-            <a:avLst/>
-          </a:prstGeom>
-          <a:noFill/>
-        </p:spPr>
-        <p:txBody>
-          <a:bodyPr wrap="square" anchor="t" lIns="0" rIns="0" tIns="0" bIns="0"/>
-          <a:lstStyle/>
-          <a:p>
-            <a:pPr algn="l"/>
-            <a:r>
-              <a:rPr sz="1800" b="0" i="0">
+              <a:t>Eye tests on request</a:t>
+            </a:r>
+          </a:p>
+          <a:p>
+            <a:pPr marL="274320" indent="-274320">
+              <a:spcAft>
+                <a:spcPts val="990"/>
+              </a:spcAft>
+              <a:buClr>
+                <a:srgbClr val="0645AD"/>
+              </a:buClr>
+              <a:buFont typeface="Arial"/>
+              <a:buChar char="•"/>
+            </a:pPr>
+            <a:r>
+              <a:rPr sz="2200" b="0">
                 <a:solidFill>
                   <a:srgbClr val="202122"/>
                 </a:solidFill>
                 <a:latin typeface="Calibri"/>
               </a:rPr>
-              <a:t>Nine protected characteristics; direct and indirect discrimination, harassment, victimisation.</a:t>
-            </a:r>
-          </a:p>
-        </p:txBody>
-      </p:sp>
-      <p:sp>
-        <p:nvSpPr>
-          <p:cNvPr id="18" name="Rounded Rectangle 17"/>
-          <p:cNvSpPr/>
-          <p:nvPr/>
-        </p:nvSpPr>
-        <p:spPr>
-          <a:xfrm>
-            <a:off x="548640" y="4023360"/>
-            <a:ext cx="3515258" cy="2148840"/>
-          </a:xfrm>
-          <a:prstGeom prst="roundRect">
-            <a:avLst>
-              <a:gd name="adj" fmla="val 6000"/>
-            </a:avLst>
-          </a:prstGeom>
-          <a:solidFill>
-            <a:srgbClr val="EAF3FF"/>
-          </a:solidFill>
-          <a:ln>
-            <a:noFill/>
-          </a:ln>
-          <a:effectLst/>
-        </p:spPr>
-        <p:style>
-          <a:lnRef idx="1">
-            <a:schemeClr val="accent1"/>
-          </a:lnRef>
-          <a:fillRef idx="3">
-            <a:schemeClr val="accent1"/>
-          </a:fillRef>
-          <a:effectRef idx="2">
-            <a:schemeClr val="accent1"/>
-          </a:effectRef>
-          <a:fontRef idx="minor">
-            <a:schemeClr val="lt1"/>
-          </a:fontRef>
-        </p:style>
-        <p:txBody>
-          <a:bodyPr rtlCol="0" anchor="ctr"/>
-          <a:lstStyle/>
-          <a:p/>
-        </p:txBody>
-      </p:sp>
-      <p:sp>
-        <p:nvSpPr>
-          <p:cNvPr id="19" name="Oval 18"/>
-          <p:cNvSpPr/>
-          <p:nvPr/>
-        </p:nvSpPr>
-        <p:spPr>
-          <a:xfrm>
-            <a:off x="777240" y="4251960"/>
-            <a:ext cx="457200" cy="457200"/>
-          </a:xfrm>
-          <a:prstGeom prst="ellipse">
-            <a:avLst/>
-          </a:prstGeom>
-          <a:solidFill>
-            <a:srgbClr val="F2B705"/>
-          </a:solidFill>
-          <a:ln>
-            <a:noFill/>
-          </a:ln>
-          <a:effectLst/>
-        </p:spPr>
-        <p:style>
-          <a:lnRef idx="1">
-            <a:schemeClr val="accent1"/>
-          </a:lnRef>
-          <a:fillRef idx="3">
-            <a:schemeClr val="accent1"/>
-          </a:fillRef>
-          <a:effectRef idx="2">
-            <a:schemeClr val="accent1"/>
-          </a:effectRef>
-          <a:fontRef idx="minor">
-            <a:schemeClr val="lt1"/>
-          </a:fontRef>
-        </p:style>
-        <p:txBody>
-          <a:bodyPr rtlCol="0" anchor="ctr" lIns="0" rIns="0" tIns="0" bIns="0"/>
-          <a:lstStyle/>
-          <a:p>
-            <a:pPr algn="ctr"/>
-            <a:r>
-              <a:rPr sz="1500" b="1">
-                <a:solidFill>
-                  <a:srgbClr val="202122"/>
-                </a:solidFill>
-                <a:latin typeface="Calibri"/>
-              </a:rPr>
-              <a:t>4</a:t>
-            </a:r>
-          </a:p>
-        </p:txBody>
-      </p:sp>
-      <p:sp>
-        <p:nvSpPr>
-          <p:cNvPr id="20" name="TextBox 19"/>
-          <p:cNvSpPr txBox="1"/>
-          <p:nvPr/>
-        </p:nvSpPr>
-        <p:spPr>
-          <a:xfrm>
-            <a:off x="1371600" y="4224528"/>
-            <a:ext cx="2509418" cy="512064"/>
-          </a:xfrm>
-          <a:prstGeom prst="rect">
-            <a:avLst/>
-          </a:prstGeom>
-          <a:noFill/>
-        </p:spPr>
-        <p:txBody>
-          <a:bodyPr wrap="square" anchor="ctr" lIns="0" rIns="0" tIns="0" bIns="0"/>
-          <a:lstStyle/>
-          <a:p>
-            <a:pPr algn="l"/>
-            <a:r>
-              <a:rPr sz="1700" b="1" i="0">
-                <a:solidFill>
-                  <a:srgbClr val="03306E"/>
-                </a:solidFill>
-                <a:latin typeface="Calibri"/>
-              </a:rPr>
-              <a:t>Intellectual property</a:t>
-            </a:r>
-          </a:p>
-        </p:txBody>
-      </p:sp>
-      <p:sp>
-        <p:nvSpPr>
-          <p:cNvPr id="21" name="TextBox 20"/>
-          <p:cNvSpPr txBox="1"/>
-          <p:nvPr/>
-        </p:nvSpPr>
-        <p:spPr>
-          <a:xfrm>
-            <a:off x="777240" y="4892040"/>
-            <a:ext cx="3058058" cy="1143000"/>
-          </a:xfrm>
-          <a:prstGeom prst="rect">
-            <a:avLst/>
-          </a:prstGeom>
-          <a:noFill/>
-        </p:spPr>
-        <p:txBody>
-          <a:bodyPr wrap="square" anchor="t" lIns="0" rIns="0" tIns="0" bIns="0"/>
-          <a:lstStyle/>
-          <a:p>
-            <a:pPr algn="l"/>
-            <a:r>
-              <a:rPr sz="2000" b="0" i="0">
-                <a:solidFill>
-                  <a:srgbClr val="202122"/>
-                </a:solidFill>
-                <a:latin typeface="Calibri"/>
-              </a:rPr>
-              <a:t>Unregistered designs, registered designs and patents.</a:t>
-            </a:r>
-          </a:p>
-        </p:txBody>
-      </p:sp>
-      <p:sp>
-        <p:nvSpPr>
-          <p:cNvPr id="22" name="Rounded Rectangle 21"/>
-          <p:cNvSpPr/>
-          <p:nvPr/>
-        </p:nvSpPr>
-        <p:spPr>
-          <a:xfrm>
-            <a:off x="4338218" y="4023360"/>
-            <a:ext cx="3515258" cy="2148840"/>
-          </a:xfrm>
-          <a:prstGeom prst="roundRect">
-            <a:avLst>
-              <a:gd name="adj" fmla="val 6000"/>
-            </a:avLst>
-          </a:prstGeom>
-          <a:solidFill>
-            <a:srgbClr val="EAF3FF"/>
-          </a:solidFill>
-          <a:ln>
-            <a:noFill/>
-          </a:ln>
-          <a:effectLst/>
-        </p:spPr>
-        <p:style>
-          <a:lnRef idx="1">
-            <a:schemeClr val="accent1"/>
-          </a:lnRef>
-          <a:fillRef idx="3">
-            <a:schemeClr val="accent1"/>
-          </a:fillRef>
-          <a:effectRef idx="2">
-            <a:schemeClr val="accent1"/>
-          </a:effectRef>
-          <a:fontRef idx="minor">
-            <a:schemeClr val="lt1"/>
-          </a:fontRef>
-        </p:style>
-        <p:txBody>
-          <a:bodyPr rtlCol="0" anchor="ctr"/>
-          <a:lstStyle/>
-          <a:p/>
-        </p:txBody>
-      </p:sp>
-      <p:sp>
-        <p:nvSpPr>
-          <p:cNvPr id="23" name="Oval 22"/>
-          <p:cNvSpPr/>
-          <p:nvPr/>
-        </p:nvSpPr>
-        <p:spPr>
-          <a:xfrm>
-            <a:off x="4566818" y="4251960"/>
-            <a:ext cx="457200" cy="457200"/>
-          </a:xfrm>
-          <a:prstGeom prst="ellipse">
-            <a:avLst/>
-          </a:prstGeom>
-          <a:solidFill>
-            <a:srgbClr val="F2B705"/>
-          </a:solidFill>
-          <a:ln>
-            <a:noFill/>
-          </a:ln>
-          <a:effectLst/>
-        </p:spPr>
-        <p:style>
-          <a:lnRef idx="1">
-            <a:schemeClr val="accent1"/>
-          </a:lnRef>
-          <a:fillRef idx="3">
-            <a:schemeClr val="accent1"/>
-          </a:fillRef>
-          <a:effectRef idx="2">
-            <a:schemeClr val="accent1"/>
-          </a:effectRef>
-          <a:fontRef idx="minor">
-            <a:schemeClr val="lt1"/>
-          </a:fontRef>
-        </p:style>
-        <p:txBody>
-          <a:bodyPr rtlCol="0" anchor="ctr" lIns="0" rIns="0" tIns="0" bIns="0"/>
-          <a:lstStyle/>
-          <a:p>
-            <a:pPr algn="ctr"/>
-            <a:r>
-              <a:rPr sz="1500" b="1">
-                <a:solidFill>
-                  <a:srgbClr val="202122"/>
-                </a:solidFill>
-                <a:latin typeface="Calibri"/>
-              </a:rPr>
-              <a:t>5</a:t>
-            </a:r>
-          </a:p>
-        </p:txBody>
-      </p:sp>
-      <p:sp>
-        <p:nvSpPr>
-          <p:cNvPr id="24" name="TextBox 23"/>
-          <p:cNvSpPr txBox="1"/>
-          <p:nvPr/>
-        </p:nvSpPr>
-        <p:spPr>
-          <a:xfrm>
-            <a:off x="5161178" y="4224528"/>
-            <a:ext cx="2509418" cy="512064"/>
-          </a:xfrm>
-          <a:prstGeom prst="rect">
-            <a:avLst/>
-          </a:prstGeom>
-          <a:noFill/>
-        </p:spPr>
-        <p:txBody>
-          <a:bodyPr wrap="square" anchor="ctr" lIns="0" rIns="0" tIns="0" bIns="0"/>
-          <a:lstStyle/>
-          <a:p>
-            <a:pPr algn="l"/>
-            <a:r>
-              <a:rPr sz="1900" b="1" i="0">
-                <a:solidFill>
-                  <a:srgbClr val="03306E"/>
-                </a:solidFill>
-                <a:latin typeface="Calibri"/>
-              </a:rPr>
-              <a:t>International law</a:t>
-            </a:r>
-          </a:p>
-        </p:txBody>
-      </p:sp>
-      <p:sp>
-        <p:nvSpPr>
-          <p:cNvPr id="25" name="TextBox 24"/>
-          <p:cNvSpPr txBox="1"/>
-          <p:nvPr/>
-        </p:nvSpPr>
-        <p:spPr>
-          <a:xfrm>
-            <a:off x="4566818" y="4892040"/>
-            <a:ext cx="3058058" cy="1143000"/>
-          </a:xfrm>
-          <a:prstGeom prst="rect">
-            <a:avLst/>
-          </a:prstGeom>
-          <a:noFill/>
-        </p:spPr>
-        <p:txBody>
-          <a:bodyPr wrap="square" anchor="t" lIns="0" rIns="0" tIns="0" bIns="0"/>
-          <a:lstStyle/>
-          <a:p>
-            <a:pPr algn="l"/>
-            <a:r>
-              <a:rPr sz="2000" b="0" i="0">
-                <a:solidFill>
-                  <a:srgbClr val="202122"/>
-                </a:solidFill>
-                <a:latin typeface="Calibri"/>
-              </a:rPr>
-              <a:t>Some offences cross borders, e.g. in cyberspace and surveillance.</a:t>
+              <a:t>Training and information</a:t>
             </a:r>
           </a:p>
         </p:txBody>
@@ -6286,7 +9400,7 @@
                 </a:solidFill>
                 <a:latin typeface="Cambria"/>
               </a:rPr>
-              <a:t>Guidelines</a:t>
+              <a:t>Quick check: Health and safety for digital work</a:t>
             </a:r>
           </a:p>
         </p:txBody>
@@ -6359,22 +9473,20 @@
       </p:sp>
       <p:sp>
         <p:nvSpPr>
-          <p:cNvPr id="6" name="Rounded Rectangle 5"/>
+          <p:cNvPr id="6" name="Oval 5"/>
           <p:cNvSpPr/>
           <p:nvPr/>
         </p:nvSpPr>
         <p:spPr>
           <a:xfrm>
-            <a:off x="548640" y="1600200"/>
-            <a:ext cx="5364327" cy="640080"/>
-          </a:xfrm>
-          <a:prstGeom prst="roundRect">
-            <a:avLst>
-              <a:gd name="adj" fmla="val 15000"/>
-            </a:avLst>
+            <a:off x="548640" y="1691640"/>
+            <a:ext cx="502920" cy="502920"/>
+          </a:xfrm>
+          <a:prstGeom prst="ellipse">
+            <a:avLst/>
           </a:prstGeom>
           <a:solidFill>
-            <a:srgbClr val="03306E"/>
+            <a:srgbClr val="F2B705"/>
           </a:solidFill>
           <a:ln>
             <a:noFill/>
@@ -6396,9 +9508,20 @@
           </a:fontRef>
         </p:style>
         <p:txBody>
-          <a:bodyPr rtlCol="0" anchor="ctr"/>
-          <a:lstStyle/>
-          <a:p/>
+          <a:bodyPr rtlCol="0" anchor="ctr" lIns="0" rIns="0" tIns="0" bIns="0"/>
+          <a:lstStyle/>
+          <a:p>
+            <a:pPr algn="ctr"/>
+            <a:r>
+              <a:rPr sz="1600" b="1">
+                <a:solidFill>
+                  <a:srgbClr val="202122"/>
+                </a:solidFill>
+                <a:latin typeface="Calibri"/>
+              </a:rPr>
+              <a:t>1</a:t>
+            </a:r>
+          </a:p>
         </p:txBody>
       </p:sp>
       <p:sp>
@@ -6409,49 +9532,47 @@
         </p:nvSpPr>
         <p:spPr>
           <a:xfrm>
-            <a:off x="777240" y="1600200"/>
-            <a:ext cx="4907127" cy="640080"/>
-          </a:xfrm>
-          <a:prstGeom prst="rect">
-            <a:avLst/>
-          </a:prstGeom>
-          <a:noFill/>
-        </p:spPr>
-        <p:txBody>
-          <a:bodyPr wrap="square" anchor="ctr" lIns="0" rIns="0" tIns="0" bIns="0"/>
+            <a:off x="1371600" y="1645920"/>
+            <a:ext cx="10271455" cy="1188720"/>
+          </a:xfrm>
+          <a:prstGeom prst="rect">
+            <a:avLst/>
+          </a:prstGeom>
+          <a:noFill/>
+        </p:spPr>
+        <p:txBody>
+          <a:bodyPr wrap="square" anchor="t" lIns="0" rIns="0" tIns="0" bIns="0"/>
           <a:lstStyle/>
           <a:p>
             <a:pPr algn="l"/>
             <a:r>
-              <a:rPr sz="2000" b="1" i="0">
-                <a:solidFill>
-                  <a:srgbClr val="FFFFFF"/>
-                </a:solidFill>
-                <a:latin typeface="Calibri"/>
-              </a:rPr>
-              <a:t>Codes of conduct</a:t>
-            </a:r>
-          </a:p>
-        </p:txBody>
-      </p:sp>
-      <p:sp>
-        <p:nvSpPr>
-          <p:cNvPr id="8" name="Rounded Rectangle 7"/>
+              <a:rPr sz="2400" b="0" i="0">
+                <a:solidFill>
+                  <a:srgbClr val="202122"/>
+                </a:solidFill>
+                <a:latin typeface="Calibri"/>
+              </a:rPr>
+              <a:t>What must employers provide DSE users on request?</a:t>
+            </a:r>
+          </a:p>
+        </p:txBody>
+      </p:sp>
+      <p:sp>
+        <p:nvSpPr>
+          <p:cNvPr id="8" name="Oval 7"/>
           <p:cNvSpPr/>
           <p:nvPr/>
         </p:nvSpPr>
         <p:spPr>
           <a:xfrm>
-            <a:off x="548640" y="2377440"/>
-            <a:ext cx="5364327" cy="3794760"/>
-          </a:xfrm>
-          <a:prstGeom prst="roundRect">
-            <a:avLst>
-              <a:gd name="adj" fmla="val 4000"/>
-            </a:avLst>
+            <a:off x="548640" y="3108960"/>
+            <a:ext cx="502920" cy="502920"/>
+          </a:xfrm>
+          <a:prstGeom prst="ellipse">
+            <a:avLst/>
           </a:prstGeom>
           <a:solidFill>
-            <a:srgbClr val="EAF3FF"/>
+            <a:srgbClr val="F2B705"/>
           </a:solidFill>
           <a:ln>
             <a:noFill/>
@@ -6473,9 +9594,20 @@
           </a:fontRef>
         </p:style>
         <p:txBody>
-          <a:bodyPr rtlCol="0" anchor="ctr"/>
-          <a:lstStyle/>
-          <a:p/>
+          <a:bodyPr rtlCol="0" anchor="ctr" lIns="0" rIns="0" tIns="0" bIns="0"/>
+          <a:lstStyle/>
+          <a:p>
+            <a:pPr algn="ctr"/>
+            <a:r>
+              <a:rPr sz="1600" b="1">
+                <a:solidFill>
+                  <a:srgbClr val="202122"/>
+                </a:solidFill>
+                <a:latin typeface="Calibri"/>
+              </a:rPr>
+              <a:t>2</a:t>
+            </a:r>
+          </a:p>
         </p:txBody>
       </p:sp>
       <p:sp>
@@ -6486,123 +9618,47 @@
         </p:nvSpPr>
         <p:spPr>
           <a:xfrm>
-            <a:off x="822959" y="2606040"/>
-            <a:ext cx="4815687" cy="3337560"/>
-          </a:xfrm>
-          <a:prstGeom prst="rect">
-            <a:avLst/>
-          </a:prstGeom>
-          <a:noFill/>
-        </p:spPr>
-        <p:txBody>
-          <a:bodyPr wrap="square" lIns="0" rIns="0" tIns="0" bIns="0">
-            <a:spAutoFit/>
-          </a:bodyPr>
-          <a:lstStyle/>
-          <a:p>
-            <a:pPr marL="274320" indent="-274320">
-              <a:spcAft>
-                <a:spcPts val="990"/>
-              </a:spcAft>
-              <a:buClr>
-                <a:srgbClr val="0645AD"/>
-              </a:buClr>
-              <a:buFont typeface="Arial"/>
-              <a:buChar char="•"/>
-            </a:pPr>
-            <a:r>
-              <a:rPr sz="2200" b="0">
+            <a:off x="1371600" y="3063240"/>
+            <a:ext cx="10271455" cy="1188720"/>
+          </a:xfrm>
+          <a:prstGeom prst="rect">
+            <a:avLst/>
+          </a:prstGeom>
+          <a:noFill/>
+        </p:spPr>
+        <p:txBody>
+          <a:bodyPr wrap="square" anchor="t" lIns="0" rIns="0" tIns="0" bIns="0"/>
+          <a:lstStyle/>
+          <a:p>
+            <a:pPr algn="l"/>
+            <a:r>
+              <a:rPr sz="2400" b="0" i="0">
                 <a:solidFill>
                   <a:srgbClr val="202122"/>
                 </a:solidFill>
                 <a:latin typeface="Calibri"/>
               </a:rPr>
-              <a:t>Organisational, professional (BCS, IAP, CIISec) and governmental</a:t>
-            </a:r>
-          </a:p>
-          <a:p>
-            <a:pPr marL="274320" indent="-274320">
-              <a:spcAft>
-                <a:spcPts val="990"/>
-              </a:spcAft>
-              <a:buClr>
-                <a:srgbClr val="0645AD"/>
-              </a:buClr>
-              <a:buFont typeface="Arial"/>
-              <a:buChar char="•"/>
-            </a:pPr>
-            <a:r>
-              <a:rPr sz="2200" b="0">
-                <a:solidFill>
-                  <a:srgbClr val="202122"/>
-                </a:solidFill>
-                <a:latin typeface="Calibri"/>
-              </a:rPr>
-              <a:t>Follow policy and law; minimise risk to the public</a:t>
-            </a:r>
-          </a:p>
-          <a:p>
-            <a:pPr marL="274320" indent="-274320">
-              <a:spcAft>
-                <a:spcPts val="990"/>
-              </a:spcAft>
-              <a:buClr>
-                <a:srgbClr val="0645AD"/>
-              </a:buClr>
-              <a:buFont typeface="Arial"/>
-              <a:buChar char="•"/>
-            </a:pPr>
-            <a:r>
-              <a:rPr sz="2200" b="0">
-                <a:solidFill>
-                  <a:srgbClr val="202122"/>
-                </a:solidFill>
-                <a:latin typeface="Calibri"/>
-              </a:rPr>
-              <a:t>Competence, integrity and meeting deadlines</a:t>
-            </a:r>
-          </a:p>
-          <a:p>
-            <a:pPr marL="274320" indent="-274320">
-              <a:spcAft>
-                <a:spcPts val="990"/>
-              </a:spcAft>
-              <a:buClr>
-                <a:srgbClr val="0645AD"/>
-              </a:buClr>
-              <a:buFont typeface="Arial"/>
-              <a:buChar char="•"/>
-            </a:pPr>
-            <a:r>
-              <a:rPr sz="2200" b="0">
-                <a:solidFill>
-                  <a:srgbClr val="202122"/>
-                </a:solidFill>
-                <a:latin typeface="Calibri"/>
-              </a:rPr>
-              <a:t>Confidentiality and trust</a:t>
-            </a:r>
-          </a:p>
-        </p:txBody>
-      </p:sp>
-      <p:sp>
-        <p:nvSpPr>
-          <p:cNvPr id="10" name="Rounded Rectangle 9"/>
+              <a:t>Name two health risks of long screen use.</a:t>
+            </a:r>
+          </a:p>
+        </p:txBody>
+      </p:sp>
+      <p:sp>
+        <p:nvSpPr>
+          <p:cNvPr id="10" name="Oval 9"/>
           <p:cNvSpPr/>
           <p:nvPr/>
         </p:nvSpPr>
         <p:spPr>
           <a:xfrm>
-            <a:off x="6278727" y="1600200"/>
-            <a:ext cx="5364327" cy="640080"/>
-          </a:xfrm>
-          <a:prstGeom prst="roundRect">
-            <a:avLst>
-              <a:gd name="adj" fmla="val 15000"/>
-            </a:avLst>
+            <a:off x="548640" y="4526280"/>
+            <a:ext cx="502920" cy="502920"/>
+          </a:xfrm>
+          <a:prstGeom prst="ellipse">
+            <a:avLst/>
           </a:prstGeom>
           <a:solidFill>
-            <a:srgbClr val="0645AD"/>
+            <a:srgbClr val="F2B705"/>
           </a:solidFill>
           <a:ln>
             <a:noFill/>
@@ -6624,9 +9680,20 @@
           </a:fontRef>
         </p:style>
         <p:txBody>
-          <a:bodyPr rtlCol="0" anchor="ctr"/>
-          <a:lstStyle/>
-          <a:p/>
+          <a:bodyPr rtlCol="0" anchor="ctr" lIns="0" rIns="0" tIns="0" bIns="0"/>
+          <a:lstStyle/>
+          <a:p>
+            <a:pPr algn="ctr"/>
+            <a:r>
+              <a:rPr sz="1600" b="1">
+                <a:solidFill>
+                  <a:srgbClr val="202122"/>
+                </a:solidFill>
+                <a:latin typeface="Calibri"/>
+              </a:rPr>
+              <a:t>3</a:t>
+            </a:r>
+          </a:p>
         </p:txBody>
       </p:sp>
       <p:sp>
@@ -6637,184 +9704,60 @@
         </p:nvSpPr>
         <p:spPr>
           <a:xfrm>
-            <a:off x="6507327" y="1600200"/>
-            <a:ext cx="4907127" cy="640080"/>
-          </a:xfrm>
-          <a:prstGeom prst="rect">
-            <a:avLst/>
-          </a:prstGeom>
-          <a:noFill/>
-        </p:spPr>
-        <p:txBody>
-          <a:bodyPr wrap="square" anchor="ctr" lIns="0" rIns="0" tIns="0" bIns="0"/>
+            <a:off x="1371600" y="4480560"/>
+            <a:ext cx="10271455" cy="1188720"/>
+          </a:xfrm>
+          <a:prstGeom prst="rect">
+            <a:avLst/>
+          </a:prstGeom>
+          <a:noFill/>
+        </p:spPr>
+        <p:txBody>
+          <a:bodyPr wrap="square" anchor="t" lIns="0" rIns="0" tIns="0" bIns="0"/>
           <a:lstStyle/>
           <a:p>
             <a:pPr algn="l"/>
             <a:r>
-              <a:rPr sz="2000" b="1" i="0">
-                <a:solidFill>
-                  <a:srgbClr val="FFFFFF"/>
-                </a:solidFill>
-                <a:latin typeface="Calibri"/>
-              </a:rPr>
-              <a:t>Standards and policies</a:t>
-            </a:r>
-          </a:p>
-        </p:txBody>
-      </p:sp>
-      <p:sp>
-        <p:nvSpPr>
-          <p:cNvPr id="12" name="Rounded Rectangle 11"/>
-          <p:cNvSpPr/>
-          <p:nvPr/>
-        </p:nvSpPr>
-        <p:spPr>
-          <a:xfrm>
-            <a:off x="6278727" y="2377440"/>
-            <a:ext cx="5364327" cy="3794760"/>
-          </a:xfrm>
-          <a:prstGeom prst="roundRect">
-            <a:avLst>
-              <a:gd name="adj" fmla="val 4000"/>
-            </a:avLst>
-          </a:prstGeom>
-          <a:solidFill>
-            <a:srgbClr val="EAF3FF"/>
-          </a:solidFill>
-          <a:ln>
-            <a:noFill/>
-          </a:ln>
-          <a:effectLst/>
-        </p:spPr>
-        <p:style>
-          <a:lnRef idx="1">
-            <a:schemeClr val="accent1"/>
-          </a:lnRef>
-          <a:fillRef idx="3">
-            <a:schemeClr val="accent1"/>
-          </a:fillRef>
-          <a:effectRef idx="2">
-            <a:schemeClr val="accent1"/>
-          </a:effectRef>
-          <a:fontRef idx="minor">
-            <a:schemeClr val="lt1"/>
-          </a:fontRef>
-        </p:style>
-        <p:txBody>
-          <a:bodyPr rtlCol="0" anchor="ctr"/>
-          <a:lstStyle/>
-          <a:p/>
-        </p:txBody>
-      </p:sp>
-      <p:sp>
-        <p:nvSpPr>
-          <p:cNvPr id="13" name="TextBox 12"/>
-          <p:cNvSpPr txBox="1"/>
-          <p:nvPr/>
-        </p:nvSpPr>
-        <p:spPr>
-          <a:xfrm>
-            <a:off x="6553047" y="2606040"/>
-            <a:ext cx="4815687" cy="3337560"/>
-          </a:xfrm>
-          <a:prstGeom prst="rect">
-            <a:avLst/>
-          </a:prstGeom>
-          <a:noFill/>
-        </p:spPr>
-        <p:txBody>
-          <a:bodyPr wrap="square" lIns="0" rIns="0" tIns="0" bIns="0">
-            <a:spAutoFit/>
-          </a:bodyPr>
-          <a:lstStyle/>
-          <a:p>
-            <a:pPr marL="274320" indent="-274320">
-              <a:spcAft>
-                <a:spcPts val="990"/>
-              </a:spcAft>
-              <a:buClr>
-                <a:srgbClr val="0645AD"/>
-              </a:buClr>
-              <a:buFont typeface="Arial"/>
-              <a:buChar char="•"/>
-            </a:pPr>
-            <a:r>
-              <a:rPr sz="2200" b="1">
+              <a:rPr sz="2400" b="0" i="0">
                 <a:solidFill>
                   <a:srgbClr val="202122"/>
                 </a:solidFill>
                 <a:latin typeface="Calibri"/>
               </a:rPr>
-              <a:t>Standards:</a:t>
-            </a:r>
-            <a:r>
-              <a:rPr sz="2200" b="0">
-                <a:solidFill>
-                  <a:srgbClr val="202122"/>
-                </a:solidFill>
-                <a:latin typeface="Calibri"/>
-              </a:rPr>
-              <a:t> ISO, WCAG, W3C, IETF, BS, IEEE, PCI SSC</a:t>
-            </a:r>
-          </a:p>
-          <a:p>
-            <a:pPr marL="274320" indent="-274320">
-              <a:spcAft>
-                <a:spcPts val="990"/>
-              </a:spcAft>
-              <a:buClr>
-                <a:srgbClr val="0645AD"/>
-              </a:buClr>
-              <a:buFont typeface="Arial"/>
-              <a:buChar char="•"/>
-            </a:pPr>
-            <a:r>
-              <a:rPr sz="2200" b="1">
-                <a:solidFill>
-                  <a:srgbClr val="202122"/>
-                </a:solidFill>
-                <a:latin typeface="Calibri"/>
-              </a:rPr>
-              <a:t>Acceptable use policy:</a:t>
-            </a:r>
-            <a:r>
-              <a:rPr sz="2200" b="0">
-                <a:solidFill>
-                  <a:srgbClr val="202122"/>
-                </a:solidFill>
-                <a:latin typeface="Calibri"/>
-              </a:rPr>
-              <a:t> permitted activities, etiquette, sanctions</a:t>
-            </a:r>
-          </a:p>
-          <a:p>
-            <a:pPr marL="274320" indent="-274320">
-              <a:spcAft>
-                <a:spcPts val="990"/>
-              </a:spcAft>
-              <a:buClr>
-                <a:srgbClr val="0645AD"/>
-              </a:buClr>
-              <a:buFont typeface="Arial"/>
-              <a:buChar char="•"/>
-            </a:pPr>
-            <a:r>
-              <a:rPr sz="2200" b="1">
-                <a:solidFill>
-                  <a:srgbClr val="202122"/>
-                </a:solidFill>
-                <a:latin typeface="Calibri"/>
-              </a:rPr>
-              <a:t>Whistleblowing:</a:t>
-            </a:r>
-            <a:r>
-              <a:rPr sz="2200" b="0">
-                <a:solidFill>
-                  <a:srgbClr val="202122"/>
-                </a:solidFill>
-                <a:latin typeface="Calibri"/>
-              </a:rPr>
-              <a:t> a safe way to report wrongdoing</a:t>
+              <a:t>What does a workstation assessment check?</a:t>
+            </a:r>
+          </a:p>
+        </p:txBody>
+      </p:sp>
+      <p:sp>
+        <p:nvSpPr>
+          <p:cNvPr id="12" name="TextBox 11"/>
+          <p:cNvSpPr txBox="1"/>
+          <p:nvPr/>
+        </p:nvSpPr>
+        <p:spPr>
+          <a:xfrm>
+            <a:off x="548640" y="5852160"/>
+            <a:ext cx="11094415" cy="365760"/>
+          </a:xfrm>
+          <a:prstGeom prst="rect">
+            <a:avLst/>
+          </a:prstGeom>
+          <a:noFill/>
+        </p:spPr>
+        <p:txBody>
+          <a:bodyPr wrap="square" anchor="t" lIns="0" rIns="0" tIns="0" bIns="0"/>
+          <a:lstStyle/>
+          <a:p>
+            <a:pPr algn="l"/>
+            <a:r>
+              <a:rPr sz="1300" b="0" i="1">
+                <a:solidFill>
+                  <a:srgbClr val="54595D"/>
+                </a:solidFill>
+                <a:latin typeface="Calibri"/>
+              </a:rPr>
+              <a:t>Answer on mini whiteboards or in your book. Answers are in the speaker notes.</a:t>
             </a:r>
           </a:p>
         </p:txBody>
@@ -6906,7 +9849,7 @@
                 </a:solidFill>
                 <a:latin typeface="Cambria"/>
               </a:rPr>
-              <a:t>Check your understanding</a:t>
+              <a:t>Key legislation</a:t>
             </a:r>
           </a:p>
         </p:txBody>
@@ -6979,14 +9922,145 @@
       </p:sp>
       <p:sp>
         <p:nvSpPr>
-          <p:cNvPr id="6" name="Oval 5"/>
+          <p:cNvPr id="6" name="TextBox 5"/>
+          <p:cNvSpPr txBox="1"/>
+          <p:nvPr/>
+        </p:nvSpPr>
+        <p:spPr>
+          <a:xfrm>
+            <a:off x="548640" y="1554480"/>
+            <a:ext cx="6720840" cy="4617720"/>
+          </a:xfrm>
+          <a:prstGeom prst="rect">
+            <a:avLst/>
+          </a:prstGeom>
+          <a:noFill/>
+        </p:spPr>
+        <p:txBody>
+          <a:bodyPr wrap="square" lIns="0" rIns="0" tIns="0" bIns="0">
+            <a:spAutoFit/>
+          </a:bodyPr>
+          <a:lstStyle/>
+          <a:p>
+            <a:pPr>
+              <a:spcAft>
+                <a:spcPts val="1200"/>
+              </a:spcAft>
+            </a:pPr>
+            <a:r>
+              <a:rPr sz="2000" b="0">
+                <a:solidFill>
+                  <a:srgbClr val="202122"/>
+                </a:solidFill>
+                <a:latin typeface="Calibri"/>
+              </a:rPr>
+              <a:t>Developers must build software that respects the law.</a:t>
+            </a:r>
+          </a:p>
+          <a:p>
+            <a:pPr>
+              <a:spcAft>
+                <a:spcPts val="1200"/>
+              </a:spcAft>
+            </a:pPr>
+            <a:r>
+              <a:rPr sz="2000" b="0">
+                <a:solidFill>
+                  <a:srgbClr val="202122"/>
+                </a:solidFill>
+                <a:latin typeface="Calibri"/>
+              </a:rPr>
+              <a:t>The Data Protection Act and UK GDPR control how personal data is collected, used and kept, under eight principles such as using data fairly, only for stated purposes, keeping it accurate and secure.</a:t>
+            </a:r>
+          </a:p>
+          <a:p>
+            <a:pPr>
+              <a:spcAft>
+                <a:spcPts val="1200"/>
+              </a:spcAft>
+            </a:pPr>
+            <a:r>
+              <a:rPr sz="2000" b="0">
+                <a:solidFill>
+                  <a:srgbClr val="202122"/>
+                </a:solidFill>
+                <a:latin typeface="Calibri"/>
+              </a:rPr>
+              <a:t>The Computer Misuse Act 1990 makes unauthorised access, access intending further crimes, and damaging systems illegal.</a:t>
+            </a:r>
+          </a:p>
+          <a:p>
+            <a:pPr>
+              <a:spcAft>
+                <a:spcPts val="1200"/>
+              </a:spcAft>
+            </a:pPr>
+            <a:r>
+              <a:rPr sz="2000" b="0">
+                <a:solidFill>
+                  <a:srgbClr val="202122"/>
+                </a:solidFill>
+                <a:latin typeface="Calibri"/>
+              </a:rPr>
+              <a:t>Equality law protects nine characteristics, so software mustn't discriminate. Intellectual property law protects designs and patents. Some offences fall under international law.</a:t>
+            </a:r>
+          </a:p>
+        </p:txBody>
+      </p:sp>
+      <p:sp>
+        <p:nvSpPr>
+          <p:cNvPr id="7" name="Rounded Rectangle 6"/>
           <p:cNvSpPr/>
           <p:nvPr/>
         </p:nvSpPr>
         <p:spPr>
           <a:xfrm>
-            <a:off x="548640" y="1618488"/>
-            <a:ext cx="411480" cy="411480"/>
+            <a:off x="7772400" y="1554480"/>
+            <a:ext cx="3867912" cy="4526280"/>
+          </a:xfrm>
+          <a:prstGeom prst="roundRect">
+            <a:avLst>
+              <a:gd name="adj" fmla="val 8000"/>
+            </a:avLst>
+          </a:prstGeom>
+          <a:solidFill>
+            <a:srgbClr val="03306E"/>
+          </a:solidFill>
+          <a:ln>
+            <a:noFill/>
+          </a:ln>
+          <a:effectLst/>
+        </p:spPr>
+        <p:style>
+          <a:lnRef idx="1">
+            <a:schemeClr val="accent1"/>
+          </a:lnRef>
+          <a:fillRef idx="3">
+            <a:schemeClr val="accent1"/>
+          </a:fillRef>
+          <a:effectRef idx="2">
+            <a:schemeClr val="accent1"/>
+          </a:effectRef>
+          <a:fontRef idx="minor">
+            <a:schemeClr val="lt1"/>
+          </a:fontRef>
+        </p:style>
+        <p:txBody>
+          <a:bodyPr rtlCol="0" anchor="ctr"/>
+          <a:lstStyle/>
+          <a:p/>
+        </p:txBody>
+      </p:sp>
+      <p:sp>
+        <p:nvSpPr>
+          <p:cNvPr id="8" name="Oval 7"/>
+          <p:cNvSpPr/>
+          <p:nvPr/>
+        </p:nvSpPr>
+        <p:spPr>
+          <a:xfrm>
+            <a:off x="8046720" y="1828800"/>
+            <a:ext cx="548640" cy="548640"/>
           </a:xfrm>
           <a:prstGeom prst="ellipse">
             <a:avLst/>
@@ -7019,27 +10093,27 @@
           <a:p>
             <a:pPr algn="ctr"/>
             <a:r>
-              <a:rPr sz="1400" b="1">
+              <a:rPr sz="1300" b="1">
                 <a:solidFill>
                   <a:srgbClr val="202122"/>
                 </a:solidFill>
                 <a:latin typeface="Calibri"/>
               </a:rPr>
-              <a:t>1</a:t>
-            </a:r>
-          </a:p>
-        </p:txBody>
-      </p:sp>
-      <p:sp>
-        <p:nvSpPr>
-          <p:cNvPr id="7" name="TextBox 6"/>
-          <p:cNvSpPr txBox="1"/>
-          <p:nvPr/>
-        </p:nvSpPr>
-        <p:spPr>
-          <a:xfrm>
-            <a:off x="1234440" y="1600200"/>
-            <a:ext cx="10408615" cy="1030986"/>
+              <a:t>e.g.</a:t>
+            </a:r>
+          </a:p>
+        </p:txBody>
+      </p:sp>
+      <p:sp>
+        <p:nvSpPr>
+          <p:cNvPr id="9" name="TextBox 8"/>
+          <p:cNvSpPr txBox="1"/>
+          <p:nvPr/>
+        </p:nvSpPr>
+        <p:spPr>
+          <a:xfrm>
+            <a:off x="8046720" y="2560320"/>
+            <a:ext cx="3291840" cy="365760"/>
           </a:xfrm>
           <a:prstGeom prst="rect">
             <a:avLst/>
@@ -7052,80 +10126,27 @@
           <a:p>
             <a:pPr algn="l"/>
             <a:r>
-              <a:rPr sz="2200" b="0" i="0">
-                <a:solidFill>
-                  <a:srgbClr val="202122"/>
-                </a:solidFill>
-                <a:latin typeface="Calibri"/>
-              </a:rPr>
-              <a:t>Name two employer duties under the Health and Safety at Work Act.</a:t>
-            </a:r>
-          </a:p>
-        </p:txBody>
-      </p:sp>
-      <p:sp>
-        <p:nvSpPr>
-          <p:cNvPr id="8" name="Oval 7"/>
-          <p:cNvSpPr/>
-          <p:nvPr/>
-        </p:nvSpPr>
-        <p:spPr>
-          <a:xfrm>
-            <a:off x="548640" y="2814066"/>
-            <a:ext cx="411480" cy="411480"/>
-          </a:xfrm>
-          <a:prstGeom prst="ellipse">
-            <a:avLst/>
-          </a:prstGeom>
-          <a:solidFill>
-            <a:srgbClr val="F2B705"/>
-          </a:solidFill>
-          <a:ln>
-            <a:noFill/>
-          </a:ln>
-          <a:effectLst/>
-        </p:spPr>
-        <p:style>
-          <a:lnRef idx="1">
-            <a:schemeClr val="accent1"/>
-          </a:lnRef>
-          <a:fillRef idx="3">
-            <a:schemeClr val="accent1"/>
-          </a:fillRef>
-          <a:effectRef idx="2">
-            <a:schemeClr val="accent1"/>
-          </a:effectRef>
-          <a:fontRef idx="minor">
-            <a:schemeClr val="lt1"/>
-          </a:fontRef>
-        </p:style>
-        <p:txBody>
-          <a:bodyPr rtlCol="0" anchor="ctr" lIns="0" rIns="0" tIns="0" bIns="0"/>
-          <a:lstStyle/>
-          <a:p>
-            <a:pPr algn="ctr"/>
-            <a:r>
-              <a:rPr sz="1400" b="1">
-                <a:solidFill>
-                  <a:srgbClr val="202122"/>
-                </a:solidFill>
-                <a:latin typeface="Calibri"/>
-              </a:rPr>
-              <a:t>2</a:t>
-            </a:r>
-          </a:p>
-        </p:txBody>
-      </p:sp>
-      <p:sp>
-        <p:nvSpPr>
-          <p:cNvPr id="9" name="TextBox 8"/>
-          <p:cNvSpPr txBox="1"/>
-          <p:nvPr/>
-        </p:nvSpPr>
-        <p:spPr>
-          <a:xfrm>
-            <a:off x="1234440" y="2795778"/>
-            <a:ext cx="10408615" cy="1030986"/>
+              <a:rPr sz="1300" b="1" i="0">
+                <a:solidFill>
+                  <a:srgbClr val="A9C8F0"/>
+                </a:solidFill>
+                <a:latin typeface="Calibri"/>
+              </a:rPr>
+              <a:t>EXAMPLE</a:t>
+            </a:r>
+          </a:p>
+        </p:txBody>
+      </p:sp>
+      <p:sp>
+        <p:nvSpPr>
+          <p:cNvPr id="10" name="TextBox 9"/>
+          <p:cNvSpPr txBox="1"/>
+          <p:nvPr/>
+        </p:nvSpPr>
+        <p:spPr>
+          <a:xfrm>
+            <a:off x="8046720" y="2971800"/>
+            <a:ext cx="3291840" cy="2971800"/>
           </a:xfrm>
           <a:prstGeom prst="rect">
             <a:avLst/>
@@ -7138,185 +10159,13 @@
           <a:p>
             <a:pPr algn="l"/>
             <a:r>
-              <a:rPr sz="2200" b="0" i="0">
-                <a:solidFill>
-                  <a:srgbClr val="202122"/>
-                </a:solidFill>
-                <a:latin typeface="Calibri"/>
-              </a:rPr>
-              <a:t>Which law covers hacking into a system?</a:t>
-            </a:r>
-          </a:p>
-        </p:txBody>
-      </p:sp>
-      <p:sp>
-        <p:nvSpPr>
-          <p:cNvPr id="10" name="Oval 9"/>
-          <p:cNvSpPr/>
-          <p:nvPr/>
-        </p:nvSpPr>
-        <p:spPr>
-          <a:xfrm>
-            <a:off x="548640" y="4009644"/>
-            <a:ext cx="411480" cy="411480"/>
-          </a:xfrm>
-          <a:prstGeom prst="ellipse">
-            <a:avLst/>
-          </a:prstGeom>
-          <a:solidFill>
-            <a:srgbClr val="F2B705"/>
-          </a:solidFill>
-          <a:ln>
-            <a:noFill/>
-          </a:ln>
-          <a:effectLst/>
-        </p:spPr>
-        <p:style>
-          <a:lnRef idx="1">
-            <a:schemeClr val="accent1"/>
-          </a:lnRef>
-          <a:fillRef idx="3">
-            <a:schemeClr val="accent1"/>
-          </a:fillRef>
-          <a:effectRef idx="2">
-            <a:schemeClr val="accent1"/>
-          </a:effectRef>
-          <a:fontRef idx="minor">
-            <a:schemeClr val="lt1"/>
-          </a:fontRef>
-        </p:style>
-        <p:txBody>
-          <a:bodyPr rtlCol="0" anchor="ctr" lIns="0" rIns="0" tIns="0" bIns="0"/>
-          <a:lstStyle/>
-          <a:p>
-            <a:pPr algn="ctr"/>
-            <a:r>
-              <a:rPr sz="1400" b="1">
-                <a:solidFill>
-                  <a:srgbClr val="202122"/>
-                </a:solidFill>
-                <a:latin typeface="Calibri"/>
-              </a:rPr>
-              <a:t>3</a:t>
-            </a:r>
-          </a:p>
-        </p:txBody>
-      </p:sp>
-      <p:sp>
-        <p:nvSpPr>
-          <p:cNvPr id="11" name="TextBox 10"/>
-          <p:cNvSpPr txBox="1"/>
-          <p:nvPr/>
-        </p:nvSpPr>
-        <p:spPr>
-          <a:xfrm>
-            <a:off x="1234440" y="3991356"/>
-            <a:ext cx="10408615" cy="1030986"/>
-          </a:xfrm>
-          <a:prstGeom prst="rect">
-            <a:avLst/>
-          </a:prstGeom>
-          <a:noFill/>
-        </p:spPr>
-        <p:txBody>
-          <a:bodyPr wrap="square" anchor="t" lIns="0" rIns="0" tIns="0" bIns="0"/>
-          <a:lstStyle/>
-          <a:p>
-            <a:pPr algn="l"/>
-            <a:r>
-              <a:rPr sz="2200" b="0" i="0">
-                <a:solidFill>
-                  <a:srgbClr val="202122"/>
-                </a:solidFill>
-                <a:latin typeface="Calibri"/>
-              </a:rPr>
-              <a:t>How many protected characteristics are there?</a:t>
-            </a:r>
-          </a:p>
-        </p:txBody>
-      </p:sp>
-      <p:sp>
-        <p:nvSpPr>
-          <p:cNvPr id="12" name="Oval 11"/>
-          <p:cNvSpPr/>
-          <p:nvPr/>
-        </p:nvSpPr>
-        <p:spPr>
-          <a:xfrm>
-            <a:off x="548640" y="5205221"/>
-            <a:ext cx="411480" cy="411480"/>
-          </a:xfrm>
-          <a:prstGeom prst="ellipse">
-            <a:avLst/>
-          </a:prstGeom>
-          <a:solidFill>
-            <a:srgbClr val="F2B705"/>
-          </a:solidFill>
-          <a:ln>
-            <a:noFill/>
-          </a:ln>
-          <a:effectLst/>
-        </p:spPr>
-        <p:style>
-          <a:lnRef idx="1">
-            <a:schemeClr val="accent1"/>
-          </a:lnRef>
-          <a:fillRef idx="3">
-            <a:schemeClr val="accent1"/>
-          </a:fillRef>
-          <a:effectRef idx="2">
-            <a:schemeClr val="accent1"/>
-          </a:effectRef>
-          <a:fontRef idx="minor">
-            <a:schemeClr val="lt1"/>
-          </a:fontRef>
-        </p:style>
-        <p:txBody>
-          <a:bodyPr rtlCol="0" anchor="ctr" lIns="0" rIns="0" tIns="0" bIns="0"/>
-          <a:lstStyle/>
-          <a:p>
-            <a:pPr algn="ctr"/>
-            <a:r>
-              <a:rPr sz="1400" b="1">
-                <a:solidFill>
-                  <a:srgbClr val="202122"/>
-                </a:solidFill>
-                <a:latin typeface="Calibri"/>
-              </a:rPr>
-              <a:t>4</a:t>
-            </a:r>
-          </a:p>
-        </p:txBody>
-      </p:sp>
-      <p:sp>
-        <p:nvSpPr>
-          <p:cNvPr id="13" name="TextBox 12"/>
-          <p:cNvSpPr txBox="1"/>
-          <p:nvPr/>
-        </p:nvSpPr>
-        <p:spPr>
-          <a:xfrm>
-            <a:off x="1234440" y="5186933"/>
-            <a:ext cx="10408615" cy="1030986"/>
-          </a:xfrm>
-          <a:prstGeom prst="rect">
-            <a:avLst/>
-          </a:prstGeom>
-          <a:noFill/>
-        </p:spPr>
-        <p:txBody>
-          <a:bodyPr wrap="square" anchor="t" lIns="0" rIns="0" tIns="0" bIns="0"/>
-          <a:lstStyle/>
-          <a:p>
-            <a:pPr algn="l"/>
-            <a:r>
-              <a:rPr sz="2200" b="0" i="0">
-                <a:solidFill>
-                  <a:srgbClr val="202122"/>
-                </a:solidFill>
-                <a:latin typeface="Calibri"/>
-              </a:rPr>
-              <a:t>Which standard covers web accessibility?</a:t>
+              <a:rPr sz="1900" b="0" i="0">
+                <a:solidFill>
+                  <a:srgbClr val="FFFFFF"/>
+                </a:solidFill>
+                <a:latin typeface="Cambria"/>
+              </a:rPr>
+              <a:t>An app that quietly collects users' locations without consent breaks data protection law, however useful the data is.</a:t>
             </a:r>
           </a:p>
         </p:txBody>
@@ -7408,7 +10257,7 @@
                 </a:solidFill>
                 <a:latin typeface="Cambria"/>
               </a:rPr>
-              <a:t>Answers</a:t>
+              <a:t>Key legislation</a:t>
             </a:r>
           </a:p>
         </p:txBody>
@@ -7481,14 +10330,58 @@
       </p:sp>
       <p:sp>
         <p:nvSpPr>
-          <p:cNvPr id="6" name="Oval 5"/>
+          <p:cNvPr id="6" name="Rounded Rectangle 5"/>
           <p:cNvSpPr/>
           <p:nvPr/>
         </p:nvSpPr>
         <p:spPr>
           <a:xfrm>
-            <a:off x="548640" y="1618488"/>
-            <a:ext cx="411480" cy="411480"/>
+            <a:off x="548640" y="1600200"/>
+            <a:ext cx="3515258" cy="2148840"/>
+          </a:xfrm>
+          <a:prstGeom prst="roundRect">
+            <a:avLst>
+              <a:gd name="adj" fmla="val 6000"/>
+            </a:avLst>
+          </a:prstGeom>
+          <a:solidFill>
+            <a:srgbClr val="EAF3FF"/>
+          </a:solidFill>
+          <a:ln>
+            <a:noFill/>
+          </a:ln>
+          <a:effectLst/>
+        </p:spPr>
+        <p:style>
+          <a:lnRef idx="1">
+            <a:schemeClr val="accent1"/>
+          </a:lnRef>
+          <a:fillRef idx="3">
+            <a:schemeClr val="accent1"/>
+          </a:fillRef>
+          <a:effectRef idx="2">
+            <a:schemeClr val="accent1"/>
+          </a:effectRef>
+          <a:fontRef idx="minor">
+            <a:schemeClr val="lt1"/>
+          </a:fontRef>
+        </p:style>
+        <p:txBody>
+          <a:bodyPr rtlCol="0" anchor="ctr"/>
+          <a:lstStyle/>
+          <a:p/>
+        </p:txBody>
+      </p:sp>
+      <p:sp>
+        <p:nvSpPr>
+          <p:cNvPr id="7" name="Oval 6"/>
+          <p:cNvSpPr/>
+          <p:nvPr/>
+        </p:nvSpPr>
+        <p:spPr>
+          <a:xfrm>
+            <a:off x="777240" y="1828800"/>
+            <a:ext cx="457200" cy="457200"/>
           </a:xfrm>
           <a:prstGeom prst="ellipse">
             <a:avLst/>
@@ -7521,7 +10414,7 @@
           <a:p>
             <a:pPr algn="ctr"/>
             <a:r>
-              <a:rPr sz="1400" b="1">
+              <a:rPr sz="1500" b="1">
                 <a:solidFill>
                   <a:srgbClr val="202122"/>
                 </a:solidFill>
@@ -7534,14 +10427,47 @@
       </p:sp>
       <p:sp>
         <p:nvSpPr>
-          <p:cNvPr id="7" name="TextBox 6"/>
-          <p:cNvSpPr txBox="1"/>
-          <p:nvPr/>
-        </p:nvSpPr>
-        <p:spPr>
-          <a:xfrm>
-            <a:off x="1234440" y="1600200"/>
-            <a:ext cx="10408615" cy="1030986"/>
+          <p:cNvPr id="8" name="TextBox 7"/>
+          <p:cNvSpPr txBox="1"/>
+          <p:nvPr/>
+        </p:nvSpPr>
+        <p:spPr>
+          <a:xfrm>
+            <a:off x="1371600" y="1801368"/>
+            <a:ext cx="2509418" cy="512064"/>
+          </a:xfrm>
+          <a:prstGeom prst="rect">
+            <a:avLst/>
+          </a:prstGeom>
+          <a:noFill/>
+        </p:spPr>
+        <p:txBody>
+          <a:bodyPr wrap="square" anchor="ctr" lIns="0" rIns="0" tIns="0" bIns="0"/>
+          <a:lstStyle/>
+          <a:p>
+            <a:pPr algn="l"/>
+            <a:r>
+              <a:rPr sz="1600" b="1" i="0">
+                <a:solidFill>
+                  <a:srgbClr val="03306E"/>
+                </a:solidFill>
+                <a:latin typeface="Calibri"/>
+              </a:rPr>
+              <a:t>Data Protection Act / UK GDPR</a:t>
+            </a:r>
+          </a:p>
+        </p:txBody>
+      </p:sp>
+      <p:sp>
+        <p:nvSpPr>
+          <p:cNvPr id="9" name="TextBox 8"/>
+          <p:cNvSpPr txBox="1"/>
+          <p:nvPr/>
+        </p:nvSpPr>
+        <p:spPr>
+          <a:xfrm>
+            <a:off x="777240" y="2468880"/>
+            <a:ext cx="3058058" cy="1143000"/>
           </a:xfrm>
           <a:prstGeom prst="rect">
             <a:avLst/>
@@ -7554,38 +10480,71 @@
           <a:p>
             <a:pPr algn="l"/>
             <a:r>
-              <a:rPr sz="1800" b="0" i="0">
-                <a:solidFill>
-                  <a:srgbClr val="54595D"/>
-                </a:solidFill>
-                <a:latin typeface="Calibri"/>
-              </a:rPr>
-              <a:t>Name two employer duties under the Health and Safety at Work Act.</a:t>
-            </a:r>
-          </a:p>
-          <a:p>
-            <a:r>
-              <a:rPr sz="1800" b="1">
-                <a:solidFill>
-                  <a:srgbClr val="03306E"/>
-                </a:solidFill>
-                <a:latin typeface="Calibri"/>
-              </a:rPr>
-              <a:t>Any two of: safe environment, training, welfare, information, instruction, supervision.</a:t>
-            </a:r>
-          </a:p>
-        </p:txBody>
-      </p:sp>
-      <p:sp>
-        <p:nvSpPr>
-          <p:cNvPr id="8" name="Oval 7"/>
+              <a:rPr sz="2000" b="0" i="0">
+                <a:solidFill>
+                  <a:srgbClr val="202122"/>
+                </a:solidFill>
+                <a:latin typeface="Calibri"/>
+              </a:rPr>
+              <a:t>Protects personal data. Learn its eight principles.</a:t>
+            </a:r>
+          </a:p>
+        </p:txBody>
+      </p:sp>
+      <p:sp>
+        <p:nvSpPr>
+          <p:cNvPr id="10" name="Rounded Rectangle 9"/>
           <p:cNvSpPr/>
           <p:nvPr/>
         </p:nvSpPr>
         <p:spPr>
           <a:xfrm>
-            <a:off x="548640" y="2814066"/>
-            <a:ext cx="411480" cy="411480"/>
+            <a:off x="4338218" y="1600200"/>
+            <a:ext cx="3515258" cy="2148840"/>
+          </a:xfrm>
+          <a:prstGeom prst="roundRect">
+            <a:avLst>
+              <a:gd name="adj" fmla="val 6000"/>
+            </a:avLst>
+          </a:prstGeom>
+          <a:solidFill>
+            <a:srgbClr val="EAF3FF"/>
+          </a:solidFill>
+          <a:ln>
+            <a:noFill/>
+          </a:ln>
+          <a:effectLst/>
+        </p:spPr>
+        <p:style>
+          <a:lnRef idx="1">
+            <a:schemeClr val="accent1"/>
+          </a:lnRef>
+          <a:fillRef idx="3">
+            <a:schemeClr val="accent1"/>
+          </a:fillRef>
+          <a:effectRef idx="2">
+            <a:schemeClr val="accent1"/>
+          </a:effectRef>
+          <a:fontRef idx="minor">
+            <a:schemeClr val="lt1"/>
+          </a:fontRef>
+        </p:style>
+        <p:txBody>
+          <a:bodyPr rtlCol="0" anchor="ctr"/>
+          <a:lstStyle/>
+          <a:p/>
+        </p:txBody>
+      </p:sp>
+      <p:sp>
+        <p:nvSpPr>
+          <p:cNvPr id="11" name="Oval 10"/>
+          <p:cNvSpPr/>
+          <p:nvPr/>
+        </p:nvSpPr>
+        <p:spPr>
+          <a:xfrm>
+            <a:off x="4566818" y="1828800"/>
+            <a:ext cx="457200" cy="457200"/>
           </a:xfrm>
           <a:prstGeom prst="ellipse">
             <a:avLst/>
@@ -7618,7 +10577,7 @@
           <a:p>
             <a:pPr algn="ctr"/>
             <a:r>
-              <a:rPr sz="1400" b="1">
+              <a:rPr sz="1500" b="1">
                 <a:solidFill>
                   <a:srgbClr val="202122"/>
                 </a:solidFill>
@@ -7631,14 +10590,47 @@
       </p:sp>
       <p:sp>
         <p:nvSpPr>
-          <p:cNvPr id="9" name="TextBox 8"/>
-          <p:cNvSpPr txBox="1"/>
-          <p:nvPr/>
-        </p:nvSpPr>
-        <p:spPr>
-          <a:xfrm>
-            <a:off x="1234440" y="2795778"/>
-            <a:ext cx="10408615" cy="1030986"/>
+          <p:cNvPr id="12" name="TextBox 11"/>
+          <p:cNvSpPr txBox="1"/>
+          <p:nvPr/>
+        </p:nvSpPr>
+        <p:spPr>
+          <a:xfrm>
+            <a:off x="5161178" y="1801368"/>
+            <a:ext cx="2509418" cy="512064"/>
+          </a:xfrm>
+          <a:prstGeom prst="rect">
+            <a:avLst/>
+          </a:prstGeom>
+          <a:noFill/>
+        </p:spPr>
+        <p:txBody>
+          <a:bodyPr wrap="square" anchor="ctr" lIns="0" rIns="0" tIns="0" bIns="0"/>
+          <a:lstStyle/>
+          <a:p>
+            <a:pPr algn="l"/>
+            <a:r>
+              <a:rPr sz="1600" b="1" i="0">
+                <a:solidFill>
+                  <a:srgbClr val="03306E"/>
+                </a:solidFill>
+                <a:latin typeface="Calibri"/>
+              </a:rPr>
+              <a:t>Computer Misuse Act 1990</a:t>
+            </a:r>
+          </a:p>
+        </p:txBody>
+      </p:sp>
+      <p:sp>
+        <p:nvSpPr>
+          <p:cNvPr id="13" name="TextBox 12"/>
+          <p:cNvSpPr txBox="1"/>
+          <p:nvPr/>
+        </p:nvSpPr>
+        <p:spPr>
+          <a:xfrm>
+            <a:off x="4566818" y="2468880"/>
+            <a:ext cx="3058058" cy="1143000"/>
           </a:xfrm>
           <a:prstGeom prst="rect">
             <a:avLst/>
@@ -7651,38 +10643,71 @@
           <a:p>
             <a:pPr algn="l"/>
             <a:r>
-              <a:rPr sz="1800" b="0" i="0">
-                <a:solidFill>
-                  <a:srgbClr val="54595D"/>
-                </a:solidFill>
-                <a:latin typeface="Calibri"/>
-              </a:rPr>
-              <a:t>Which law covers hacking into a system?</a:t>
-            </a:r>
-          </a:p>
-          <a:p>
-            <a:r>
-              <a:rPr sz="1800" b="1">
-                <a:solidFill>
-                  <a:srgbClr val="03306E"/>
-                </a:solidFill>
-                <a:latin typeface="Calibri"/>
-              </a:rPr>
-              <a:t>The Computer Misuse Act 1990.</a:t>
-            </a:r>
-          </a:p>
-        </p:txBody>
-      </p:sp>
-      <p:sp>
-        <p:nvSpPr>
-          <p:cNvPr id="10" name="Oval 9"/>
+              <a:rPr sz="1700" b="0" i="0">
+                <a:solidFill>
+                  <a:srgbClr val="202122"/>
+                </a:solidFill>
+                <a:latin typeface="Calibri"/>
+              </a:rPr>
+              <a:t>Unauthorised access, access with intent to commit further crimes, and unauthorised acts that impair a computer.</a:t>
+            </a:r>
+          </a:p>
+        </p:txBody>
+      </p:sp>
+      <p:sp>
+        <p:nvSpPr>
+          <p:cNvPr id="14" name="Rounded Rectangle 13"/>
           <p:cNvSpPr/>
           <p:nvPr/>
         </p:nvSpPr>
         <p:spPr>
           <a:xfrm>
-            <a:off x="548640" y="4009644"/>
-            <a:ext cx="411480" cy="411480"/>
+            <a:off x="8127796" y="1600200"/>
+            <a:ext cx="3515258" cy="2148840"/>
+          </a:xfrm>
+          <a:prstGeom prst="roundRect">
+            <a:avLst>
+              <a:gd name="adj" fmla="val 6000"/>
+            </a:avLst>
+          </a:prstGeom>
+          <a:solidFill>
+            <a:srgbClr val="EAF3FF"/>
+          </a:solidFill>
+          <a:ln>
+            <a:noFill/>
+          </a:ln>
+          <a:effectLst/>
+        </p:spPr>
+        <p:style>
+          <a:lnRef idx="1">
+            <a:schemeClr val="accent1"/>
+          </a:lnRef>
+          <a:fillRef idx="3">
+            <a:schemeClr val="accent1"/>
+          </a:fillRef>
+          <a:effectRef idx="2">
+            <a:schemeClr val="accent1"/>
+          </a:effectRef>
+          <a:fontRef idx="minor">
+            <a:schemeClr val="lt1"/>
+          </a:fontRef>
+        </p:style>
+        <p:txBody>
+          <a:bodyPr rtlCol="0" anchor="ctr"/>
+          <a:lstStyle/>
+          <a:p/>
+        </p:txBody>
+      </p:sp>
+      <p:sp>
+        <p:nvSpPr>
+          <p:cNvPr id="15" name="Oval 14"/>
+          <p:cNvSpPr/>
+          <p:nvPr/>
+        </p:nvSpPr>
+        <p:spPr>
+          <a:xfrm>
+            <a:off x="8356396" y="1828800"/>
+            <a:ext cx="457200" cy="457200"/>
           </a:xfrm>
           <a:prstGeom prst="ellipse">
             <a:avLst/>
@@ -7715,7 +10740,7 @@
           <a:p>
             <a:pPr algn="ctr"/>
             <a:r>
-              <a:rPr sz="1400" b="1">
+              <a:rPr sz="1500" b="1">
                 <a:solidFill>
                   <a:srgbClr val="202122"/>
                 </a:solidFill>
@@ -7728,14 +10753,47 @@
       </p:sp>
       <p:sp>
         <p:nvSpPr>
-          <p:cNvPr id="11" name="TextBox 10"/>
-          <p:cNvSpPr txBox="1"/>
-          <p:nvPr/>
-        </p:nvSpPr>
-        <p:spPr>
-          <a:xfrm>
-            <a:off x="1234440" y="3991356"/>
-            <a:ext cx="10408615" cy="1030986"/>
+          <p:cNvPr id="16" name="TextBox 15"/>
+          <p:cNvSpPr txBox="1"/>
+          <p:nvPr/>
+        </p:nvSpPr>
+        <p:spPr>
+          <a:xfrm>
+            <a:off x="8950756" y="1801368"/>
+            <a:ext cx="2509418" cy="512064"/>
+          </a:xfrm>
+          <a:prstGeom prst="rect">
+            <a:avLst/>
+          </a:prstGeom>
+          <a:noFill/>
+        </p:spPr>
+        <p:txBody>
+          <a:bodyPr wrap="square" anchor="ctr" lIns="0" rIns="0" tIns="0" bIns="0"/>
+          <a:lstStyle/>
+          <a:p>
+            <a:pPr algn="l"/>
+            <a:r>
+              <a:rPr sz="1900" b="1" i="0">
+                <a:solidFill>
+                  <a:srgbClr val="03306E"/>
+                </a:solidFill>
+                <a:latin typeface="Calibri"/>
+              </a:rPr>
+              <a:t>Equality</a:t>
+            </a:r>
+          </a:p>
+        </p:txBody>
+      </p:sp>
+      <p:sp>
+        <p:nvSpPr>
+          <p:cNvPr id="17" name="TextBox 16"/>
+          <p:cNvSpPr txBox="1"/>
+          <p:nvPr/>
+        </p:nvSpPr>
+        <p:spPr>
+          <a:xfrm>
+            <a:off x="8356396" y="2468880"/>
+            <a:ext cx="3058058" cy="1143000"/>
           </a:xfrm>
           <a:prstGeom prst="rect">
             <a:avLst/>
@@ -7750,36 +10808,69 @@
             <a:r>
               <a:rPr sz="1800" b="0" i="0">
                 <a:solidFill>
-                  <a:srgbClr val="54595D"/>
-                </a:solidFill>
-                <a:latin typeface="Calibri"/>
-              </a:rPr>
-              <a:t>How many protected characteristics are there?</a:t>
-            </a:r>
-          </a:p>
-          <a:p>
-            <a:r>
-              <a:rPr sz="1800" b="1">
-                <a:solidFill>
-                  <a:srgbClr val="03306E"/>
-                </a:solidFill>
-                <a:latin typeface="Calibri"/>
-              </a:rPr>
-              <a:t>Nine.</a:t>
-            </a:r>
-          </a:p>
-        </p:txBody>
-      </p:sp>
-      <p:sp>
-        <p:nvSpPr>
-          <p:cNvPr id="12" name="Oval 11"/>
+                  <a:srgbClr val="202122"/>
+                </a:solidFill>
+                <a:latin typeface="Calibri"/>
+              </a:rPr>
+              <a:t>Nine protected characteristics; direct and indirect discrimination, harassment, victimisation.</a:t>
+            </a:r>
+          </a:p>
+        </p:txBody>
+      </p:sp>
+      <p:sp>
+        <p:nvSpPr>
+          <p:cNvPr id="18" name="Rounded Rectangle 17"/>
           <p:cNvSpPr/>
           <p:nvPr/>
         </p:nvSpPr>
         <p:spPr>
           <a:xfrm>
-            <a:off x="548640" y="5205221"/>
-            <a:ext cx="411480" cy="411480"/>
+            <a:off x="548640" y="4023360"/>
+            <a:ext cx="3515258" cy="2148840"/>
+          </a:xfrm>
+          <a:prstGeom prst="roundRect">
+            <a:avLst>
+              <a:gd name="adj" fmla="val 6000"/>
+            </a:avLst>
+          </a:prstGeom>
+          <a:solidFill>
+            <a:srgbClr val="EAF3FF"/>
+          </a:solidFill>
+          <a:ln>
+            <a:noFill/>
+          </a:ln>
+          <a:effectLst/>
+        </p:spPr>
+        <p:style>
+          <a:lnRef idx="1">
+            <a:schemeClr val="accent1"/>
+          </a:lnRef>
+          <a:fillRef idx="3">
+            <a:schemeClr val="accent1"/>
+          </a:fillRef>
+          <a:effectRef idx="2">
+            <a:schemeClr val="accent1"/>
+          </a:effectRef>
+          <a:fontRef idx="minor">
+            <a:schemeClr val="lt1"/>
+          </a:fontRef>
+        </p:style>
+        <p:txBody>
+          <a:bodyPr rtlCol="0" anchor="ctr"/>
+          <a:lstStyle/>
+          <a:p/>
+        </p:txBody>
+      </p:sp>
+      <p:sp>
+        <p:nvSpPr>
+          <p:cNvPr id="19" name="Oval 18"/>
+          <p:cNvSpPr/>
+          <p:nvPr/>
+        </p:nvSpPr>
+        <p:spPr>
+          <a:xfrm>
+            <a:off x="777240" y="4251960"/>
+            <a:ext cx="457200" cy="457200"/>
           </a:xfrm>
           <a:prstGeom prst="ellipse">
             <a:avLst/>
@@ -7812,7 +10903,7 @@
           <a:p>
             <a:pPr algn="ctr"/>
             <a:r>
-              <a:rPr sz="1400" b="1">
+              <a:rPr sz="1500" b="1">
                 <a:solidFill>
                   <a:srgbClr val="202122"/>
                 </a:solidFill>
@@ -7825,14 +10916,47 @@
       </p:sp>
       <p:sp>
         <p:nvSpPr>
-          <p:cNvPr id="13" name="TextBox 12"/>
-          <p:cNvSpPr txBox="1"/>
-          <p:nvPr/>
-        </p:nvSpPr>
-        <p:spPr>
-          <a:xfrm>
-            <a:off x="1234440" y="5186933"/>
-            <a:ext cx="10408615" cy="1030986"/>
+          <p:cNvPr id="20" name="TextBox 19"/>
+          <p:cNvSpPr txBox="1"/>
+          <p:nvPr/>
+        </p:nvSpPr>
+        <p:spPr>
+          <a:xfrm>
+            <a:off x="1371600" y="4224528"/>
+            <a:ext cx="2509418" cy="512064"/>
+          </a:xfrm>
+          <a:prstGeom prst="rect">
+            <a:avLst/>
+          </a:prstGeom>
+          <a:noFill/>
+        </p:spPr>
+        <p:txBody>
+          <a:bodyPr wrap="square" anchor="ctr" lIns="0" rIns="0" tIns="0" bIns="0"/>
+          <a:lstStyle/>
+          <a:p>
+            <a:pPr algn="l"/>
+            <a:r>
+              <a:rPr sz="1700" b="1" i="0">
+                <a:solidFill>
+                  <a:srgbClr val="03306E"/>
+                </a:solidFill>
+                <a:latin typeface="Calibri"/>
+              </a:rPr>
+              <a:t>Intellectual property</a:t>
+            </a:r>
+          </a:p>
+        </p:txBody>
+      </p:sp>
+      <p:sp>
+        <p:nvSpPr>
+          <p:cNvPr id="21" name="TextBox 20"/>
+          <p:cNvSpPr txBox="1"/>
+          <p:nvPr/>
+        </p:nvSpPr>
+        <p:spPr>
+          <a:xfrm>
+            <a:off x="777240" y="4892040"/>
+            <a:ext cx="3058058" cy="1143000"/>
           </a:xfrm>
           <a:prstGeom prst="rect">
             <a:avLst/>
@@ -7845,24 +10969,176 @@
           <a:p>
             <a:pPr algn="l"/>
             <a:r>
-              <a:rPr sz="1800" b="0" i="0">
-                <a:solidFill>
-                  <a:srgbClr val="54595D"/>
-                </a:solidFill>
-                <a:latin typeface="Calibri"/>
-              </a:rPr>
-              <a:t>Which standard covers web accessibility?</a:t>
-            </a:r>
-          </a:p>
-          <a:p>
-            <a:r>
-              <a:rPr sz="1800" b="1">
+              <a:rPr sz="2000" b="0" i="0">
+                <a:solidFill>
+                  <a:srgbClr val="202122"/>
+                </a:solidFill>
+                <a:latin typeface="Calibri"/>
+              </a:rPr>
+              <a:t>Unregistered designs, registered designs and patents.</a:t>
+            </a:r>
+          </a:p>
+        </p:txBody>
+      </p:sp>
+      <p:sp>
+        <p:nvSpPr>
+          <p:cNvPr id="22" name="Rounded Rectangle 21"/>
+          <p:cNvSpPr/>
+          <p:nvPr/>
+        </p:nvSpPr>
+        <p:spPr>
+          <a:xfrm>
+            <a:off x="4338218" y="4023360"/>
+            <a:ext cx="3515258" cy="2148840"/>
+          </a:xfrm>
+          <a:prstGeom prst="roundRect">
+            <a:avLst>
+              <a:gd name="adj" fmla="val 6000"/>
+            </a:avLst>
+          </a:prstGeom>
+          <a:solidFill>
+            <a:srgbClr val="EAF3FF"/>
+          </a:solidFill>
+          <a:ln>
+            <a:noFill/>
+          </a:ln>
+          <a:effectLst/>
+        </p:spPr>
+        <p:style>
+          <a:lnRef idx="1">
+            <a:schemeClr val="accent1"/>
+          </a:lnRef>
+          <a:fillRef idx="3">
+            <a:schemeClr val="accent1"/>
+          </a:fillRef>
+          <a:effectRef idx="2">
+            <a:schemeClr val="accent1"/>
+          </a:effectRef>
+          <a:fontRef idx="minor">
+            <a:schemeClr val="lt1"/>
+          </a:fontRef>
+        </p:style>
+        <p:txBody>
+          <a:bodyPr rtlCol="0" anchor="ctr"/>
+          <a:lstStyle/>
+          <a:p/>
+        </p:txBody>
+      </p:sp>
+      <p:sp>
+        <p:nvSpPr>
+          <p:cNvPr id="23" name="Oval 22"/>
+          <p:cNvSpPr/>
+          <p:nvPr/>
+        </p:nvSpPr>
+        <p:spPr>
+          <a:xfrm>
+            <a:off x="4566818" y="4251960"/>
+            <a:ext cx="457200" cy="457200"/>
+          </a:xfrm>
+          <a:prstGeom prst="ellipse">
+            <a:avLst/>
+          </a:prstGeom>
+          <a:solidFill>
+            <a:srgbClr val="F2B705"/>
+          </a:solidFill>
+          <a:ln>
+            <a:noFill/>
+          </a:ln>
+          <a:effectLst/>
+        </p:spPr>
+        <p:style>
+          <a:lnRef idx="1">
+            <a:schemeClr val="accent1"/>
+          </a:lnRef>
+          <a:fillRef idx="3">
+            <a:schemeClr val="accent1"/>
+          </a:fillRef>
+          <a:effectRef idx="2">
+            <a:schemeClr val="accent1"/>
+          </a:effectRef>
+          <a:fontRef idx="minor">
+            <a:schemeClr val="lt1"/>
+          </a:fontRef>
+        </p:style>
+        <p:txBody>
+          <a:bodyPr rtlCol="0" anchor="ctr" lIns="0" rIns="0" tIns="0" bIns="0"/>
+          <a:lstStyle/>
+          <a:p>
+            <a:pPr algn="ctr"/>
+            <a:r>
+              <a:rPr sz="1500" b="1">
+                <a:solidFill>
+                  <a:srgbClr val="202122"/>
+                </a:solidFill>
+                <a:latin typeface="Calibri"/>
+              </a:rPr>
+              <a:t>5</a:t>
+            </a:r>
+          </a:p>
+        </p:txBody>
+      </p:sp>
+      <p:sp>
+        <p:nvSpPr>
+          <p:cNvPr id="24" name="TextBox 23"/>
+          <p:cNvSpPr txBox="1"/>
+          <p:nvPr/>
+        </p:nvSpPr>
+        <p:spPr>
+          <a:xfrm>
+            <a:off x="5161178" y="4224528"/>
+            <a:ext cx="2509418" cy="512064"/>
+          </a:xfrm>
+          <a:prstGeom prst="rect">
+            <a:avLst/>
+          </a:prstGeom>
+          <a:noFill/>
+        </p:spPr>
+        <p:txBody>
+          <a:bodyPr wrap="square" anchor="ctr" lIns="0" rIns="0" tIns="0" bIns="0"/>
+          <a:lstStyle/>
+          <a:p>
+            <a:pPr algn="l"/>
+            <a:r>
+              <a:rPr sz="1900" b="1" i="0">
                 <a:solidFill>
                   <a:srgbClr val="03306E"/>
                 </a:solidFill>
                 <a:latin typeface="Calibri"/>
               </a:rPr>
-              <a:t>WCAG.</a:t>
+              <a:t>International law</a:t>
+            </a:r>
+          </a:p>
+        </p:txBody>
+      </p:sp>
+      <p:sp>
+        <p:nvSpPr>
+          <p:cNvPr id="25" name="TextBox 24"/>
+          <p:cNvSpPr txBox="1"/>
+          <p:nvPr/>
+        </p:nvSpPr>
+        <p:spPr>
+          <a:xfrm>
+            <a:off x="4566818" y="4892040"/>
+            <a:ext cx="3058058" cy="1143000"/>
+          </a:xfrm>
+          <a:prstGeom prst="rect">
+            <a:avLst/>
+          </a:prstGeom>
+          <a:noFill/>
+        </p:spPr>
+        <p:txBody>
+          <a:bodyPr wrap="square" anchor="t" lIns="0" rIns="0" tIns="0" bIns="0"/>
+          <a:lstStyle/>
+          <a:p>
+            <a:pPr algn="l"/>
+            <a:r>
+              <a:rPr sz="2000" b="0" i="0">
+                <a:solidFill>
+                  <a:srgbClr val="202122"/>
+                </a:solidFill>
+                <a:latin typeface="Calibri"/>
+              </a:rPr>
+              <a:t>Some offences cross borders, e.g. in cyberspace and surveillance.</a:t>
             </a:r>
           </a:p>
         </p:txBody>
@@ -7954,7 +11230,7 @@
                 </a:solidFill>
                 <a:latin typeface="Cambria"/>
               </a:rPr>
-              <a:t>Activity: Compliance check</a:t>
+              <a:t>Quick check: Key legislation</a:t>
             </a:r>
           </a:p>
         </p:txBody>
@@ -8027,19 +11303,17 @@
       </p:sp>
       <p:sp>
         <p:nvSpPr>
-          <p:cNvPr id="6" name="Rounded Rectangle 5"/>
+          <p:cNvPr id="6" name="Oval 5"/>
           <p:cNvSpPr/>
           <p:nvPr/>
         </p:nvSpPr>
         <p:spPr>
           <a:xfrm>
-            <a:off x="548640" y="1508760"/>
-            <a:ext cx="2011680" cy="457200"/>
-          </a:xfrm>
-          <a:prstGeom prst="roundRect">
-            <a:avLst>
-              <a:gd name="adj" fmla="val 50000"/>
-            </a:avLst>
+            <a:off x="548640" y="1691640"/>
+            <a:ext cx="502920" cy="502920"/>
+          </a:xfrm>
+          <a:prstGeom prst="ellipse">
+            <a:avLst/>
           </a:prstGeom>
           <a:solidFill>
             <a:srgbClr val="F2B705"/>
@@ -8064,9 +11338,20 @@
           </a:fontRef>
         </p:style>
         <p:txBody>
-          <a:bodyPr rtlCol="0" anchor="ctr"/>
-          <a:lstStyle/>
-          <a:p/>
+          <a:bodyPr rtlCol="0" anchor="ctr" lIns="0" rIns="0" tIns="0" bIns="0"/>
+          <a:lstStyle/>
+          <a:p>
+            <a:pPr algn="ctr"/>
+            <a:r>
+              <a:rPr sz="1600" b="1">
+                <a:solidFill>
+                  <a:srgbClr val="202122"/>
+                </a:solidFill>
+                <a:latin typeface="Calibri"/>
+              </a:rPr>
+              <a:t>1</a:t>
+            </a:r>
+          </a:p>
         </p:txBody>
       </p:sp>
       <p:sp>
@@ -8077,80 +11362,47 @@
         </p:nvSpPr>
         <p:spPr>
           <a:xfrm>
-            <a:off x="548640" y="1508760"/>
-            <a:ext cx="2011680" cy="457200"/>
-          </a:xfrm>
-          <a:prstGeom prst="rect">
-            <a:avLst/>
-          </a:prstGeom>
-          <a:noFill/>
-        </p:spPr>
-        <p:txBody>
-          <a:bodyPr wrap="square" anchor="ctr" lIns="0" rIns="0" tIns="0" bIns="0"/>
-          <a:lstStyle/>
-          <a:p>
-            <a:pPr algn="ctr"/>
-            <a:r>
-              <a:rPr sz="1400" b="1" i="0">
+            <a:off x="1371600" y="1645920"/>
+            <a:ext cx="10271455" cy="1188720"/>
+          </a:xfrm>
+          <a:prstGeom prst="rect">
+            <a:avLst/>
+          </a:prstGeom>
+          <a:noFill/>
+        </p:spPr>
+        <p:txBody>
+          <a:bodyPr wrap="square" anchor="t" lIns="0" rIns="0" tIns="0" bIns="0"/>
+          <a:lstStyle/>
+          <a:p>
+            <a:pPr algn="l"/>
+            <a:r>
+              <a:rPr sz="2400" b="0" i="0">
                 <a:solidFill>
                   <a:srgbClr val="202122"/>
                 </a:solidFill>
                 <a:latin typeface="Calibri"/>
               </a:rPr>
-              <a:t>20 minutes</a:t>
-            </a:r>
-          </a:p>
-        </p:txBody>
-      </p:sp>
-      <p:sp>
-        <p:nvSpPr>
-          <p:cNvPr id="8" name="TextBox 7"/>
-          <p:cNvSpPr txBox="1"/>
-          <p:nvPr/>
-        </p:nvSpPr>
-        <p:spPr>
-          <a:xfrm>
-            <a:off x="2743200" y="1508760"/>
-            <a:ext cx="4754880" cy="457200"/>
-          </a:xfrm>
-          <a:prstGeom prst="rect">
-            <a:avLst/>
-          </a:prstGeom>
-          <a:noFill/>
-        </p:spPr>
-        <p:txBody>
-          <a:bodyPr wrap="square" anchor="ctr" lIns="0" rIns="0" tIns="0" bIns="0"/>
-          <a:lstStyle/>
-          <a:p>
-            <a:pPr algn="l"/>
-            <a:r>
-              <a:rPr sz="1400" b="0" i="1">
-                <a:solidFill>
-                  <a:srgbClr val="54595D"/>
-                </a:solidFill>
-                <a:latin typeface="Calibri"/>
-              </a:rPr>
-              <a:t>Pairs</a:t>
-            </a:r>
-          </a:p>
-        </p:txBody>
-      </p:sp>
-      <p:sp>
-        <p:nvSpPr>
-          <p:cNvPr id="9" name="Oval 8"/>
+              <a:t>Which law covers personal data?</a:t>
+            </a:r>
+          </a:p>
+        </p:txBody>
+      </p:sp>
+      <p:sp>
+        <p:nvSpPr>
+          <p:cNvPr id="8" name="Oval 7"/>
           <p:cNvSpPr/>
           <p:nvPr/>
         </p:nvSpPr>
         <p:spPr>
           <a:xfrm>
-            <a:off x="548640" y="2482596"/>
-            <a:ext cx="384048" cy="384048"/>
+            <a:off x="548640" y="3108960"/>
+            <a:ext cx="502920" cy="502920"/>
           </a:xfrm>
           <a:prstGeom prst="ellipse">
             <a:avLst/>
           </a:prstGeom>
           <a:solidFill>
-            <a:srgbClr val="0645AD"/>
+            <a:srgbClr val="F2B705"/>
           </a:solidFill>
           <a:ln>
             <a:noFill/>
@@ -8177,66 +11429,66 @@
           <a:p>
             <a:pPr algn="ctr"/>
             <a:r>
-              <a:rPr sz="1300" b="1">
-                <a:solidFill>
-                  <a:srgbClr val="FFFFFF"/>
-                </a:solidFill>
-                <a:latin typeface="Calibri"/>
-              </a:rPr>
-              <a:t>1</a:t>
-            </a:r>
-          </a:p>
-        </p:txBody>
-      </p:sp>
-      <p:sp>
-        <p:nvSpPr>
-          <p:cNvPr id="10" name="TextBox 9"/>
-          <p:cNvSpPr txBox="1"/>
-          <p:nvPr/>
-        </p:nvSpPr>
-        <p:spPr>
-          <a:xfrm>
-            <a:off x="1143000" y="2240280"/>
-            <a:ext cx="5943600" cy="868680"/>
-          </a:xfrm>
-          <a:prstGeom prst="rect">
-            <a:avLst/>
-          </a:prstGeom>
-          <a:noFill/>
-        </p:spPr>
-        <p:txBody>
-          <a:bodyPr wrap="square" anchor="ctr" lIns="0" rIns="0" tIns="0" bIns="0"/>
+              <a:rPr sz="1600" b="1">
+                <a:solidFill>
+                  <a:srgbClr val="202122"/>
+                </a:solidFill>
+                <a:latin typeface="Calibri"/>
+              </a:rPr>
+              <a:t>2</a:t>
+            </a:r>
+          </a:p>
+        </p:txBody>
+      </p:sp>
+      <p:sp>
+        <p:nvSpPr>
+          <p:cNvPr id="9" name="TextBox 8"/>
+          <p:cNvSpPr txBox="1"/>
+          <p:nvPr/>
+        </p:nvSpPr>
+        <p:spPr>
+          <a:xfrm>
+            <a:off x="1371600" y="3063240"/>
+            <a:ext cx="10271455" cy="1188720"/>
+          </a:xfrm>
+          <a:prstGeom prst="rect">
+            <a:avLst/>
+          </a:prstGeom>
+          <a:noFill/>
+        </p:spPr>
+        <p:txBody>
+          <a:bodyPr wrap="square" anchor="t" lIns="0" rIns="0" tIns="0" bIns="0"/>
           <a:lstStyle/>
           <a:p>
             <a:pPr algn="l"/>
             <a:r>
-              <a:rPr sz="1700" b="0" i="0">
+              <a:rPr sz="2400" b="0" i="0">
                 <a:solidFill>
                   <a:srgbClr val="202122"/>
                 </a:solidFill>
                 <a:latin typeface="Calibri"/>
               </a:rPr>
-              <a:t>Review a feature list for a new fitness app from your teacher.</a:t>
-            </a:r>
-          </a:p>
-        </p:txBody>
-      </p:sp>
-      <p:sp>
-        <p:nvSpPr>
-          <p:cNvPr id="11" name="Oval 10"/>
+              <a:t>What does the Computer Misuse Act make illegal?</a:t>
+            </a:r>
+          </a:p>
+        </p:txBody>
+      </p:sp>
+      <p:sp>
+        <p:nvSpPr>
+          <p:cNvPr id="10" name="Oval 9"/>
           <p:cNvSpPr/>
           <p:nvPr/>
         </p:nvSpPr>
         <p:spPr>
           <a:xfrm>
-            <a:off x="548640" y="3461004"/>
-            <a:ext cx="384048" cy="384048"/>
+            <a:off x="548640" y="4526280"/>
+            <a:ext cx="502920" cy="502920"/>
           </a:xfrm>
           <a:prstGeom prst="ellipse">
             <a:avLst/>
           </a:prstGeom>
           <a:solidFill>
-            <a:srgbClr val="0645AD"/>
+            <a:srgbClr val="F2B705"/>
           </a:solidFill>
           <a:ln>
             <a:noFill/>
@@ -8263,13 +11515,46 @@
           <a:p>
             <a:pPr algn="ctr"/>
             <a:r>
-              <a:rPr sz="1300" b="1">
-                <a:solidFill>
-                  <a:srgbClr val="FFFFFF"/>
-                </a:solidFill>
-                <a:latin typeface="Calibri"/>
-              </a:rPr>
-              <a:t>2</a:t>
+              <a:rPr sz="1600" b="1">
+                <a:solidFill>
+                  <a:srgbClr val="202122"/>
+                </a:solidFill>
+                <a:latin typeface="Calibri"/>
+              </a:rPr>
+              <a:t>3</a:t>
+            </a:r>
+          </a:p>
+        </p:txBody>
+      </p:sp>
+      <p:sp>
+        <p:nvSpPr>
+          <p:cNvPr id="11" name="TextBox 10"/>
+          <p:cNvSpPr txBox="1"/>
+          <p:nvPr/>
+        </p:nvSpPr>
+        <p:spPr>
+          <a:xfrm>
+            <a:off x="1371600" y="4480560"/>
+            <a:ext cx="10271455" cy="1188720"/>
+          </a:xfrm>
+          <a:prstGeom prst="rect">
+            <a:avLst/>
+          </a:prstGeom>
+          <a:noFill/>
+        </p:spPr>
+        <p:txBody>
+          <a:bodyPr wrap="square" anchor="t" lIns="0" rIns="0" tIns="0" bIns="0"/>
+          <a:lstStyle/>
+          <a:p>
+            <a:pPr algn="l"/>
+            <a:r>
+              <a:rPr sz="2400" b="0" i="0">
+                <a:solidFill>
+                  <a:srgbClr val="202122"/>
+                </a:solidFill>
+                <a:latin typeface="Calibri"/>
+              </a:rPr>
+              <a:t>How many protected characteristics are there?</a:t>
             </a:r>
           </a:p>
         </p:txBody>
@@ -8282,362 +11567,27 @@
         </p:nvSpPr>
         <p:spPr>
           <a:xfrm>
-            <a:off x="1143000" y="3218688"/>
-            <a:ext cx="5943600" cy="868680"/>
-          </a:xfrm>
-          <a:prstGeom prst="rect">
-            <a:avLst/>
-          </a:prstGeom>
-          <a:noFill/>
-        </p:spPr>
-        <p:txBody>
-          <a:bodyPr wrap="square" anchor="ctr" lIns="0" rIns="0" tIns="0" bIns="0"/>
+            <a:off x="548640" y="5852160"/>
+            <a:ext cx="11094415" cy="365760"/>
+          </a:xfrm>
+          <a:prstGeom prst="rect">
+            <a:avLst/>
+          </a:prstGeom>
+          <a:noFill/>
+        </p:spPr>
+        <p:txBody>
+          <a:bodyPr wrap="square" anchor="t" lIns="0" rIns="0" tIns="0" bIns="0"/>
           <a:lstStyle/>
           <a:p>
             <a:pPr algn="l"/>
             <a:r>
-              <a:rPr sz="1700" b="0" i="0">
-                <a:solidFill>
-                  <a:srgbClr val="202122"/>
-                </a:solidFill>
-                <a:latin typeface="Calibri"/>
-              </a:rPr>
-              <a:t>Flag every feature that raises a legal or ethical issue.</a:t>
-            </a:r>
-          </a:p>
-        </p:txBody>
-      </p:sp>
-      <p:sp>
-        <p:nvSpPr>
-          <p:cNvPr id="13" name="Oval 12"/>
-          <p:cNvSpPr/>
-          <p:nvPr/>
-        </p:nvSpPr>
-        <p:spPr>
-          <a:xfrm>
-            <a:off x="548640" y="4439412"/>
-            <a:ext cx="384048" cy="384048"/>
-          </a:xfrm>
-          <a:prstGeom prst="ellipse">
-            <a:avLst/>
-          </a:prstGeom>
-          <a:solidFill>
-            <a:srgbClr val="0645AD"/>
-          </a:solidFill>
-          <a:ln>
-            <a:noFill/>
-          </a:ln>
-          <a:effectLst/>
-        </p:spPr>
-        <p:style>
-          <a:lnRef idx="1">
-            <a:schemeClr val="accent1"/>
-          </a:lnRef>
-          <a:fillRef idx="3">
-            <a:schemeClr val="accent1"/>
-          </a:fillRef>
-          <a:effectRef idx="2">
-            <a:schemeClr val="accent1"/>
-          </a:effectRef>
-          <a:fontRef idx="minor">
-            <a:schemeClr val="lt1"/>
-          </a:fontRef>
-        </p:style>
-        <p:txBody>
-          <a:bodyPr rtlCol="0" anchor="ctr" lIns="0" rIns="0" tIns="0" bIns="0"/>
-          <a:lstStyle/>
-          <a:p>
-            <a:pPr algn="ctr"/>
-            <a:r>
-              <a:rPr sz="1300" b="1">
-                <a:solidFill>
-                  <a:srgbClr val="FFFFFF"/>
-                </a:solidFill>
-                <a:latin typeface="Calibri"/>
-              </a:rPr>
-              <a:t>3</a:t>
-            </a:r>
-          </a:p>
-        </p:txBody>
-      </p:sp>
-      <p:sp>
-        <p:nvSpPr>
-          <p:cNvPr id="14" name="TextBox 13"/>
-          <p:cNvSpPr txBox="1"/>
-          <p:nvPr/>
-        </p:nvSpPr>
-        <p:spPr>
-          <a:xfrm>
-            <a:off x="1143000" y="4197096"/>
-            <a:ext cx="5943600" cy="868680"/>
-          </a:xfrm>
-          <a:prstGeom prst="rect">
-            <a:avLst/>
-          </a:prstGeom>
-          <a:noFill/>
-        </p:spPr>
-        <p:txBody>
-          <a:bodyPr wrap="square" anchor="ctr" lIns="0" rIns="0" tIns="0" bIns="0"/>
-          <a:lstStyle/>
-          <a:p>
-            <a:pPr algn="l"/>
-            <a:r>
-              <a:rPr sz="1700" b="0" i="0">
-                <a:solidFill>
-                  <a:srgbClr val="202122"/>
-                </a:solidFill>
-                <a:latin typeface="Calibri"/>
-              </a:rPr>
-              <a:t>Name the law or guideline involved.</a:t>
-            </a:r>
-          </a:p>
-        </p:txBody>
-      </p:sp>
-      <p:sp>
-        <p:nvSpPr>
-          <p:cNvPr id="15" name="Oval 14"/>
-          <p:cNvSpPr/>
-          <p:nvPr/>
-        </p:nvSpPr>
-        <p:spPr>
-          <a:xfrm>
-            <a:off x="548640" y="5417820"/>
-            <a:ext cx="384048" cy="384048"/>
-          </a:xfrm>
-          <a:prstGeom prst="ellipse">
-            <a:avLst/>
-          </a:prstGeom>
-          <a:solidFill>
-            <a:srgbClr val="0645AD"/>
-          </a:solidFill>
-          <a:ln>
-            <a:noFill/>
-          </a:ln>
-          <a:effectLst/>
-        </p:spPr>
-        <p:style>
-          <a:lnRef idx="1">
-            <a:schemeClr val="accent1"/>
-          </a:lnRef>
-          <a:fillRef idx="3">
-            <a:schemeClr val="accent1"/>
-          </a:fillRef>
-          <a:effectRef idx="2">
-            <a:schemeClr val="accent1"/>
-          </a:effectRef>
-          <a:fontRef idx="minor">
-            <a:schemeClr val="lt1"/>
-          </a:fontRef>
-        </p:style>
-        <p:txBody>
-          <a:bodyPr rtlCol="0" anchor="ctr" lIns="0" rIns="0" tIns="0" bIns="0"/>
-          <a:lstStyle/>
-          <a:p>
-            <a:pPr algn="ctr"/>
-            <a:r>
-              <a:rPr sz="1300" b="1">
-                <a:solidFill>
-                  <a:srgbClr val="FFFFFF"/>
-                </a:solidFill>
-                <a:latin typeface="Calibri"/>
-              </a:rPr>
-              <a:t>4</a:t>
-            </a:r>
-          </a:p>
-        </p:txBody>
-      </p:sp>
-      <p:sp>
-        <p:nvSpPr>
-          <p:cNvPr id="16" name="TextBox 15"/>
-          <p:cNvSpPr txBox="1"/>
-          <p:nvPr/>
-        </p:nvSpPr>
-        <p:spPr>
-          <a:xfrm>
-            <a:off x="1143000" y="5175504"/>
-            <a:ext cx="5943600" cy="868680"/>
-          </a:xfrm>
-          <a:prstGeom prst="rect">
-            <a:avLst/>
-          </a:prstGeom>
-          <a:noFill/>
-        </p:spPr>
-        <p:txBody>
-          <a:bodyPr wrap="square" anchor="ctr" lIns="0" rIns="0" tIns="0" bIns="0"/>
-          <a:lstStyle/>
-          <a:p>
-            <a:pPr algn="l"/>
-            <a:r>
-              <a:rPr sz="1700" b="0" i="0">
-                <a:solidFill>
-                  <a:srgbClr val="202122"/>
-                </a:solidFill>
-                <a:latin typeface="Calibri"/>
-              </a:rPr>
-              <a:t>Suggest a compliant alternative.</a:t>
-            </a:r>
-          </a:p>
-        </p:txBody>
-      </p:sp>
-      <p:sp>
-        <p:nvSpPr>
-          <p:cNvPr id="17" name="Rounded Rectangle 16"/>
-          <p:cNvSpPr/>
-          <p:nvPr/>
-        </p:nvSpPr>
-        <p:spPr>
-          <a:xfrm>
-            <a:off x="7772400" y="1508760"/>
-            <a:ext cx="3867912" cy="4572000"/>
-          </a:xfrm>
-          <a:prstGeom prst="roundRect">
-            <a:avLst>
-              <a:gd name="adj" fmla="val 8000"/>
-            </a:avLst>
-          </a:prstGeom>
-          <a:solidFill>
-            <a:srgbClr val="EAF3FF"/>
-          </a:solidFill>
-          <a:ln>
-            <a:noFill/>
-          </a:ln>
-          <a:effectLst/>
-        </p:spPr>
-        <p:style>
-          <a:lnRef idx="1">
-            <a:schemeClr val="accent1"/>
-          </a:lnRef>
-          <a:fillRef idx="3">
-            <a:schemeClr val="accent1"/>
-          </a:fillRef>
-          <a:effectRef idx="2">
-            <a:schemeClr val="accent1"/>
-          </a:effectRef>
-          <a:fontRef idx="minor">
-            <a:schemeClr val="lt1"/>
-          </a:fontRef>
-        </p:style>
-        <p:txBody>
-          <a:bodyPr rtlCol="0" anchor="ctr"/>
-          <a:lstStyle/>
-          <a:p/>
-        </p:txBody>
-      </p:sp>
-      <p:sp>
-        <p:nvSpPr>
-          <p:cNvPr id="18" name="TextBox 17"/>
-          <p:cNvSpPr txBox="1"/>
-          <p:nvPr/>
-        </p:nvSpPr>
-        <p:spPr>
-          <a:xfrm>
-            <a:off x="8046720" y="1737360"/>
-            <a:ext cx="3291840" cy="365760"/>
-          </a:xfrm>
-          <a:prstGeom prst="rect">
-            <a:avLst/>
-          </a:prstGeom>
-          <a:noFill/>
-        </p:spPr>
-        <p:txBody>
-          <a:bodyPr wrap="square" anchor="t" lIns="0" rIns="0" tIns="0" bIns="0"/>
-          <a:lstStyle/>
-          <a:p>
-            <a:pPr algn="l"/>
-            <a:r>
-              <a:rPr sz="1300" b="1" i="0">
-                <a:solidFill>
-                  <a:srgbClr val="0645AD"/>
-                </a:solidFill>
-                <a:latin typeface="Calibri"/>
-              </a:rPr>
-              <a:t>SUCCESS CRITERIA</a:t>
-            </a:r>
-          </a:p>
-        </p:txBody>
-      </p:sp>
-      <p:sp>
-        <p:nvSpPr>
-          <p:cNvPr id="19" name="TextBox 18"/>
-          <p:cNvSpPr txBox="1"/>
-          <p:nvPr/>
-        </p:nvSpPr>
-        <p:spPr>
-          <a:xfrm>
-            <a:off x="8046720" y="2240280"/>
-            <a:ext cx="3337560" cy="3657600"/>
-          </a:xfrm>
-          <a:prstGeom prst="rect">
-            <a:avLst/>
-          </a:prstGeom>
-          <a:noFill/>
-        </p:spPr>
-        <p:txBody>
-          <a:bodyPr wrap="square" lIns="0" rIns="0" tIns="0" bIns="0">
-            <a:spAutoFit/>
-          </a:bodyPr>
-          <a:lstStyle/>
-          <a:p>
-            <a:pPr marL="274320" indent="-274320">
-              <a:spcAft>
-                <a:spcPts val="810"/>
-              </a:spcAft>
-              <a:buClr>
-                <a:srgbClr val="0645AD"/>
-              </a:buClr>
-              <a:buFont typeface="Arial"/>
-              <a:buChar char="•"/>
-            </a:pPr>
-            <a:r>
-              <a:rPr sz="1800" b="0">
-                <a:solidFill>
-                  <a:srgbClr val="202122"/>
-                </a:solidFill>
-                <a:latin typeface="Calibri"/>
-              </a:rPr>
-              <a:t>Data protection issues identified</a:t>
-            </a:r>
-          </a:p>
-          <a:p>
-            <a:pPr marL="274320" indent="-274320">
-              <a:spcAft>
-                <a:spcPts val="810"/>
-              </a:spcAft>
-              <a:buClr>
-                <a:srgbClr val="0645AD"/>
-              </a:buClr>
-              <a:buFont typeface="Arial"/>
-              <a:buChar char="•"/>
-            </a:pPr>
-            <a:r>
-              <a:rPr sz="1800" b="0">
-                <a:solidFill>
-                  <a:srgbClr val="202122"/>
-                </a:solidFill>
-                <a:latin typeface="Calibri"/>
-              </a:rPr>
-              <a:t>Accessibility considered</a:t>
-            </a:r>
-          </a:p>
-          <a:p>
-            <a:pPr marL="274320" indent="-274320">
-              <a:spcAft>
-                <a:spcPts val="810"/>
-              </a:spcAft>
-              <a:buClr>
-                <a:srgbClr val="0645AD"/>
-              </a:buClr>
-              <a:buFont typeface="Arial"/>
-              <a:buChar char="•"/>
-            </a:pPr>
-            <a:r>
-              <a:rPr sz="1800" b="0">
-                <a:solidFill>
-                  <a:srgbClr val="202122"/>
-                </a:solidFill>
-                <a:latin typeface="Calibri"/>
-              </a:rPr>
-              <a:t>Alternatives are practical</a:t>
+              <a:rPr sz="1300" b="0" i="1">
+                <a:solidFill>
+                  <a:srgbClr val="54595D"/>
+                </a:solidFill>
+                <a:latin typeface="Calibri"/>
+              </a:rPr>
+              <a:t>Answer on mini whiteboards or in your book. Answers are in the speaker notes.</a:t>
             </a:r>
           </a:p>
         </p:txBody>
@@ -8656,7 +11606,7 @@
     <p:bg>
       <p:bgPr>
         <a:solidFill>
-          <a:srgbClr val="03306E"/>
+          <a:srgbClr val="FFFFFF"/>
         </a:solidFill>
         <a:effectLst/>
       </p:bgPr>
@@ -8692,7 +11642,7 @@
             <a:r>
               <a:rPr sz="1100" b="1" i="0">
                 <a:solidFill>
-                  <a:srgbClr val="A9C8F0"/>
+                  <a:srgbClr val="54595D"/>
                 </a:solidFill>
                 <a:latin typeface="Calibri"/>
               </a:rPr>
@@ -8725,25 +11675,222 @@
             <a:r>
               <a:rPr sz="3200" b="1" i="0">
                 <a:solidFill>
-                  <a:srgbClr val="FFFFFF"/>
+                  <a:srgbClr val="03306E"/>
                 </a:solidFill>
                 <a:latin typeface="Cambria"/>
               </a:rPr>
-              <a:t>Exit ticket</a:t>
-            </a:r>
-          </a:p>
-        </p:txBody>
-      </p:sp>
-      <p:sp>
-        <p:nvSpPr>
-          <p:cNvPr id="4" name="Oval 3"/>
+              <a:t>Guidelines</a:t>
+            </a:r>
+          </a:p>
+        </p:txBody>
+      </p:sp>
+      <p:sp>
+        <p:nvSpPr>
+          <p:cNvPr id="4" name="TextBox 3"/>
+          <p:cNvSpPr txBox="1"/>
+          <p:nvPr/>
+        </p:nvSpPr>
+        <p:spPr>
+          <a:xfrm>
+            <a:off x="548640" y="6446520"/>
+            <a:ext cx="8229600" cy="274320"/>
+          </a:xfrm>
+          <a:prstGeom prst="rect">
+            <a:avLst/>
+          </a:prstGeom>
+          <a:noFill/>
+        </p:spPr>
+        <p:txBody>
+          <a:bodyPr wrap="square" anchor="t" lIns="0" rIns="0" tIns="0" bIns="0"/>
+          <a:lstStyle/>
+          <a:p>
+            <a:pPr algn="l"/>
+            <a:r>
+              <a:rPr sz="1000" b="0" i="0">
+                <a:solidFill>
+                  <a:srgbClr val="54595D"/>
+                </a:solidFill>
+                <a:latin typeface="Calibri"/>
+              </a:rPr>
+              <a:t>Digital Software Development T Level  ·  Legislation and Guidelines</a:t>
+            </a:r>
+          </a:p>
+        </p:txBody>
+      </p:sp>
+      <p:sp>
+        <p:nvSpPr>
+          <p:cNvPr id="5" name="TextBox 4"/>
+          <p:cNvSpPr txBox="1"/>
+          <p:nvPr/>
+        </p:nvSpPr>
+        <p:spPr>
+          <a:xfrm>
+            <a:off x="10728655" y="6446520"/>
+            <a:ext cx="914400" cy="274320"/>
+          </a:xfrm>
+          <a:prstGeom prst="rect">
+            <a:avLst/>
+          </a:prstGeom>
+          <a:noFill/>
+        </p:spPr>
+        <p:txBody>
+          <a:bodyPr wrap="square" anchor="t" lIns="0" rIns="0" tIns="0" bIns="0"/>
+          <a:lstStyle/>
+          <a:p>
+            <a:pPr algn="r"/>
+            <a:r>
+              <a:rPr sz="1000" b="0" i="0">
+                <a:solidFill>
+                  <a:srgbClr val="54595D"/>
+                </a:solidFill>
+                <a:latin typeface="Calibri"/>
+              </a:rPr>
+              <a:t>9</a:t>
+            </a:r>
+          </a:p>
+        </p:txBody>
+      </p:sp>
+      <p:sp>
+        <p:nvSpPr>
+          <p:cNvPr id="6" name="TextBox 5"/>
+          <p:cNvSpPr txBox="1"/>
+          <p:nvPr/>
+        </p:nvSpPr>
+        <p:spPr>
+          <a:xfrm>
+            <a:off x="548640" y="1554480"/>
+            <a:ext cx="6720840" cy="4617720"/>
+          </a:xfrm>
+          <a:prstGeom prst="rect">
+            <a:avLst/>
+          </a:prstGeom>
+          <a:noFill/>
+        </p:spPr>
+        <p:txBody>
+          <a:bodyPr wrap="square" lIns="0" rIns="0" tIns="0" bIns="0">
+            <a:spAutoFit/>
+          </a:bodyPr>
+          <a:lstStyle/>
+          <a:p>
+            <a:pPr>
+              <a:spcAft>
+                <a:spcPts val="1140"/>
+              </a:spcAft>
+            </a:pPr>
+            <a:r>
+              <a:rPr sz="1900" b="0">
+                <a:solidFill>
+                  <a:srgbClr val="202122"/>
+                </a:solidFill>
+                <a:latin typeface="Calibri"/>
+              </a:rPr>
+              <a:t>Beyond the law, guidelines describe professional practice.</a:t>
+            </a:r>
+          </a:p>
+          <a:p>
+            <a:pPr>
+              <a:spcAft>
+                <a:spcPts val="1140"/>
+              </a:spcAft>
+            </a:pPr>
+            <a:r>
+              <a:rPr sz="1900" b="0">
+                <a:solidFill>
+                  <a:srgbClr val="202122"/>
+                </a:solidFill>
+                <a:latin typeface="Calibri"/>
+              </a:rPr>
+              <a:t>Codes of conduct from employers, professional bodies such as BCS, the Institution of Analysts and Programmers and CIISec, and government expect you to follow policy and law, minimise risk to the public, work with competence and integrity, meet deadlines and keep confidentiality.</a:t>
+            </a:r>
+          </a:p>
+          <a:p>
+            <a:pPr>
+              <a:spcAft>
+                <a:spcPts val="1140"/>
+              </a:spcAft>
+            </a:pPr>
+            <a:r>
+              <a:rPr sz="1900" b="0">
+                <a:solidFill>
+                  <a:srgbClr val="202122"/>
+                </a:solidFill>
+                <a:latin typeface="Calibri"/>
+              </a:rPr>
+              <a:t>Industry standards include ISO, WCAG (web accessibility), W3C and IETF (web and internet), BS, IEEE and PCI SSC (card payments).</a:t>
+            </a:r>
+          </a:p>
+          <a:p>
+            <a:pPr>
+              <a:spcAft>
+                <a:spcPts val="1140"/>
+              </a:spcAft>
+            </a:pPr>
+            <a:r>
+              <a:rPr sz="1900" b="0">
+                <a:solidFill>
+                  <a:srgbClr val="202122"/>
+                </a:solidFill>
+                <a:latin typeface="Calibri"/>
+              </a:rPr>
+              <a:t>Acceptable use policies set rules for using IT, and whistleblowing procedures let staff report wrongdoing safely.</a:t>
+            </a:r>
+          </a:p>
+        </p:txBody>
+      </p:sp>
+      <p:sp>
+        <p:nvSpPr>
+          <p:cNvPr id="7" name="Rounded Rectangle 6"/>
           <p:cNvSpPr/>
           <p:nvPr/>
         </p:nvSpPr>
         <p:spPr>
           <a:xfrm>
-            <a:off x="548640" y="1737360"/>
-            <a:ext cx="502920" cy="502920"/>
+            <a:off x="7772400" y="1554480"/>
+            <a:ext cx="3867912" cy="4526280"/>
+          </a:xfrm>
+          <a:prstGeom prst="roundRect">
+            <a:avLst>
+              <a:gd name="adj" fmla="val 8000"/>
+            </a:avLst>
+          </a:prstGeom>
+          <a:solidFill>
+            <a:srgbClr val="03306E"/>
+          </a:solidFill>
+          <a:ln>
+            <a:noFill/>
+          </a:ln>
+          <a:effectLst/>
+        </p:spPr>
+        <p:style>
+          <a:lnRef idx="1">
+            <a:schemeClr val="accent1"/>
+          </a:lnRef>
+          <a:fillRef idx="3">
+            <a:schemeClr val="accent1"/>
+          </a:fillRef>
+          <a:effectRef idx="2">
+            <a:schemeClr val="accent1"/>
+          </a:effectRef>
+          <a:fontRef idx="minor">
+            <a:schemeClr val="lt1"/>
+          </a:fontRef>
+        </p:style>
+        <p:txBody>
+          <a:bodyPr rtlCol="0" anchor="ctr"/>
+          <a:lstStyle/>
+          <a:p/>
+        </p:txBody>
+      </p:sp>
+      <p:sp>
+        <p:nvSpPr>
+          <p:cNvPr id="8" name="Oval 7"/>
+          <p:cNvSpPr/>
+          <p:nvPr/>
+        </p:nvSpPr>
+        <p:spPr>
+          <a:xfrm>
+            <a:off x="8046720" y="1828800"/>
+            <a:ext cx="548640" cy="548640"/>
           </a:xfrm>
           <a:prstGeom prst="ellipse">
             <a:avLst/>
@@ -8776,394 +11923,79 @@
           <a:p>
             <a:pPr algn="ctr"/>
             <a:r>
-              <a:rPr sz="1700" b="1">
+              <a:rPr sz="1300" b="1">
                 <a:solidFill>
                   <a:srgbClr val="202122"/>
                 </a:solidFill>
                 <a:latin typeface="Calibri"/>
               </a:rPr>
-              <a:t>1</a:t>
-            </a:r>
-          </a:p>
-        </p:txBody>
-      </p:sp>
-      <p:sp>
-        <p:nvSpPr>
-          <p:cNvPr id="5" name="TextBox 4"/>
-          <p:cNvSpPr txBox="1"/>
-          <p:nvPr/>
-        </p:nvSpPr>
-        <p:spPr>
-          <a:xfrm>
-            <a:off x="1325880" y="1645920"/>
-            <a:ext cx="6583680" cy="822960"/>
-          </a:xfrm>
-          <a:prstGeom prst="rect">
-            <a:avLst/>
-          </a:prstGeom>
-          <a:noFill/>
-        </p:spPr>
-        <p:txBody>
-          <a:bodyPr wrap="square" anchor="ctr" lIns="0" rIns="0" tIns="0" bIns="0"/>
+              <a:t>e.g.</a:t>
+            </a:r>
+          </a:p>
+        </p:txBody>
+      </p:sp>
+      <p:sp>
+        <p:nvSpPr>
+          <p:cNvPr id="9" name="TextBox 8"/>
+          <p:cNvSpPr txBox="1"/>
+          <p:nvPr/>
+        </p:nvSpPr>
+        <p:spPr>
+          <a:xfrm>
+            <a:off x="8046720" y="2560320"/>
+            <a:ext cx="3291840" cy="365760"/>
+          </a:xfrm>
+          <a:prstGeom prst="rect">
+            <a:avLst/>
+          </a:prstGeom>
+          <a:noFill/>
+        </p:spPr>
+        <p:txBody>
+          <a:bodyPr wrap="square" anchor="t" lIns="0" rIns="0" tIns="0" bIns="0"/>
           <a:lstStyle/>
           <a:p>
             <a:pPr algn="l"/>
             <a:r>
-              <a:rPr sz="2000" b="0" i="0">
+              <a:rPr sz="1300" b="1" i="0">
+                <a:solidFill>
+                  <a:srgbClr val="A9C8F0"/>
+                </a:solidFill>
+                <a:latin typeface="Calibri"/>
+              </a:rPr>
+              <a:t>EXAMPLE</a:t>
+            </a:r>
+          </a:p>
+        </p:txBody>
+      </p:sp>
+      <p:sp>
+        <p:nvSpPr>
+          <p:cNvPr id="10" name="TextBox 9"/>
+          <p:cNvSpPr txBox="1"/>
+          <p:nvPr/>
+        </p:nvSpPr>
+        <p:spPr>
+          <a:xfrm>
+            <a:off x="8046720" y="2971800"/>
+            <a:ext cx="3291840" cy="2971800"/>
+          </a:xfrm>
+          <a:prstGeom prst="rect">
+            <a:avLst/>
+          </a:prstGeom>
+          <a:noFill/>
+        </p:spPr>
+        <p:txBody>
+          <a:bodyPr wrap="square" anchor="t" lIns="0" rIns="0" tIns="0" bIns="0"/>
+          <a:lstStyle/>
+          <a:p>
+            <a:pPr algn="l"/>
+            <a:r>
+              <a:rPr sz="1900" b="0" i="0">
                 <a:solidFill>
                   <a:srgbClr val="FFFFFF"/>
                 </a:solidFill>
-                <a:latin typeface="Calibri"/>
-              </a:rPr>
-              <a:t>Why must developers know data protection law?</a:t>
-            </a:r>
-          </a:p>
-        </p:txBody>
-      </p:sp>
-      <p:sp>
-        <p:nvSpPr>
-          <p:cNvPr id="6" name="Oval 5"/>
-          <p:cNvSpPr/>
-          <p:nvPr/>
-        </p:nvSpPr>
-        <p:spPr>
-          <a:xfrm>
-            <a:off x="548640" y="2697480"/>
-            <a:ext cx="502920" cy="502920"/>
-          </a:xfrm>
-          <a:prstGeom prst="ellipse">
-            <a:avLst/>
-          </a:prstGeom>
-          <a:solidFill>
-            <a:srgbClr val="F2B705"/>
-          </a:solidFill>
-          <a:ln>
-            <a:noFill/>
-          </a:ln>
-          <a:effectLst/>
-        </p:spPr>
-        <p:style>
-          <a:lnRef idx="1">
-            <a:schemeClr val="accent1"/>
-          </a:lnRef>
-          <a:fillRef idx="3">
-            <a:schemeClr val="accent1"/>
-          </a:fillRef>
-          <a:effectRef idx="2">
-            <a:schemeClr val="accent1"/>
-          </a:effectRef>
-          <a:fontRef idx="minor">
-            <a:schemeClr val="lt1"/>
-          </a:fontRef>
-        </p:style>
-        <p:txBody>
-          <a:bodyPr rtlCol="0" anchor="ctr" lIns="0" rIns="0" tIns="0" bIns="0"/>
-          <a:lstStyle/>
-          <a:p>
-            <a:pPr algn="ctr"/>
-            <a:r>
-              <a:rPr sz="1700" b="1">
-                <a:solidFill>
-                  <a:srgbClr val="202122"/>
-                </a:solidFill>
-                <a:latin typeface="Calibri"/>
-              </a:rPr>
-              <a:t>2</a:t>
-            </a:r>
-          </a:p>
-        </p:txBody>
-      </p:sp>
-      <p:sp>
-        <p:nvSpPr>
-          <p:cNvPr id="7" name="TextBox 6"/>
-          <p:cNvSpPr txBox="1"/>
-          <p:nvPr/>
-        </p:nvSpPr>
-        <p:spPr>
-          <a:xfrm>
-            <a:off x="1325880" y="2606040"/>
-            <a:ext cx="6583680" cy="822960"/>
-          </a:xfrm>
-          <a:prstGeom prst="rect">
-            <a:avLst/>
-          </a:prstGeom>
-          <a:noFill/>
-        </p:spPr>
-        <p:txBody>
-          <a:bodyPr wrap="square" anchor="ctr" lIns="0" rIns="0" tIns="0" bIns="0"/>
-          <a:lstStyle/>
-          <a:p>
-            <a:pPr algn="l"/>
-            <a:r>
-              <a:rPr sz="2000" b="0" i="0">
-                <a:solidFill>
-                  <a:srgbClr val="FFFFFF"/>
-                </a:solidFill>
-                <a:latin typeface="Calibri"/>
-              </a:rPr>
-              <a:t>What is an acceptable use policy for?</a:t>
-            </a:r>
-          </a:p>
-        </p:txBody>
-      </p:sp>
-      <p:sp>
-        <p:nvSpPr>
-          <p:cNvPr id="8" name="Oval 7"/>
-          <p:cNvSpPr/>
-          <p:nvPr/>
-        </p:nvSpPr>
-        <p:spPr>
-          <a:xfrm>
-            <a:off x="548640" y="3657600"/>
-            <a:ext cx="502920" cy="502920"/>
-          </a:xfrm>
-          <a:prstGeom prst="ellipse">
-            <a:avLst/>
-          </a:prstGeom>
-          <a:solidFill>
-            <a:srgbClr val="F2B705"/>
-          </a:solidFill>
-          <a:ln>
-            <a:noFill/>
-          </a:ln>
-          <a:effectLst/>
-        </p:spPr>
-        <p:style>
-          <a:lnRef idx="1">
-            <a:schemeClr val="accent1"/>
-          </a:lnRef>
-          <a:fillRef idx="3">
-            <a:schemeClr val="accent1"/>
-          </a:fillRef>
-          <a:effectRef idx="2">
-            <a:schemeClr val="accent1"/>
-          </a:effectRef>
-          <a:fontRef idx="minor">
-            <a:schemeClr val="lt1"/>
-          </a:fontRef>
-        </p:style>
-        <p:txBody>
-          <a:bodyPr rtlCol="0" anchor="ctr" lIns="0" rIns="0" tIns="0" bIns="0"/>
-          <a:lstStyle/>
-          <a:p>
-            <a:pPr algn="ctr"/>
-            <a:r>
-              <a:rPr sz="1700" b="1">
-                <a:solidFill>
-                  <a:srgbClr val="202122"/>
-                </a:solidFill>
-                <a:latin typeface="Calibri"/>
-              </a:rPr>
-              <a:t>3</a:t>
-            </a:r>
-          </a:p>
-        </p:txBody>
-      </p:sp>
-      <p:sp>
-        <p:nvSpPr>
-          <p:cNvPr id="9" name="TextBox 8"/>
-          <p:cNvSpPr txBox="1"/>
-          <p:nvPr/>
-        </p:nvSpPr>
-        <p:spPr>
-          <a:xfrm>
-            <a:off x="1325880" y="3566160"/>
-            <a:ext cx="6583680" cy="822960"/>
-          </a:xfrm>
-          <a:prstGeom prst="rect">
-            <a:avLst/>
-          </a:prstGeom>
-          <a:noFill/>
-        </p:spPr>
-        <p:txBody>
-          <a:bodyPr wrap="square" anchor="ctr" lIns="0" rIns="0" tIns="0" bIns="0"/>
-          <a:lstStyle/>
-          <a:p>
-            <a:pPr algn="l"/>
-            <a:r>
-              <a:rPr sz="2000" b="0" i="0">
-                <a:solidFill>
-                  <a:srgbClr val="FFFFFF"/>
-                </a:solidFill>
-                <a:latin typeface="Calibri"/>
-              </a:rPr>
-              <a:t>Why is whistleblowing protected?</a:t>
-            </a:r>
-          </a:p>
-        </p:txBody>
-      </p:sp>
-      <p:sp>
-        <p:nvSpPr>
-          <p:cNvPr id="10" name="Rounded Rectangle 9"/>
-          <p:cNvSpPr/>
-          <p:nvPr/>
-        </p:nvSpPr>
-        <p:spPr>
-          <a:xfrm>
-            <a:off x="8229600" y="1645920"/>
-            <a:ext cx="3410712" cy="2926080"/>
-          </a:xfrm>
-          <a:prstGeom prst="roundRect">
-            <a:avLst>
-              <a:gd name="adj" fmla="val 8000"/>
-            </a:avLst>
-          </a:prstGeom>
-          <a:solidFill>
-            <a:srgbClr val="0645AD"/>
-          </a:solidFill>
-          <a:ln>
-            <a:noFill/>
-          </a:ln>
-          <a:effectLst/>
-        </p:spPr>
-        <p:style>
-          <a:lnRef idx="1">
-            <a:schemeClr val="accent1"/>
-          </a:lnRef>
-          <a:fillRef idx="3">
-            <a:schemeClr val="accent1"/>
-          </a:fillRef>
-          <a:effectRef idx="2">
-            <a:schemeClr val="accent1"/>
-          </a:effectRef>
-          <a:fontRef idx="minor">
-            <a:schemeClr val="lt1"/>
-          </a:fontRef>
-        </p:style>
-        <p:txBody>
-          <a:bodyPr rtlCol="0" anchor="ctr"/>
-          <a:lstStyle/>
-          <a:p/>
-        </p:txBody>
-      </p:sp>
-      <p:sp>
-        <p:nvSpPr>
-          <p:cNvPr id="11" name="TextBox 10"/>
-          <p:cNvSpPr txBox="1"/>
-          <p:nvPr/>
-        </p:nvSpPr>
-        <p:spPr>
-          <a:xfrm>
-            <a:off x="8503920" y="1874519"/>
-            <a:ext cx="2926080" cy="365760"/>
-          </a:xfrm>
-          <a:prstGeom prst="rect">
-            <a:avLst/>
-          </a:prstGeom>
-          <a:noFill/>
-        </p:spPr>
-        <p:txBody>
-          <a:bodyPr wrap="square" anchor="t" lIns="0" rIns="0" tIns="0" bIns="0"/>
-          <a:lstStyle/>
-          <a:p>
-            <a:pPr algn="l"/>
-            <a:r>
-              <a:rPr sz="1300" b="1" i="0">
-                <a:solidFill>
-                  <a:srgbClr val="A9C8F0"/>
-                </a:solidFill>
-                <a:latin typeface="Calibri"/>
-              </a:rPr>
-              <a:t>REVISE THIS TOPIC</a:t>
-            </a:r>
-          </a:p>
-        </p:txBody>
-      </p:sp>
-      <p:sp>
-        <p:nvSpPr>
-          <p:cNvPr id="12" name="TextBox 11"/>
-          <p:cNvSpPr txBox="1"/>
-          <p:nvPr/>
-        </p:nvSpPr>
-        <p:spPr>
-          <a:xfrm>
-            <a:off x="8503920" y="2286000"/>
-            <a:ext cx="2926080" cy="548640"/>
-          </a:xfrm>
-          <a:prstGeom prst="rect">
-            <a:avLst/>
-          </a:prstGeom>
-          <a:noFill/>
-        </p:spPr>
-        <p:txBody>
-          <a:bodyPr wrap="square" anchor="t" lIns="0" rIns="0" tIns="0" bIns="0"/>
-          <a:lstStyle/>
-          <a:p>
-            <a:pPr algn="l"/>
-            <a:r>
-              <a:rPr sz="1400" b="0" i="0">
-                <a:solidFill>
-                  <a:srgbClr val="FFFFFF"/>
-                </a:solidFill>
-                <a:latin typeface="Calibri"/>
-              </a:rPr>
-              <a:t>Revision notes for this lesson are on the study wiki:</a:t>
-            </a:r>
-          </a:p>
-        </p:txBody>
-      </p:sp>
-      <p:sp>
-        <p:nvSpPr>
-          <p:cNvPr id="13" name="TextBox 12"/>
-          <p:cNvSpPr txBox="1"/>
-          <p:nvPr/>
-        </p:nvSpPr>
-        <p:spPr>
-          <a:xfrm>
-            <a:off x="8503920" y="2926080"/>
-            <a:ext cx="2926080" cy="1463040"/>
-          </a:xfrm>
-          <a:prstGeom prst="rect">
-            <a:avLst/>
-          </a:prstGeom>
-          <a:noFill/>
-        </p:spPr>
-        <p:txBody>
-          <a:bodyPr wrap="square" anchor="t" lIns="0" rIns="0" tIns="0" bIns="0"/>
-          <a:lstStyle/>
-          <a:p>
-            <a:pPr algn="l"/>
-            <a:r>
-              <a:rPr sz="2000" b="1" i="0">
-                <a:solidFill>
-                  <a:srgbClr val="FFFFFF"/>
-                </a:solidFill>
                 <a:latin typeface="Cambria"/>
               </a:rPr>
-              <a:t>Core Paper 1: Problem Solving, Programming, Emerging Issues and Legislation</a:t>
-            </a:r>
-          </a:p>
-        </p:txBody>
-      </p:sp>
-      <p:sp>
-        <p:nvSpPr>
-          <p:cNvPr id="14" name="TextBox 13"/>
-          <p:cNvSpPr txBox="1"/>
-          <p:nvPr/>
-        </p:nvSpPr>
-        <p:spPr>
-          <a:xfrm>
-            <a:off x="548640" y="5669280"/>
-            <a:ext cx="11094415" cy="548640"/>
-          </a:xfrm>
-          <a:prstGeom prst="rect">
-            <a:avLst/>
-          </a:prstGeom>
-          <a:noFill/>
-        </p:spPr>
-        <p:txBody>
-          <a:bodyPr wrap="square" anchor="t" lIns="0" rIns="0" tIns="0" bIns="0"/>
-          <a:lstStyle/>
-          <a:p>
-            <a:pPr algn="l"/>
-            <a:r>
-              <a:rPr sz="1200" b="0" i="0">
-                <a:solidFill>
-                  <a:srgbClr val="A9C8F0"/>
-                </a:solidFill>
-                <a:latin typeface="Calibri"/>
-              </a:rPr>
-              <a:t>https://lana6478.github.io/T-level-Digital-Software-Development/#/01-core-component/01-core-paper-1.md</a:t>
+              <a:t>Following WCAG means adding alt text to images and keyboard navigation, so blind and motor-impaired users can use your site.</a:t>
             </a:r>
           </a:p>
         </p:txBody>
